--- a/icbb-website/materials/research-methods/unit-07-slides.pptx
+++ b/icbb-website/materials/research-methods/unit-07-slides.pptx
@@ -967,7 +967,7 @@
           <a:p>
             <a:r>
               <a:rPr lang="en-US" dirty="0"/>
-              <a:t>Take-away: Reviewers check the arithmetic. A sample size stated without its inputs reads as though it was chosen first and justified afterwards.</a:t>
+              <a:t>The point: Reviewers check the arithmetic. A sample size stated without its inputs reads as though it was chosen first and justified afterwards.</a:t>
             </a:r>
             <a:endParaRPr lang="en-US" dirty="0"/>
           </a:p>
@@ -1055,7 +1055,7 @@
           <a:p>
             <a:r>
               <a:rPr lang="en-US" dirty="0"/>
-              <a:t>Take-away: Integration is the defining feature. Plan the point where the strands meet at proposal stage — it cannot be added convincingly at write-up.</a:t>
+              <a:t>The point: Integration is the defining feature. Plan the point where the strands meet at proposal stage — it cannot be added convincingly at write-up.</a:t>
             </a:r>
             <a:endParaRPr lang="en-US" dirty="0"/>
           </a:p>
@@ -1407,7 +1407,7 @@
           <a:p>
             <a:r>
               <a:rPr lang="en-US" dirty="0"/>
-              <a:t>Read these out at the start and return to them at the end of the unit.</a:t>
+              <a:t>Read these at the start, and return to them at the end of the unit.</a:t>
             </a:r>
             <a:endParaRPr lang="en-US" dirty="0"/>
           </a:p>
@@ -2127,14 +2127,14 @@
         </p:nvSpPr>
         <p:spPr>
           <a:xfrm>
-            <a:off x="0" y="0"/>
-            <a:ext cx="118872" cy="5148072"/>
+            <a:off x="566928" y="4590288"/>
+            <a:ext cx="8010144" cy="10973"/>
           </a:xfrm>
           <a:prstGeom prst="rect">
             <a:avLst/>
           </a:prstGeom>
           <a:solidFill>
-            <a:srgbClr val="0066CC"/>
+            <a:srgbClr val="D8D3CB"/>
           </a:solidFill>
           <a:ln/>
         </p:spPr>
@@ -2149,7 +2149,7 @@
         </p:nvPicPr>
         <p:blipFill>
           <a:blip r:embed="rId1">
-            <a:alphaModFix amt="18000"/>
+            <a:alphaModFix amt="38000"/>
           </a:blip>
           <a:stretch>
             <a:fillRect/>
@@ -2157,8 +2157,8 @@
         </p:blipFill>
         <p:spPr>
           <a:xfrm>
-            <a:off x="6903720" y="3977640"/>
-            <a:ext cx="1920240" cy="1280160"/>
+            <a:off x="7973568" y="4709160"/>
+            <a:ext cx="566928" cy="374904"/>
           </a:xfrm>
           <a:prstGeom prst="rect">
             <a:avLst/>
@@ -2177,8 +2177,8 @@
         </p:nvSpPr>
         <p:spPr>
           <a:xfrm>
-            <a:off x="8503920" y="4709160"/>
-            <a:ext cx="800000" cy="300000"/>
+            <a:off x="566928" y="4700016"/>
+            <a:ext cx="914400" cy="274320"/>
           </a:xfrm>
           <a:prstGeom prst="rect">
             <a:avLst/>
@@ -2193,10 +2193,13 @@
           <a:bodyPr/>
           <a:lstStyle>
             <a:lvl1pPr>
-              <a:defRPr sz="1000">
-                <a:solidFill>
-                  <a:srgbClr val="6B7280"/>
-                </a:solidFill>
+              <a:defRPr sz="900">
+                <a:solidFill>
+                  <a:srgbClr val="5F6B76"/>
+                </a:solidFill>
+                <a:latin typeface="Corbel"/>
+                <a:ea typeface="Corbel"/>
+                <a:cs typeface="Corbel"/>
               </a:defRPr>
             </a:lvl1pPr>
           </a:lstStyle>
@@ -2224,7 +2227,7 @@
     <p:bg>
       <p:bgPr>
         <a:solidFill>
-          <a:srgbClr val="004D99"/>
+          <a:srgbClr val="132330"/>
         </a:solidFill>
       </p:bgPr>
     </p:bg>
@@ -2250,14 +2253,14 @@
         </p:nvSpPr>
         <p:spPr>
           <a:xfrm>
-            <a:off x="0" y="4526280"/>
-            <a:ext cx="9144000" cy="621792"/>
+            <a:off x="685800" y="1481328"/>
+            <a:ext cx="1051560" cy="25603"/>
           </a:xfrm>
           <a:prstGeom prst="rect">
             <a:avLst/>
           </a:prstGeom>
           <a:solidFill>
-            <a:srgbClr val="00A86B"/>
+            <a:srgbClr val="9A6A3C"/>
           </a:solidFill>
           <a:ln/>
         </p:spPr>
@@ -2272,7 +2275,7 @@
         </p:nvPicPr>
         <p:blipFill>
           <a:blip r:embed="rId1">
-            <a:alphaModFix amt="75000"/>
+            <a:alphaModFix amt="45000"/>
           </a:blip>
           <a:stretch>
             <a:fillRect/>
@@ -2280,8 +2283,8 @@
         </p:blipFill>
         <p:spPr>
           <a:xfrm>
-            <a:off x="7452360" y="384048"/>
-            <a:ext cx="1371600" cy="914400"/>
+            <a:off x="7863840" y="4315968"/>
+            <a:ext cx="676656" cy="448056"/>
           </a:xfrm>
           <a:prstGeom prst="rect">
             <a:avLst/>
@@ -2325,8 +2328,8 @@
         </p:nvSpPr>
         <p:spPr>
           <a:xfrm>
-            <a:off x="8503920" y="4709160"/>
-            <a:ext cx="800000" cy="300000"/>
+            <a:off x="566928" y="4700016"/>
+            <a:ext cx="914400" cy="274320"/>
           </a:xfrm>
           <a:prstGeom prst="rect">
             <a:avLst/>
@@ -2341,10 +2344,13 @@
           <a:bodyPr/>
           <a:lstStyle>
             <a:lvl1pPr>
-              <a:defRPr sz="1000">
-                <a:solidFill>
-                  <a:srgbClr val="6B7280"/>
-                </a:solidFill>
+              <a:defRPr sz="900">
+                <a:solidFill>
+                  <a:srgbClr val="5F6B76"/>
+                </a:solidFill>
+                <a:latin typeface="Corbel"/>
+                <a:ea typeface="Corbel"/>
+                <a:cs typeface="Corbel"/>
               </a:defRPr>
             </a:lvl1pPr>
           </a:lstStyle>
@@ -2645,8 +2651,8 @@
         </p:nvSpPr>
         <p:spPr>
           <a:xfrm>
-            <a:off x="548640" y="1005840"/>
-            <a:ext cx="6675120" cy="274320"/>
+            <a:off x="685800" y="1024128"/>
+            <a:ext cx="6766560" cy="292608"/>
           </a:xfrm>
           <a:prstGeom prst="rect">
             <a:avLst/>
@@ -2662,14 +2668,17 @@
               <a:buNone/>
             </a:pPr>
             <a:r>
-              <a:rPr lang="en-US" sz="1200" b="1" spc="200" kern="0" dirty="0">
-                <a:solidFill>
-                  <a:srgbClr val="00A86B"/>
-                </a:solidFill>
-              </a:rPr>
-              <a:t>ICBB-RM101  ·  UNIT 7 OF 10</a:t>
-            </a:r>
-            <a:endParaRPr lang="en-US" sz="1200" dirty="0"/>
+              <a:rPr lang="en-US" sz="1150" spc="240" kern="0" dirty="0">
+                <a:solidFill>
+                  <a:srgbClr val="C8A67B"/>
+                </a:solidFill>
+                <a:latin typeface="Corbel" pitchFamily="34" charset="0"/>
+                <a:ea typeface="Corbel" pitchFamily="34" charset="-122"/>
+                <a:cs typeface="Corbel" pitchFamily="34" charset="-120"/>
+              </a:rPr>
+              <a:t>ICBB-RM101   ·   Unit 7 of 10</a:t>
+            </a:r>
+            <a:endParaRPr lang="en-US" sz="1150" dirty="0"/>
           </a:p>
         </p:txBody>
       </p:sp>
@@ -2681,8 +2690,8 @@
         </p:nvSpPr>
         <p:spPr>
           <a:xfrm>
-            <a:off x="548640" y="1371600"/>
-            <a:ext cx="6766560" cy="1371600"/>
+            <a:off x="685800" y="1700784"/>
+            <a:ext cx="6858000" cy="1417320"/>
           </a:xfrm>
           <a:prstGeom prst="rect">
             <a:avLst/>
@@ -2695,17 +2704,23 @@
           <a:lstStyle/>
           <a:p>
             <a:pPr indent="0" marL="0">
+              <a:lnSpc>
+                <a:spcPct val="102000"/>
+              </a:lnSpc>
               <a:buNone/>
             </a:pPr>
             <a:r>
-              <a:rPr lang="en-US" sz="3400" b="1" dirty="0">
+              <a:rPr lang="en-US" sz="3300" dirty="0">
                 <a:solidFill>
                   <a:srgbClr val="FFFFFF"/>
                 </a:solidFill>
+                <a:latin typeface="Constantia" pitchFamily="34" charset="0"/>
+                <a:ea typeface="Constantia" pitchFamily="34" charset="-122"/>
+                <a:cs typeface="Constantia" pitchFamily="34" charset="-120"/>
               </a:rPr>
               <a:t>Mixed Methods and Sampling</a:t>
             </a:r>
-            <a:endParaRPr lang="en-US" sz="3400" dirty="0"/>
+            <a:endParaRPr lang="en-US" sz="3300" dirty="0"/>
           </a:p>
         </p:txBody>
       </p:sp>
@@ -2717,8 +2732,8 @@
         </p:nvSpPr>
         <p:spPr>
           <a:xfrm>
-            <a:off x="548640" y="2788920"/>
-            <a:ext cx="6766560" cy="1188720"/>
+            <a:off x="685800" y="3127248"/>
+            <a:ext cx="6309360" cy="1051560"/>
           </a:xfrm>
           <a:prstGeom prst="rect">
             <a:avLst/>
@@ -2732,19 +2747,22 @@
           <a:p>
             <a:pPr indent="0" marL="0">
               <a:lnSpc>
-                <a:spcPct val="120000"/>
+                <a:spcPct val="128000"/>
               </a:lnSpc>
               <a:buNone/>
             </a:pPr>
             <a:r>
-              <a:rPr lang="en-US" sz="1400" dirty="0">
-                <a:solidFill>
-                  <a:srgbClr val="DCE7F5"/>
-                </a:solidFill>
+              <a:rPr lang="en-US" sz="1350" dirty="0">
+                <a:solidFill>
+                  <a:srgbClr val="B9C2CB"/>
+                </a:solidFill>
+                <a:latin typeface="Corbel" pitchFamily="34" charset="0"/>
+                <a:ea typeface="Corbel" pitchFamily="34" charset="-122"/>
+                <a:cs typeface="Corbel" pitchFamily="34" charset="-120"/>
               </a:rPr>
               <a:t>How quantitative and qualitative strands are combined deliberately rather than decoratively, and the full range of sampling strategies with the arithmetic of sample size.</a:t>
             </a:r>
-            <a:endParaRPr lang="en-US" sz="1400" dirty="0"/>
+            <a:endParaRPr lang="en-US" sz="1350" dirty="0"/>
           </a:p>
         </p:txBody>
       </p:sp>
@@ -2756,8 +2774,8 @@
         </p:nvSpPr>
         <p:spPr>
           <a:xfrm>
-            <a:off x="548640" y="4645152"/>
-            <a:ext cx="5486400" cy="365760"/>
+            <a:off x="685800" y="4407408"/>
+            <a:ext cx="4572000" cy="274320"/>
           </a:xfrm>
           <a:prstGeom prst="rect">
             <a:avLst/>
@@ -2773,14 +2791,17 @@
               <a:buNone/>
             </a:pPr>
             <a:r>
-              <a:rPr lang="en-US" sz="1200" b="1" dirty="0">
-                <a:solidFill>
-                  <a:srgbClr val="FFFFFF"/>
-                </a:solidFill>
-              </a:rPr>
-              <a:t>Jesse Anak  ·  ICBB</a:t>
-            </a:r>
-            <a:endParaRPr lang="en-US" sz="1200" dirty="0"/>
+              <a:rPr lang="en-US" sz="1050" spc="120" kern="0" dirty="0">
+                <a:solidFill>
+                  <a:srgbClr val="8894A0"/>
+                </a:solidFill>
+                <a:latin typeface="Corbel" pitchFamily="34" charset="0"/>
+                <a:ea typeface="Corbel" pitchFamily="34" charset="-122"/>
+                <a:cs typeface="Corbel" pitchFamily="34" charset="-120"/>
+              </a:rPr>
+              <a:t>Jesse Anak   ·   ICBB</a:t>
+            </a:r>
+            <a:endParaRPr lang="en-US" sz="1050" dirty="0"/>
           </a:p>
         </p:txBody>
       </p:sp>
@@ -2817,8 +2838,8 @@
         </p:nvSpPr>
         <p:spPr>
           <a:xfrm>
-            <a:off x="502920" y="292608"/>
-            <a:ext cx="8046720" cy="228600"/>
+            <a:off x="566928" y="384048"/>
+            <a:ext cx="7772400" cy="237744"/>
           </a:xfrm>
           <a:prstGeom prst="rect">
             <a:avLst/>
@@ -2834,14 +2855,17 @@
               <a:buNone/>
             </a:pPr>
             <a:r>
-              <a:rPr lang="en-US" sz="1100" b="1" spc="150" kern="0" dirty="0">
-                <a:solidFill>
-                  <a:srgbClr val="0066CC"/>
-                </a:solidFill>
+              <a:rPr lang="en-US" sz="1000" spc="200" kern="0" dirty="0">
+                <a:solidFill>
+                  <a:srgbClr val="9A6A3C"/>
+                </a:solidFill>
+                <a:latin typeface="Corbel" pitchFamily="34" charset="0"/>
+                <a:ea typeface="Corbel" pitchFamily="34" charset="-122"/>
+                <a:cs typeface="Corbel" pitchFamily="34" charset="-120"/>
               </a:rPr>
               <a:t>UNIT 7</a:t>
             </a:r>
-            <a:endParaRPr lang="en-US" sz="1100" dirty="0"/>
+            <a:endParaRPr lang="en-US" sz="1000" dirty="0"/>
           </a:p>
         </p:txBody>
       </p:sp>
@@ -2853,8 +2877,8 @@
         </p:nvSpPr>
         <p:spPr>
           <a:xfrm>
-            <a:off x="502920" y="548640"/>
-            <a:ext cx="8046720" cy="640080"/>
+            <a:off x="566928" y="658368"/>
+            <a:ext cx="7772400" cy="658368"/>
           </a:xfrm>
           <a:prstGeom prst="rect">
             <a:avLst/>
@@ -2867,30 +2891,56 @@
           <a:lstStyle/>
           <a:p>
             <a:pPr indent="0" marL="0">
+              <a:lnSpc>
+                <a:spcPct val="100000"/>
+              </a:lnSpc>
               <a:buNone/>
             </a:pPr>
             <a:r>
-              <a:rPr lang="en-US" sz="2400" b="1" dirty="0">
-                <a:solidFill>
-                  <a:srgbClr val="111827"/>
-                </a:solidFill>
+              <a:rPr lang="en-US" sz="2500" dirty="0">
+                <a:solidFill>
+                  <a:srgbClr val="1C3140"/>
+                </a:solidFill>
+                <a:latin typeface="Constantia" pitchFamily="34" charset="0"/>
+                <a:ea typeface="Constantia" pitchFamily="34" charset="-122"/>
+                <a:cs typeface="Constantia" pitchFamily="34" charset="-120"/>
               </a:rPr>
               <a:t>Sample size (1/2)</a:t>
             </a:r>
-            <a:endParaRPr lang="en-US" sz="2400" dirty="0"/>
-          </a:p>
-        </p:txBody>
-      </p:sp>
-      <p:sp>
-        <p:nvSpPr>
-          <p:cNvPr id="4" name="Text 2"/>
+            <a:endParaRPr lang="en-US" sz="2500" dirty="0"/>
+          </a:p>
+        </p:txBody>
+      </p:sp>
+      <p:sp>
+        <p:nvSpPr>
+          <p:cNvPr id="4" name="Shape 2"/>
           <p:cNvSpPr/>
           <p:nvPr/>
         </p:nvSpPr>
         <p:spPr>
           <a:xfrm>
-            <a:off x="685800" y="1325880"/>
-            <a:ext cx="7772400" cy="3200400"/>
+            <a:off x="566928" y="1335024"/>
+            <a:ext cx="566928" cy="20117"/>
+          </a:xfrm>
+          <a:prstGeom prst="rect">
+            <a:avLst/>
+          </a:prstGeom>
+          <a:solidFill>
+            <a:srgbClr val="9A6A3C"/>
+          </a:solidFill>
+          <a:ln/>
+        </p:spPr>
+      </p:sp>
+      <p:sp>
+        <p:nvSpPr>
+          <p:cNvPr id="5" name="Text 3"/>
+          <p:cNvSpPr/>
+          <p:nvPr/>
+        </p:nvSpPr>
+        <p:spPr>
+          <a:xfrm>
+            <a:off x="713232" y="1664208"/>
+            <a:ext cx="7498080" cy="2788920"/>
           </a:xfrm>
           <a:prstGeom prst="rect">
             <a:avLst/>
@@ -2904,19 +2954,22 @@
           <a:p>
             <a:pPr marL="342900" indent="-342900">
               <a:lnSpc>
-                <a:spcPct val="125000"/>
+                <a:spcPct val="130000"/>
               </a:lnSpc>
               <a:spcAft>
-                <a:spcPts val="800"/>
+                <a:spcPts val="1100"/>
               </a:spcAft>
               <a:buSzPct val="100000"/>
-              <a:buChar char="•"/>
+              <a:buChar char="–"/>
             </a:pPr>
             <a:r>
               <a:rPr lang="en-US" sz="1500" dirty="0">
                 <a:solidFill>
-                  <a:srgbClr val="374151"/>
-                </a:solidFill>
+                  <a:srgbClr val="23282E"/>
+                </a:solidFill>
+                <a:latin typeface="Corbel" pitchFamily="34" charset="0"/>
+                <a:ea typeface="Corbel" pitchFamily="34" charset="-122"/>
+                <a:cs typeface="Corbel" pitchFamily="34" charset="-120"/>
               </a:rPr>
               <a:t>For a single proportion: n = Z²p(1-p)/d², where Z is 1.96 for 95% confidence, p the expected proportion, d the desired margin of error</a:t>
             </a:r>
@@ -2925,19 +2978,22 @@
           <a:p>
             <a:pPr marL="342900" indent="-342900">
               <a:lnSpc>
-                <a:spcPct val="125000"/>
+                <a:spcPct val="130000"/>
               </a:lnSpc>
               <a:spcAft>
-                <a:spcPts val="800"/>
+                <a:spcPts val="1100"/>
               </a:spcAft>
               <a:buSzPct val="100000"/>
-              <a:buChar char="•"/>
+              <a:buChar char="–"/>
             </a:pPr>
             <a:r>
               <a:rPr lang="en-US" sz="1500" dirty="0">
                 <a:solidFill>
-                  <a:srgbClr val="374151"/>
-                </a:solidFill>
+                  <a:srgbClr val="23282E"/>
+                </a:solidFill>
+                <a:latin typeface="Corbel" pitchFamily="34" charset="0"/>
+                <a:ea typeface="Corbel" pitchFamily="34" charset="-122"/>
+                <a:cs typeface="Corbel" pitchFamily="34" charset="-120"/>
               </a:rPr>
               <a:t>Worked example: p = 0.30, d = 0.05 gives n = (1.96² x 0.30 x 0.70)/0.05² = 323</a:t>
             </a:r>
@@ -2946,19 +3002,22 @@
           <a:p>
             <a:pPr marL="342900" indent="-342900">
               <a:lnSpc>
-                <a:spcPct val="125000"/>
+                <a:spcPct val="130000"/>
               </a:lnSpc>
               <a:spcAft>
-                <a:spcPts val="800"/>
+                <a:spcPts val="1100"/>
               </a:spcAft>
               <a:buSzPct val="100000"/>
-              <a:buChar char="•"/>
+              <a:buChar char="–"/>
             </a:pPr>
             <a:r>
               <a:rPr lang="en-US" sz="1500" dirty="0">
                 <a:solidFill>
-                  <a:srgbClr val="374151"/>
-                </a:solidFill>
+                  <a:srgbClr val="23282E"/>
+                </a:solidFill>
+                <a:latin typeface="Corbel" pitchFamily="34" charset="0"/>
+                <a:ea typeface="Corbel" pitchFamily="34" charset="-122"/>
+                <a:cs typeface="Corbel" pitchFamily="34" charset="-120"/>
               </a:rPr>
               <a:t>Using p = 0.50 when the proportion is unknown gives the largest, safest sample</a:t>
             </a:r>
@@ -2967,19 +3026,22 @@
           <a:p>
             <a:pPr marL="342900" indent="-342900">
               <a:lnSpc>
-                <a:spcPct val="125000"/>
+                <a:spcPct val="130000"/>
               </a:lnSpc>
               <a:spcAft>
-                <a:spcPts val="800"/>
+                <a:spcPts val="1100"/>
               </a:spcAft>
               <a:buSzPct val="100000"/>
-              <a:buChar char="•"/>
+              <a:buChar char="–"/>
             </a:pPr>
             <a:r>
               <a:rPr lang="en-US" sz="1500" dirty="0">
                 <a:solidFill>
-                  <a:srgbClr val="374151"/>
-                </a:solidFill>
+                  <a:srgbClr val="23282E"/>
+                </a:solidFill>
+                <a:latin typeface="Corbel" pitchFamily="34" charset="0"/>
+                <a:ea typeface="Corbel" pitchFamily="34" charset="-122"/>
+                <a:cs typeface="Corbel" pitchFamily="34" charset="-120"/>
               </a:rPr>
               <a:t>For comparing two proportions or means, size depends on the effect you wish to detect, the significance level and the power</a:t>
             </a:r>
@@ -2999,8 +3061,8 @@
         </p:nvSpPr>
         <p:spPr>
           <a:xfrm>
-            <a:off x="8503920" y="4709160"/>
-            <a:ext cx="800000" cy="300000"/>
+            <a:off x="566928" y="4700016"/>
+            <a:ext cx="914400" cy="274320"/>
           </a:xfrm>
           <a:prstGeom prst="rect">
             <a:avLst/>
@@ -3015,10 +3077,13 @@
           <a:bodyPr/>
           <a:lstStyle>
             <a:lvl1pPr>
-              <a:defRPr sz="1000">
-                <a:solidFill>
-                  <a:srgbClr val="6B7280"/>
-                </a:solidFill>
+              <a:defRPr sz="900">
+                <a:solidFill>
+                  <a:srgbClr val="5F6B76"/>
+                </a:solidFill>
+                <a:latin typeface="Corbel"/>
+                <a:ea typeface="Corbel"/>
+                <a:cs typeface="Corbel"/>
               </a:defRPr>
             </a:lvl1pPr>
           </a:lstStyle>
@@ -3065,8 +3130,8 @@
         </p:nvSpPr>
         <p:spPr>
           <a:xfrm>
-            <a:off x="502920" y="292608"/>
-            <a:ext cx="8046720" cy="228600"/>
+            <a:off x="566928" y="384048"/>
+            <a:ext cx="7772400" cy="237744"/>
           </a:xfrm>
           <a:prstGeom prst="rect">
             <a:avLst/>
@@ -3082,14 +3147,17 @@
               <a:buNone/>
             </a:pPr>
             <a:r>
-              <a:rPr lang="en-US" sz="1100" b="1" spc="150" kern="0" dirty="0">
-                <a:solidFill>
-                  <a:srgbClr val="0066CC"/>
-                </a:solidFill>
+              <a:rPr lang="en-US" sz="1000" spc="200" kern="0" dirty="0">
+                <a:solidFill>
+                  <a:srgbClr val="9A6A3C"/>
+                </a:solidFill>
+                <a:latin typeface="Corbel" pitchFamily="34" charset="0"/>
+                <a:ea typeface="Corbel" pitchFamily="34" charset="-122"/>
+                <a:cs typeface="Corbel" pitchFamily="34" charset="-120"/>
               </a:rPr>
               <a:t>UNIT 7</a:t>
             </a:r>
-            <a:endParaRPr lang="en-US" sz="1100" dirty="0"/>
+            <a:endParaRPr lang="en-US" sz="1000" dirty="0"/>
           </a:p>
         </p:txBody>
       </p:sp>
@@ -3101,8 +3169,8 @@
         </p:nvSpPr>
         <p:spPr>
           <a:xfrm>
-            <a:off x="502920" y="548640"/>
-            <a:ext cx="8046720" cy="640080"/>
+            <a:off x="566928" y="658368"/>
+            <a:ext cx="7772400" cy="658368"/>
           </a:xfrm>
           <a:prstGeom prst="rect">
             <a:avLst/>
@@ -3115,30 +3183,56 @@
           <a:lstStyle/>
           <a:p>
             <a:pPr indent="0" marL="0">
+              <a:lnSpc>
+                <a:spcPct val="100000"/>
+              </a:lnSpc>
               <a:buNone/>
             </a:pPr>
             <a:r>
-              <a:rPr lang="en-US" sz="2400" b="1" dirty="0">
-                <a:solidFill>
-                  <a:srgbClr val="111827"/>
-                </a:solidFill>
+              <a:rPr lang="en-US" sz="2500" dirty="0">
+                <a:solidFill>
+                  <a:srgbClr val="1C3140"/>
+                </a:solidFill>
+                <a:latin typeface="Constantia" pitchFamily="34" charset="0"/>
+                <a:ea typeface="Constantia" pitchFamily="34" charset="-122"/>
+                <a:cs typeface="Constantia" pitchFamily="34" charset="-120"/>
               </a:rPr>
               <a:t>Sample size (2/2)</a:t>
             </a:r>
-            <a:endParaRPr lang="en-US" sz="2400" dirty="0"/>
-          </a:p>
-        </p:txBody>
-      </p:sp>
-      <p:sp>
-        <p:nvSpPr>
-          <p:cNvPr id="4" name="Text 2"/>
+            <a:endParaRPr lang="en-US" sz="2500" dirty="0"/>
+          </a:p>
+        </p:txBody>
+      </p:sp>
+      <p:sp>
+        <p:nvSpPr>
+          <p:cNvPr id="4" name="Shape 2"/>
           <p:cNvSpPr/>
           <p:nvPr/>
         </p:nvSpPr>
         <p:spPr>
           <a:xfrm>
-            <a:off x="685800" y="1325880"/>
-            <a:ext cx="7772400" cy="3200400"/>
+            <a:off x="566928" y="1335024"/>
+            <a:ext cx="566928" cy="20117"/>
+          </a:xfrm>
+          <a:prstGeom prst="rect">
+            <a:avLst/>
+          </a:prstGeom>
+          <a:solidFill>
+            <a:srgbClr val="9A6A3C"/>
+          </a:solidFill>
+          <a:ln/>
+        </p:spPr>
+      </p:sp>
+      <p:sp>
+        <p:nvSpPr>
+          <p:cNvPr id="5" name="Text 3"/>
+          <p:cNvSpPr/>
+          <p:nvPr/>
+        </p:nvSpPr>
+        <p:spPr>
+          <a:xfrm>
+            <a:off x="713232" y="1664208"/>
+            <a:ext cx="7498080" cy="2788920"/>
           </a:xfrm>
           <a:prstGeom prst="rect">
             <a:avLst/>
@@ -3152,65 +3246,74 @@
           <a:p>
             <a:pPr marL="342900" indent="-342900">
               <a:lnSpc>
-                <a:spcPct val="125000"/>
+                <a:spcPct val="130000"/>
               </a:lnSpc>
               <a:spcAft>
-                <a:spcPts val="800"/>
+                <a:spcPts val="1100"/>
               </a:spcAft>
               <a:buSzPct val="100000"/>
-              <a:buChar char="•"/>
-            </a:pPr>
-            <a:r>
-              <a:rPr lang="en-US" sz="1300" dirty="0">
-                <a:solidFill>
-                  <a:srgbClr val="374151"/>
-                </a:solidFill>
+              <a:buChar char="–"/>
+            </a:pPr>
+            <a:r>
+              <a:rPr lang="en-US" sz="1350" dirty="0">
+                <a:solidFill>
+                  <a:srgbClr val="23282E"/>
+                </a:solidFill>
+                <a:latin typeface="Corbel" pitchFamily="34" charset="0"/>
+                <a:ea typeface="Corbel" pitchFamily="34" charset="-122"/>
+                <a:cs typeface="Corbel" pitchFamily="34" charset="-120"/>
               </a:rPr>
               <a:t>Power is the probability of detecting a real effect; 80% is conventional and 90% is preferable</a:t>
             </a:r>
-            <a:endParaRPr lang="en-US" sz="1300" dirty="0"/>
+            <a:endParaRPr lang="en-US" sz="1350" dirty="0"/>
           </a:p>
           <a:p>
             <a:pPr marL="342900" indent="-342900">
               <a:lnSpc>
-                <a:spcPct val="125000"/>
+                <a:spcPct val="130000"/>
               </a:lnSpc>
               <a:spcAft>
-                <a:spcPts val="800"/>
+                <a:spcPts val="1100"/>
               </a:spcAft>
               <a:buSzPct val="100000"/>
-              <a:buChar char="•"/>
-            </a:pPr>
-            <a:r>
-              <a:rPr lang="en-US" sz="1300" dirty="0">
-                <a:solidFill>
-                  <a:srgbClr val="374151"/>
-                </a:solidFill>
+              <a:buChar char="–"/>
+            </a:pPr>
+            <a:r>
+              <a:rPr lang="en-US" sz="1350" dirty="0">
+                <a:solidFill>
+                  <a:srgbClr val="23282E"/>
+                </a:solidFill>
+                <a:latin typeface="Corbel" pitchFamily="34" charset="0"/>
+                <a:ea typeface="Corbel" pitchFamily="34" charset="-122"/>
+                <a:cs typeface="Corbel" pitchFamily="34" charset="-120"/>
               </a:rPr>
               <a:t>An underpowered study is not merely inconclusive — it is arguably unethical, since participants were exposed to burden for a result that could not have been informative</a:t>
             </a:r>
-            <a:endParaRPr lang="en-US" sz="1300" dirty="0"/>
+            <a:endParaRPr lang="en-US" sz="1350" dirty="0"/>
           </a:p>
           <a:p>
             <a:pPr marL="342900" indent="-342900">
               <a:lnSpc>
-                <a:spcPct val="125000"/>
+                <a:spcPct val="130000"/>
               </a:lnSpc>
               <a:spcAft>
-                <a:spcPts val="800"/>
+                <a:spcPts val="1100"/>
               </a:spcAft>
               <a:buSzPct val="100000"/>
-              <a:buChar char="•"/>
-            </a:pPr>
-            <a:r>
-              <a:rPr lang="en-US" sz="1300" dirty="0">
-                <a:solidFill>
-                  <a:srgbClr val="374151"/>
-                </a:solidFill>
+              <a:buChar char="–"/>
+            </a:pPr>
+            <a:r>
+              <a:rPr lang="en-US" sz="1350" dirty="0">
+                <a:solidFill>
+                  <a:srgbClr val="23282E"/>
+                </a:solidFill>
+                <a:latin typeface="Corbel" pitchFamily="34" charset="0"/>
+                <a:ea typeface="Corbel" pitchFamily="34" charset="-122"/>
+                <a:cs typeface="Corbel" pitchFamily="34" charset="-120"/>
               </a:rPr>
               <a:t>Apply a finite population correction when the sample is a large fraction of a small population</a:t>
             </a:r>
-            <a:endParaRPr lang="en-US" sz="1300" dirty="0"/>
+            <a:endParaRPr lang="en-US" sz="1350" dirty="0"/>
           </a:p>
         </p:txBody>
       </p:sp>
@@ -3226,8 +3329,8 @@
         </p:nvSpPr>
         <p:spPr>
           <a:xfrm>
-            <a:off x="8503920" y="4709160"/>
-            <a:ext cx="800000" cy="300000"/>
+            <a:off x="566928" y="4700016"/>
+            <a:ext cx="914400" cy="274320"/>
           </a:xfrm>
           <a:prstGeom prst="rect">
             <a:avLst/>
@@ -3242,10 +3345,13 @@
           <a:bodyPr/>
           <a:lstStyle>
             <a:lvl1pPr>
-              <a:defRPr sz="1000">
-                <a:solidFill>
-                  <a:srgbClr val="6B7280"/>
-                </a:solidFill>
+              <a:defRPr sz="900">
+                <a:solidFill>
+                  <a:srgbClr val="5F6B76"/>
+                </a:solidFill>
+                <a:latin typeface="Corbel"/>
+                <a:ea typeface="Corbel"/>
+                <a:cs typeface="Corbel"/>
               </a:defRPr>
             </a:lvl1pPr>
           </a:lstStyle>
@@ -3292,8 +3398,8 @@
         </p:nvSpPr>
         <p:spPr>
           <a:xfrm>
-            <a:off x="502920" y="292608"/>
-            <a:ext cx="8046720" cy="228600"/>
+            <a:off x="566928" y="384048"/>
+            <a:ext cx="7772400" cy="237744"/>
           </a:xfrm>
           <a:prstGeom prst="rect">
             <a:avLst/>
@@ -3309,14 +3415,17 @@
               <a:buNone/>
             </a:pPr>
             <a:r>
-              <a:rPr lang="en-US" sz="1100" b="1" spc="150" kern="0" dirty="0">
-                <a:solidFill>
-                  <a:srgbClr val="0066CC"/>
-                </a:solidFill>
+              <a:rPr lang="en-US" sz="1000" spc="200" kern="0" dirty="0">
+                <a:solidFill>
+                  <a:srgbClr val="9A6A3C"/>
+                </a:solidFill>
+                <a:latin typeface="Corbel" pitchFamily="34" charset="0"/>
+                <a:ea typeface="Corbel" pitchFamily="34" charset="-122"/>
+                <a:cs typeface="Corbel" pitchFamily="34" charset="-120"/>
               </a:rPr>
               <a:t>UNIT 7</a:t>
             </a:r>
-            <a:endParaRPr lang="en-US" sz="1100" dirty="0"/>
+            <a:endParaRPr lang="en-US" sz="1000" dirty="0"/>
           </a:p>
         </p:txBody>
       </p:sp>
@@ -3328,8 +3437,8 @@
         </p:nvSpPr>
         <p:spPr>
           <a:xfrm>
-            <a:off x="502920" y="548640"/>
-            <a:ext cx="8046720" cy="548640"/>
+            <a:off x="566928" y="658368"/>
+            <a:ext cx="7772400" cy="658368"/>
           </a:xfrm>
           <a:prstGeom prst="rect">
             <a:avLst/>
@@ -3342,19 +3451,45 @@
           <a:lstStyle/>
           <a:p>
             <a:pPr indent="0" marL="0">
+              <a:lnSpc>
+                <a:spcPct val="100000"/>
+              </a:lnSpc>
               <a:buNone/>
             </a:pPr>
             <a:r>
-              <a:rPr lang="en-US" sz="2200" b="1" dirty="0">
-                <a:solidFill>
-                  <a:srgbClr val="111827"/>
-                </a:solidFill>
+              <a:rPr lang="en-US" sz="2500" dirty="0">
+                <a:solidFill>
+                  <a:srgbClr val="1C3140"/>
+                </a:solidFill>
+                <a:latin typeface="Constantia" pitchFamily="34" charset="0"/>
+                <a:ea typeface="Constantia" pitchFamily="34" charset="-122"/>
+                <a:cs typeface="Constantia" pitchFamily="34" charset="-120"/>
               </a:rPr>
               <a:t>Adjusting the calculated sample</a:t>
             </a:r>
-            <a:endParaRPr lang="en-US" sz="2200" dirty="0"/>
-          </a:p>
-        </p:txBody>
+            <a:endParaRPr lang="en-US" sz="2500" dirty="0"/>
+          </a:p>
+        </p:txBody>
+      </p:sp>
+      <p:sp>
+        <p:nvSpPr>
+          <p:cNvPr id="4" name="Shape 2"/>
+          <p:cNvSpPr/>
+          <p:nvPr/>
+        </p:nvSpPr>
+        <p:spPr>
+          <a:xfrm>
+            <a:off x="566928" y="1335024"/>
+            <a:ext cx="566928" cy="20117"/>
+          </a:xfrm>
+          <a:prstGeom prst="rect">
+            <a:avLst/>
+          </a:prstGeom>
+          <a:solidFill>
+            <a:srgbClr val="9A6A3C"/>
+          </a:solidFill>
+          <a:ln/>
+        </p:spPr>
       </p:sp>
       <p:graphicFrame>
         <p:nvGraphicFramePr>
@@ -3371,17 +3506,17 @@
           </p:nvPr>
         </p:nvGraphicFramePr>
         <p:xfrm>
-          <a:off x="502920" y="1234440"/>
-          <a:ext cx="8138160" cy="914400"/>
+          <a:off x="566928" y="1627632"/>
+          <a:ext cx="8010144" cy="914400"/>
         </p:xfrm>
         <a:graphic>
           <a:graphicData uri="http://schemas.openxmlformats.org/drawingml/2006/table">
             <a:tbl>
               <a:tblPr/>
               <a:tblGrid>
-                <a:gridCol w="2712720"/>
-                <a:gridCol w="2712720"/>
-                <a:gridCol w="2712720"/>
+                <a:gridCol w="2670048"/>
+                <a:gridCol w="2670048"/>
+                <a:gridCol w="2670048"/>
               </a:tblGrid>
               <a:tr h="0">
                 <a:tc>
@@ -3395,45 +3530,52 @@
                       <a:r>
                         <a:rPr lang="en-US" sz="1100" b="1" dirty="0">
                           <a:solidFill>
-                            <a:srgbClr val="FFFFFF"/>
+                            <a:srgbClr val="1C3140"/>
                           </a:solidFill>
+                          <a:latin typeface="Corbel" pitchFamily="34" charset="0"/>
+                          <a:ea typeface="Corbel" pitchFamily="34" charset="-122"/>
+                          <a:cs typeface="Corbel" pitchFamily="34" charset="-120"/>
                         </a:rPr>
                         <a:t>Adjustment</a:t>
                       </a:r>
-                      <a:endParaRPr lang="en-US" sz="1100" dirty="0"/>
+                      <a:endParaRPr lang="en-US" sz="1100" dirty="0">
+                        <a:latin typeface="Corbel" charset="0"/>
+                        <a:ea typeface="Corbel" charset="0"/>
+                        <a:cs typeface="Corbel" charset="0"/>
+                      </a:endParaRPr>
                     </a:p>
                   </a:txBody>
-                  <a:tcPr marL="91440" marR="91440" marT="45720" marB="45720" anchor="t">
-                    <a:lnL w="6350" cap="flat" cmpd="sng" algn="ctr">
+                  <a:tcPr marL="76200" marR="76200" marT="76200" marB="76200" anchor="t">
+                    <a:lnL w="5080" cap="flat" cmpd="sng" algn="ctr">
                       <a:solidFill>
-                        <a:srgbClr val="D1D5DB"/>
+                        <a:srgbClr val="D8D3CB"/>
                       </a:solidFill>
                       <a:prstDash val="solid"/>
                       <a:round/>
                       <a:headEnd type="none" w="med" len="med"/>
                       <a:tailEnd type="none" w="med" len="med"/>
                     </a:lnL>
-                    <a:lnR w="6350" cap="flat" cmpd="sng" algn="ctr">
+                    <a:lnR w="5080" cap="flat" cmpd="sng" algn="ctr">
                       <a:solidFill>
-                        <a:srgbClr val="D1D5DB"/>
+                        <a:srgbClr val="D8D3CB"/>
                       </a:solidFill>
                       <a:prstDash val="solid"/>
                       <a:round/>
                       <a:headEnd type="none" w="med" len="med"/>
                       <a:tailEnd type="none" w="med" len="med"/>
                     </a:lnR>
-                    <a:lnT w="6350" cap="flat" cmpd="sng" algn="ctr">
+                    <a:lnT w="5080" cap="flat" cmpd="sng" algn="ctr">
                       <a:solidFill>
-                        <a:srgbClr val="D1D5DB"/>
+                        <a:srgbClr val="D8D3CB"/>
                       </a:solidFill>
                       <a:prstDash val="solid"/>
                       <a:round/>
                       <a:headEnd type="none" w="med" len="med"/>
                       <a:tailEnd type="none" w="med" len="med"/>
                     </a:lnT>
-                    <a:lnB w="6350" cap="flat" cmpd="sng" algn="ctr">
+                    <a:lnB w="5080" cap="flat" cmpd="sng" algn="ctr">
                       <a:solidFill>
-                        <a:srgbClr val="D1D5DB"/>
+                        <a:srgbClr val="D8D3CB"/>
                       </a:solidFill>
                       <a:prstDash val="solid"/>
                       <a:round/>
@@ -3441,7 +3583,7 @@
                       <a:tailEnd type="none" w="med" len="med"/>
                     </a:lnB>
                     <a:solidFill>
-                      <a:srgbClr val="004D99"/>
+                      <a:srgbClr val="F6F4F0"/>
                     </a:solidFill>
                   </a:tcPr>
                 </a:tc>
@@ -3456,45 +3598,52 @@
                       <a:r>
                         <a:rPr lang="en-US" sz="1100" b="1" dirty="0">
                           <a:solidFill>
-                            <a:srgbClr val="FFFFFF"/>
+                            <a:srgbClr val="1C3140"/>
                           </a:solidFill>
+                          <a:latin typeface="Corbel" pitchFamily="34" charset="0"/>
+                          <a:ea typeface="Corbel" pitchFamily="34" charset="-122"/>
+                          <a:cs typeface="Corbel" pitchFamily="34" charset="-120"/>
                         </a:rPr>
                         <a:t>When it applies</a:t>
                       </a:r>
-                      <a:endParaRPr lang="en-US" sz="1100" dirty="0"/>
+                      <a:endParaRPr lang="en-US" sz="1100" dirty="0">
+                        <a:latin typeface="Corbel" charset="0"/>
+                        <a:ea typeface="Corbel" charset="0"/>
+                        <a:cs typeface="Corbel" charset="0"/>
+                      </a:endParaRPr>
                     </a:p>
                   </a:txBody>
-                  <a:tcPr marL="91440" marR="91440" marT="45720" marB="45720" anchor="t">
-                    <a:lnL w="6350" cap="flat" cmpd="sng" algn="ctr">
+                  <a:tcPr marL="76200" marR="76200" marT="76200" marB="76200" anchor="t">
+                    <a:lnL w="5080" cap="flat" cmpd="sng" algn="ctr">
                       <a:solidFill>
-                        <a:srgbClr val="D1D5DB"/>
+                        <a:srgbClr val="D8D3CB"/>
                       </a:solidFill>
                       <a:prstDash val="solid"/>
                       <a:round/>
                       <a:headEnd type="none" w="med" len="med"/>
                       <a:tailEnd type="none" w="med" len="med"/>
                     </a:lnL>
-                    <a:lnR w="6350" cap="flat" cmpd="sng" algn="ctr">
+                    <a:lnR w="5080" cap="flat" cmpd="sng" algn="ctr">
                       <a:solidFill>
-                        <a:srgbClr val="D1D5DB"/>
+                        <a:srgbClr val="D8D3CB"/>
                       </a:solidFill>
                       <a:prstDash val="solid"/>
                       <a:round/>
                       <a:headEnd type="none" w="med" len="med"/>
                       <a:tailEnd type="none" w="med" len="med"/>
                     </a:lnR>
-                    <a:lnT w="6350" cap="flat" cmpd="sng" algn="ctr">
+                    <a:lnT w="5080" cap="flat" cmpd="sng" algn="ctr">
                       <a:solidFill>
-                        <a:srgbClr val="D1D5DB"/>
+                        <a:srgbClr val="D8D3CB"/>
                       </a:solidFill>
                       <a:prstDash val="solid"/>
                       <a:round/>
                       <a:headEnd type="none" w="med" len="med"/>
                       <a:tailEnd type="none" w="med" len="med"/>
                     </a:lnT>
-                    <a:lnB w="6350" cap="flat" cmpd="sng" algn="ctr">
+                    <a:lnB w="5080" cap="flat" cmpd="sng" algn="ctr">
                       <a:solidFill>
-                        <a:srgbClr val="D1D5DB"/>
+                        <a:srgbClr val="D8D3CB"/>
                       </a:solidFill>
                       <a:prstDash val="solid"/>
                       <a:round/>
@@ -3502,7 +3651,7 @@
                       <a:tailEnd type="none" w="med" len="med"/>
                     </a:lnB>
                     <a:solidFill>
-                      <a:srgbClr val="004D99"/>
+                      <a:srgbClr val="F6F4F0"/>
                     </a:solidFill>
                   </a:tcPr>
                 </a:tc>
@@ -3517,45 +3666,52 @@
                       <a:r>
                         <a:rPr lang="en-US" sz="1100" b="1" dirty="0">
                           <a:solidFill>
-                            <a:srgbClr val="FFFFFF"/>
+                            <a:srgbClr val="1C3140"/>
                           </a:solidFill>
+                          <a:latin typeface="Corbel" pitchFamily="34" charset="0"/>
+                          <a:ea typeface="Corbel" pitchFamily="34" charset="-122"/>
+                          <a:cs typeface="Corbel" pitchFamily="34" charset="-120"/>
                         </a:rPr>
                         <a:t>Formula</a:t>
                       </a:r>
-                      <a:endParaRPr lang="en-US" sz="1100" dirty="0"/>
+                      <a:endParaRPr lang="en-US" sz="1100" dirty="0">
+                        <a:latin typeface="Corbel" charset="0"/>
+                        <a:ea typeface="Corbel" charset="0"/>
+                        <a:cs typeface="Corbel" charset="0"/>
+                      </a:endParaRPr>
                     </a:p>
                   </a:txBody>
-                  <a:tcPr marL="91440" marR="91440" marT="45720" marB="45720" anchor="t">
-                    <a:lnL w="6350" cap="flat" cmpd="sng" algn="ctr">
+                  <a:tcPr marL="76200" marR="76200" marT="76200" marB="76200" anchor="t">
+                    <a:lnL w="5080" cap="flat" cmpd="sng" algn="ctr">
                       <a:solidFill>
-                        <a:srgbClr val="D1D5DB"/>
+                        <a:srgbClr val="D8D3CB"/>
                       </a:solidFill>
                       <a:prstDash val="solid"/>
                       <a:round/>
                       <a:headEnd type="none" w="med" len="med"/>
                       <a:tailEnd type="none" w="med" len="med"/>
                     </a:lnL>
-                    <a:lnR w="6350" cap="flat" cmpd="sng" algn="ctr">
+                    <a:lnR w="5080" cap="flat" cmpd="sng" algn="ctr">
                       <a:solidFill>
-                        <a:srgbClr val="D1D5DB"/>
+                        <a:srgbClr val="D8D3CB"/>
                       </a:solidFill>
                       <a:prstDash val="solid"/>
                       <a:round/>
                       <a:headEnd type="none" w="med" len="med"/>
                       <a:tailEnd type="none" w="med" len="med"/>
                     </a:lnR>
-                    <a:lnT w="6350" cap="flat" cmpd="sng" algn="ctr">
+                    <a:lnT w="5080" cap="flat" cmpd="sng" algn="ctr">
                       <a:solidFill>
-                        <a:srgbClr val="D1D5DB"/>
+                        <a:srgbClr val="D8D3CB"/>
                       </a:solidFill>
                       <a:prstDash val="solid"/>
                       <a:round/>
                       <a:headEnd type="none" w="med" len="med"/>
                       <a:tailEnd type="none" w="med" len="med"/>
                     </a:lnT>
-                    <a:lnB w="6350" cap="flat" cmpd="sng" algn="ctr">
+                    <a:lnB w="5080" cap="flat" cmpd="sng" algn="ctr">
                       <a:solidFill>
-                        <a:srgbClr val="D1D5DB"/>
+                        <a:srgbClr val="D8D3CB"/>
                       </a:solidFill>
                       <a:prstDash val="solid"/>
                       <a:round/>
@@ -3563,7 +3719,7 @@
                       <a:tailEnd type="none" w="med" len="med"/>
                     </a:lnB>
                     <a:solidFill>
-                      <a:srgbClr val="004D99"/>
+                      <a:srgbClr val="F6F4F0"/>
                     </a:solidFill>
                   </a:tcPr>
                 </a:tc>
@@ -3580,45 +3736,52 @@
                       <a:r>
                         <a:rPr lang="en-US" sz="1100" dirty="0">
                           <a:solidFill>
-                            <a:srgbClr val="374151"/>
+                            <a:srgbClr val="23282E"/>
                           </a:solidFill>
+                          <a:latin typeface="Corbel" pitchFamily="34" charset="0"/>
+                          <a:ea typeface="Corbel" pitchFamily="34" charset="-122"/>
+                          <a:cs typeface="Corbel" pitchFamily="34" charset="-120"/>
                         </a:rPr>
                         <a:t>Non-response</a:t>
                       </a:r>
-                      <a:endParaRPr lang="en-US" sz="1100" dirty="0"/>
+                      <a:endParaRPr lang="en-US" sz="1100" dirty="0">
+                        <a:latin typeface="Corbel" charset="0"/>
+                        <a:ea typeface="Corbel" charset="0"/>
+                        <a:cs typeface="Corbel" charset="0"/>
+                      </a:endParaRPr>
                     </a:p>
                   </a:txBody>
-                  <a:tcPr marL="91440" marR="91440" marT="45720" marB="45720" anchor="t">
-                    <a:lnL w="6350" cap="flat" cmpd="sng" algn="ctr">
+                  <a:tcPr marL="76200" marR="76200" marT="76200" marB="76200" anchor="t">
+                    <a:lnL w="5080" cap="flat" cmpd="sng" algn="ctr">
                       <a:solidFill>
-                        <a:srgbClr val="D1D5DB"/>
+                        <a:srgbClr val="D8D3CB"/>
                       </a:solidFill>
                       <a:prstDash val="solid"/>
                       <a:round/>
                       <a:headEnd type="none" w="med" len="med"/>
                       <a:tailEnd type="none" w="med" len="med"/>
                     </a:lnL>
-                    <a:lnR w="6350" cap="flat" cmpd="sng" algn="ctr">
+                    <a:lnR w="5080" cap="flat" cmpd="sng" algn="ctr">
                       <a:solidFill>
-                        <a:srgbClr val="D1D5DB"/>
+                        <a:srgbClr val="D8D3CB"/>
                       </a:solidFill>
                       <a:prstDash val="solid"/>
                       <a:round/>
                       <a:headEnd type="none" w="med" len="med"/>
                       <a:tailEnd type="none" w="med" len="med"/>
                     </a:lnR>
-                    <a:lnT w="6350" cap="flat" cmpd="sng" algn="ctr">
+                    <a:lnT w="5080" cap="flat" cmpd="sng" algn="ctr">
                       <a:solidFill>
-                        <a:srgbClr val="D1D5DB"/>
+                        <a:srgbClr val="D8D3CB"/>
                       </a:solidFill>
                       <a:prstDash val="solid"/>
                       <a:round/>
                       <a:headEnd type="none" w="med" len="med"/>
                       <a:tailEnd type="none" w="med" len="med"/>
                     </a:lnT>
-                    <a:lnB w="6350" cap="flat" cmpd="sng" algn="ctr">
+                    <a:lnB w="5080" cap="flat" cmpd="sng" algn="ctr">
                       <a:solidFill>
-                        <a:srgbClr val="D1D5DB"/>
+                        <a:srgbClr val="D8D3CB"/>
                       </a:solidFill>
                       <a:prstDash val="solid"/>
                       <a:round/>
@@ -3641,45 +3804,52 @@
                       <a:r>
                         <a:rPr lang="en-US" sz="1100" dirty="0">
                           <a:solidFill>
-                            <a:srgbClr val="374151"/>
+                            <a:srgbClr val="23282E"/>
                           </a:solidFill>
+                          <a:latin typeface="Corbel" pitchFamily="34" charset="0"/>
+                          <a:ea typeface="Corbel" pitchFamily="34" charset="-122"/>
+                          <a:cs typeface="Corbel" pitchFamily="34" charset="-120"/>
                         </a:rPr>
                         <a:t>Always, in surveys</a:t>
                       </a:r>
-                      <a:endParaRPr lang="en-US" sz="1100" dirty="0"/>
+                      <a:endParaRPr lang="en-US" sz="1100" dirty="0">
+                        <a:latin typeface="Corbel" charset="0"/>
+                        <a:ea typeface="Corbel" charset="0"/>
+                        <a:cs typeface="Corbel" charset="0"/>
+                      </a:endParaRPr>
                     </a:p>
                   </a:txBody>
-                  <a:tcPr marL="91440" marR="91440" marT="45720" marB="45720" anchor="t">
-                    <a:lnL w="6350" cap="flat" cmpd="sng" algn="ctr">
+                  <a:tcPr marL="76200" marR="76200" marT="76200" marB="76200" anchor="t">
+                    <a:lnL w="5080" cap="flat" cmpd="sng" algn="ctr">
                       <a:solidFill>
-                        <a:srgbClr val="D1D5DB"/>
+                        <a:srgbClr val="D8D3CB"/>
                       </a:solidFill>
                       <a:prstDash val="solid"/>
                       <a:round/>
                       <a:headEnd type="none" w="med" len="med"/>
                       <a:tailEnd type="none" w="med" len="med"/>
                     </a:lnL>
-                    <a:lnR w="6350" cap="flat" cmpd="sng" algn="ctr">
+                    <a:lnR w="5080" cap="flat" cmpd="sng" algn="ctr">
                       <a:solidFill>
-                        <a:srgbClr val="D1D5DB"/>
+                        <a:srgbClr val="D8D3CB"/>
                       </a:solidFill>
                       <a:prstDash val="solid"/>
                       <a:round/>
                       <a:headEnd type="none" w="med" len="med"/>
                       <a:tailEnd type="none" w="med" len="med"/>
                     </a:lnR>
-                    <a:lnT w="6350" cap="flat" cmpd="sng" algn="ctr">
+                    <a:lnT w="5080" cap="flat" cmpd="sng" algn="ctr">
                       <a:solidFill>
-                        <a:srgbClr val="D1D5DB"/>
+                        <a:srgbClr val="D8D3CB"/>
                       </a:solidFill>
                       <a:prstDash val="solid"/>
                       <a:round/>
                       <a:headEnd type="none" w="med" len="med"/>
                       <a:tailEnd type="none" w="med" len="med"/>
                     </a:lnT>
-                    <a:lnB w="6350" cap="flat" cmpd="sng" algn="ctr">
+                    <a:lnB w="5080" cap="flat" cmpd="sng" algn="ctr">
                       <a:solidFill>
-                        <a:srgbClr val="D1D5DB"/>
+                        <a:srgbClr val="D8D3CB"/>
                       </a:solidFill>
                       <a:prstDash val="solid"/>
                       <a:round/>
@@ -3702,45 +3872,52 @@
                       <a:r>
                         <a:rPr lang="en-US" sz="1100" dirty="0">
                           <a:solidFill>
-                            <a:srgbClr val="374151"/>
+                            <a:srgbClr val="23282E"/>
                           </a:solidFill>
+                          <a:latin typeface="Corbel" pitchFamily="34" charset="0"/>
+                          <a:ea typeface="Corbel" pitchFamily="34" charset="-122"/>
+                          <a:cs typeface="Corbel" pitchFamily="34" charset="-120"/>
                         </a:rPr>
                         <a:t>n_final = n / (1 - expected non-response)</a:t>
                       </a:r>
-                      <a:endParaRPr lang="en-US" sz="1100" dirty="0"/>
+                      <a:endParaRPr lang="en-US" sz="1100" dirty="0">
+                        <a:latin typeface="Corbel" charset="0"/>
+                        <a:ea typeface="Corbel" charset="0"/>
+                        <a:cs typeface="Corbel" charset="0"/>
+                      </a:endParaRPr>
                     </a:p>
                   </a:txBody>
-                  <a:tcPr marL="91440" marR="91440" marT="45720" marB="45720" anchor="t">
-                    <a:lnL w="6350" cap="flat" cmpd="sng" algn="ctr">
+                  <a:tcPr marL="76200" marR="76200" marT="76200" marB="76200" anchor="t">
+                    <a:lnL w="5080" cap="flat" cmpd="sng" algn="ctr">
                       <a:solidFill>
-                        <a:srgbClr val="D1D5DB"/>
+                        <a:srgbClr val="D8D3CB"/>
                       </a:solidFill>
                       <a:prstDash val="solid"/>
                       <a:round/>
                       <a:headEnd type="none" w="med" len="med"/>
                       <a:tailEnd type="none" w="med" len="med"/>
                     </a:lnL>
-                    <a:lnR w="6350" cap="flat" cmpd="sng" algn="ctr">
+                    <a:lnR w="5080" cap="flat" cmpd="sng" algn="ctr">
                       <a:solidFill>
-                        <a:srgbClr val="D1D5DB"/>
+                        <a:srgbClr val="D8D3CB"/>
                       </a:solidFill>
                       <a:prstDash val="solid"/>
                       <a:round/>
                       <a:headEnd type="none" w="med" len="med"/>
                       <a:tailEnd type="none" w="med" len="med"/>
                     </a:lnR>
-                    <a:lnT w="6350" cap="flat" cmpd="sng" algn="ctr">
+                    <a:lnT w="5080" cap="flat" cmpd="sng" algn="ctr">
                       <a:solidFill>
-                        <a:srgbClr val="D1D5DB"/>
+                        <a:srgbClr val="D8D3CB"/>
                       </a:solidFill>
                       <a:prstDash val="solid"/>
                       <a:round/>
                       <a:headEnd type="none" w="med" len="med"/>
                       <a:tailEnd type="none" w="med" len="med"/>
                     </a:lnT>
-                    <a:lnB w="6350" cap="flat" cmpd="sng" algn="ctr">
+                    <a:lnB w="5080" cap="flat" cmpd="sng" algn="ctr">
                       <a:solidFill>
-                        <a:srgbClr val="D1D5DB"/>
+                        <a:srgbClr val="D8D3CB"/>
                       </a:solidFill>
                       <a:prstDash val="solid"/>
                       <a:round/>
@@ -3765,230 +3942,52 @@
                       <a:r>
                         <a:rPr lang="en-US" sz="1100" dirty="0">
                           <a:solidFill>
-                            <a:srgbClr val="374151"/>
+                            <a:srgbClr val="23282E"/>
                           </a:solidFill>
+                          <a:latin typeface="Corbel" pitchFamily="34" charset="0"/>
+                          <a:ea typeface="Corbel" pitchFamily="34" charset="-122"/>
+                          <a:cs typeface="Corbel" pitchFamily="34" charset="-120"/>
                         </a:rPr>
                         <a:t>Design effect</a:t>
                       </a:r>
-                      <a:endParaRPr lang="en-US" sz="1100" dirty="0"/>
+                      <a:endParaRPr lang="en-US" sz="1100" dirty="0">
+                        <a:latin typeface="Corbel" charset="0"/>
+                        <a:ea typeface="Corbel" charset="0"/>
+                        <a:cs typeface="Corbel" charset="0"/>
+                      </a:endParaRPr>
                     </a:p>
                   </a:txBody>
-                  <a:tcPr marL="91440" marR="91440" marT="45720" marB="45720" anchor="t">
-                    <a:lnL w="6350" cap="flat" cmpd="sng" algn="ctr">
+                  <a:tcPr marL="76200" marR="76200" marT="76200" marB="76200" anchor="t">
+                    <a:lnL w="5080" cap="flat" cmpd="sng" algn="ctr">
                       <a:solidFill>
-                        <a:srgbClr val="D1D5DB"/>
+                        <a:srgbClr val="D8D3CB"/>
                       </a:solidFill>
                       <a:prstDash val="solid"/>
                       <a:round/>
                       <a:headEnd type="none" w="med" len="med"/>
                       <a:tailEnd type="none" w="med" len="med"/>
                     </a:lnL>
-                    <a:lnR w="6350" cap="flat" cmpd="sng" algn="ctr">
+                    <a:lnR w="5080" cap="flat" cmpd="sng" algn="ctr">
                       <a:solidFill>
-                        <a:srgbClr val="D1D5DB"/>
+                        <a:srgbClr val="D8D3CB"/>
                       </a:solidFill>
                       <a:prstDash val="solid"/>
                       <a:round/>
                       <a:headEnd type="none" w="med" len="med"/>
                       <a:tailEnd type="none" w="med" len="med"/>
                     </a:lnR>
-                    <a:lnT w="6350" cap="flat" cmpd="sng" algn="ctr">
+                    <a:lnT w="5080" cap="flat" cmpd="sng" algn="ctr">
                       <a:solidFill>
-                        <a:srgbClr val="D1D5DB"/>
+                        <a:srgbClr val="D8D3CB"/>
                       </a:solidFill>
                       <a:prstDash val="solid"/>
                       <a:round/>
                       <a:headEnd type="none" w="med" len="med"/>
                       <a:tailEnd type="none" w="med" len="med"/>
                     </a:lnT>
-                    <a:lnB w="6350" cap="flat" cmpd="sng" algn="ctr">
+                    <a:lnB w="5080" cap="flat" cmpd="sng" algn="ctr">
                       <a:solidFill>
-                        <a:srgbClr val="D1D5DB"/>
-                      </a:solidFill>
-                      <a:prstDash val="solid"/>
-                      <a:round/>
-                      <a:headEnd type="none" w="med" len="med"/>
-                      <a:tailEnd type="none" w="med" len="med"/>
-                    </a:lnB>
-                    <a:solidFill>
-                      <a:srgbClr val="F9FAFB"/>
-                    </a:solidFill>
-                  </a:tcPr>
-                </a:tc>
-                <a:tc>
-                  <a:txBody>
-                    <a:bodyPr/>
-                    <a:lstStyle/>
-                    <a:p>
-                      <a:pPr indent="0" marL="0">
-                        <a:buNone/>
-                      </a:pPr>
-                      <a:r>
-                        <a:rPr lang="en-US" sz="1100" dirty="0">
-                          <a:solidFill>
-                            <a:srgbClr val="374151"/>
-                          </a:solidFill>
-                        </a:rPr>
-                        <a:t>Cluster sampling</a:t>
-                      </a:r>
-                      <a:endParaRPr lang="en-US" sz="1100" dirty="0"/>
-                    </a:p>
-                  </a:txBody>
-                  <a:tcPr marL="91440" marR="91440" marT="45720" marB="45720" anchor="t">
-                    <a:lnL w="6350" cap="flat" cmpd="sng" algn="ctr">
-                      <a:solidFill>
-                        <a:srgbClr val="D1D5DB"/>
-                      </a:solidFill>
-                      <a:prstDash val="solid"/>
-                      <a:round/>
-                      <a:headEnd type="none" w="med" len="med"/>
-                      <a:tailEnd type="none" w="med" len="med"/>
-                    </a:lnL>
-                    <a:lnR w="6350" cap="flat" cmpd="sng" algn="ctr">
-                      <a:solidFill>
-                        <a:srgbClr val="D1D5DB"/>
-                      </a:solidFill>
-                      <a:prstDash val="solid"/>
-                      <a:round/>
-                      <a:headEnd type="none" w="med" len="med"/>
-                      <a:tailEnd type="none" w="med" len="med"/>
-                    </a:lnR>
-                    <a:lnT w="6350" cap="flat" cmpd="sng" algn="ctr">
-                      <a:solidFill>
-                        <a:srgbClr val="D1D5DB"/>
-                      </a:solidFill>
-                      <a:prstDash val="solid"/>
-                      <a:round/>
-                      <a:headEnd type="none" w="med" len="med"/>
-                      <a:tailEnd type="none" w="med" len="med"/>
-                    </a:lnT>
-                    <a:lnB w="6350" cap="flat" cmpd="sng" algn="ctr">
-                      <a:solidFill>
-                        <a:srgbClr val="D1D5DB"/>
-                      </a:solidFill>
-                      <a:prstDash val="solid"/>
-                      <a:round/>
-                      <a:headEnd type="none" w="med" len="med"/>
-                      <a:tailEnd type="none" w="med" len="med"/>
-                    </a:lnB>
-                    <a:solidFill>
-                      <a:srgbClr val="F9FAFB"/>
-                    </a:solidFill>
-                  </a:tcPr>
-                </a:tc>
-                <a:tc>
-                  <a:txBody>
-                    <a:bodyPr/>
-                    <a:lstStyle/>
-                    <a:p>
-                      <a:pPr indent="0" marL="0">
-                        <a:buNone/>
-                      </a:pPr>
-                      <a:r>
-                        <a:rPr lang="en-US" sz="1100" dirty="0">
-                          <a:solidFill>
-                            <a:srgbClr val="374151"/>
-                          </a:solidFill>
-                        </a:rPr>
-                        <a:t>n_final = n x DEFF (often 1.5-2.0)</a:t>
-                      </a:r>
-                      <a:endParaRPr lang="en-US" sz="1100" dirty="0"/>
-                    </a:p>
-                  </a:txBody>
-                  <a:tcPr marL="91440" marR="91440" marT="45720" marB="45720" anchor="t">
-                    <a:lnL w="6350" cap="flat" cmpd="sng" algn="ctr">
-                      <a:solidFill>
-                        <a:srgbClr val="D1D5DB"/>
-                      </a:solidFill>
-                      <a:prstDash val="solid"/>
-                      <a:round/>
-                      <a:headEnd type="none" w="med" len="med"/>
-                      <a:tailEnd type="none" w="med" len="med"/>
-                    </a:lnL>
-                    <a:lnR w="6350" cap="flat" cmpd="sng" algn="ctr">
-                      <a:solidFill>
-                        <a:srgbClr val="D1D5DB"/>
-                      </a:solidFill>
-                      <a:prstDash val="solid"/>
-                      <a:round/>
-                      <a:headEnd type="none" w="med" len="med"/>
-                      <a:tailEnd type="none" w="med" len="med"/>
-                    </a:lnR>
-                    <a:lnT w="6350" cap="flat" cmpd="sng" algn="ctr">
-                      <a:solidFill>
-                        <a:srgbClr val="D1D5DB"/>
-                      </a:solidFill>
-                      <a:prstDash val="solid"/>
-                      <a:round/>
-                      <a:headEnd type="none" w="med" len="med"/>
-                      <a:tailEnd type="none" w="med" len="med"/>
-                    </a:lnT>
-                    <a:lnB w="6350" cap="flat" cmpd="sng" algn="ctr">
-                      <a:solidFill>
-                        <a:srgbClr val="D1D5DB"/>
-                      </a:solidFill>
-                      <a:prstDash val="solid"/>
-                      <a:round/>
-                      <a:headEnd type="none" w="med" len="med"/>
-                      <a:tailEnd type="none" w="med" len="med"/>
-                    </a:lnB>
-                    <a:solidFill>
-                      <a:srgbClr val="F9FAFB"/>
-                    </a:solidFill>
-                  </a:tcPr>
-                </a:tc>
-              </a:tr>
-              <a:tr h="0">
-                <a:tc>
-                  <a:txBody>
-                    <a:bodyPr/>
-                    <a:lstStyle/>
-                    <a:p>
-                      <a:pPr indent="0" marL="0">
-                        <a:buNone/>
-                      </a:pPr>
-                      <a:r>
-                        <a:rPr lang="en-US" sz="1100" dirty="0">
-                          <a:solidFill>
-                            <a:srgbClr val="374151"/>
-                          </a:solidFill>
-                        </a:rPr>
-                        <a:t>Finite population</a:t>
-                      </a:r>
-                      <a:endParaRPr lang="en-US" sz="1100" dirty="0"/>
-                    </a:p>
-                  </a:txBody>
-                  <a:tcPr marL="91440" marR="91440" marT="45720" marB="45720" anchor="t">
-                    <a:lnL w="6350" cap="flat" cmpd="sng" algn="ctr">
-                      <a:solidFill>
-                        <a:srgbClr val="D1D5DB"/>
-                      </a:solidFill>
-                      <a:prstDash val="solid"/>
-                      <a:round/>
-                      <a:headEnd type="none" w="med" len="med"/>
-                      <a:tailEnd type="none" w="med" len="med"/>
-                    </a:lnL>
-                    <a:lnR w="6350" cap="flat" cmpd="sng" algn="ctr">
-                      <a:solidFill>
-                        <a:srgbClr val="D1D5DB"/>
-                      </a:solidFill>
-                      <a:prstDash val="solid"/>
-                      <a:round/>
-                      <a:headEnd type="none" w="med" len="med"/>
-                      <a:tailEnd type="none" w="med" len="med"/>
-                    </a:lnR>
-                    <a:lnT w="6350" cap="flat" cmpd="sng" algn="ctr">
-                      <a:solidFill>
-                        <a:srgbClr val="D1D5DB"/>
-                      </a:solidFill>
-                      <a:prstDash val="solid"/>
-                      <a:round/>
-                      <a:headEnd type="none" w="med" len="med"/>
-                      <a:tailEnd type="none" w="med" len="med"/>
-                    </a:lnT>
-                    <a:lnB w="6350" cap="flat" cmpd="sng" algn="ctr">
-                      <a:solidFill>
-                        <a:srgbClr val="D1D5DB"/>
+                        <a:srgbClr val="D8D3CB"/>
                       </a:solidFill>
                       <a:prstDash val="solid"/>
                       <a:round/>
@@ -4011,45 +4010,52 @@
                       <a:r>
                         <a:rPr lang="en-US" sz="1100" dirty="0">
                           <a:solidFill>
-                            <a:srgbClr val="374151"/>
+                            <a:srgbClr val="23282E"/>
                           </a:solidFill>
+                          <a:latin typeface="Corbel" pitchFamily="34" charset="0"/>
+                          <a:ea typeface="Corbel" pitchFamily="34" charset="-122"/>
+                          <a:cs typeface="Corbel" pitchFamily="34" charset="-120"/>
                         </a:rPr>
-                        <a:t>Sample exceeds ~5% of population</a:t>
+                        <a:t>Cluster sampling</a:t>
                       </a:r>
-                      <a:endParaRPr lang="en-US" sz="1100" dirty="0"/>
+                      <a:endParaRPr lang="en-US" sz="1100" dirty="0">
+                        <a:latin typeface="Corbel" charset="0"/>
+                        <a:ea typeface="Corbel" charset="0"/>
+                        <a:cs typeface="Corbel" charset="0"/>
+                      </a:endParaRPr>
                     </a:p>
                   </a:txBody>
-                  <a:tcPr marL="91440" marR="91440" marT="45720" marB="45720" anchor="t">
-                    <a:lnL w="6350" cap="flat" cmpd="sng" algn="ctr">
+                  <a:tcPr marL="76200" marR="76200" marT="76200" marB="76200" anchor="t">
+                    <a:lnL w="5080" cap="flat" cmpd="sng" algn="ctr">
                       <a:solidFill>
-                        <a:srgbClr val="D1D5DB"/>
+                        <a:srgbClr val="D8D3CB"/>
                       </a:solidFill>
                       <a:prstDash val="solid"/>
                       <a:round/>
                       <a:headEnd type="none" w="med" len="med"/>
                       <a:tailEnd type="none" w="med" len="med"/>
                     </a:lnL>
-                    <a:lnR w="6350" cap="flat" cmpd="sng" algn="ctr">
+                    <a:lnR w="5080" cap="flat" cmpd="sng" algn="ctr">
                       <a:solidFill>
-                        <a:srgbClr val="D1D5DB"/>
+                        <a:srgbClr val="D8D3CB"/>
                       </a:solidFill>
                       <a:prstDash val="solid"/>
                       <a:round/>
                       <a:headEnd type="none" w="med" len="med"/>
                       <a:tailEnd type="none" w="med" len="med"/>
                     </a:lnR>
-                    <a:lnT w="6350" cap="flat" cmpd="sng" algn="ctr">
+                    <a:lnT w="5080" cap="flat" cmpd="sng" algn="ctr">
                       <a:solidFill>
-                        <a:srgbClr val="D1D5DB"/>
+                        <a:srgbClr val="D8D3CB"/>
                       </a:solidFill>
                       <a:prstDash val="solid"/>
                       <a:round/>
                       <a:headEnd type="none" w="med" len="med"/>
                       <a:tailEnd type="none" w="med" len="med"/>
                     </a:lnT>
-                    <a:lnB w="6350" cap="flat" cmpd="sng" algn="ctr">
+                    <a:lnB w="5080" cap="flat" cmpd="sng" algn="ctr">
                       <a:solidFill>
-                        <a:srgbClr val="D1D5DB"/>
+                        <a:srgbClr val="D8D3CB"/>
                       </a:solidFill>
                       <a:prstDash val="solid"/>
                       <a:round/>
@@ -4072,45 +4078,52 @@
                       <a:r>
                         <a:rPr lang="en-US" sz="1100" dirty="0">
                           <a:solidFill>
-                            <a:srgbClr val="374151"/>
+                            <a:srgbClr val="23282E"/>
                           </a:solidFill>
+                          <a:latin typeface="Corbel" pitchFamily="34" charset="0"/>
+                          <a:ea typeface="Corbel" pitchFamily="34" charset="-122"/>
+                          <a:cs typeface="Corbel" pitchFamily="34" charset="-120"/>
                         </a:rPr>
-                        <a:t>n_adj = n / (1 + (n-1)/N)</a:t>
+                        <a:t>n_final = n x DEFF (often 1.5-2.0)</a:t>
                       </a:r>
-                      <a:endParaRPr lang="en-US" sz="1100" dirty="0"/>
+                      <a:endParaRPr lang="en-US" sz="1100" dirty="0">
+                        <a:latin typeface="Corbel" charset="0"/>
+                        <a:ea typeface="Corbel" charset="0"/>
+                        <a:cs typeface="Corbel" charset="0"/>
+                      </a:endParaRPr>
                     </a:p>
                   </a:txBody>
-                  <a:tcPr marL="91440" marR="91440" marT="45720" marB="45720" anchor="t">
-                    <a:lnL w="6350" cap="flat" cmpd="sng" algn="ctr">
+                  <a:tcPr marL="76200" marR="76200" marT="76200" marB="76200" anchor="t">
+                    <a:lnL w="5080" cap="flat" cmpd="sng" algn="ctr">
                       <a:solidFill>
-                        <a:srgbClr val="D1D5DB"/>
+                        <a:srgbClr val="D8D3CB"/>
                       </a:solidFill>
                       <a:prstDash val="solid"/>
                       <a:round/>
                       <a:headEnd type="none" w="med" len="med"/>
                       <a:tailEnd type="none" w="med" len="med"/>
                     </a:lnL>
-                    <a:lnR w="6350" cap="flat" cmpd="sng" algn="ctr">
+                    <a:lnR w="5080" cap="flat" cmpd="sng" algn="ctr">
                       <a:solidFill>
-                        <a:srgbClr val="D1D5DB"/>
+                        <a:srgbClr val="D8D3CB"/>
                       </a:solidFill>
                       <a:prstDash val="solid"/>
                       <a:round/>
                       <a:headEnd type="none" w="med" len="med"/>
                       <a:tailEnd type="none" w="med" len="med"/>
                     </a:lnR>
-                    <a:lnT w="6350" cap="flat" cmpd="sng" algn="ctr">
+                    <a:lnT w="5080" cap="flat" cmpd="sng" algn="ctr">
                       <a:solidFill>
-                        <a:srgbClr val="D1D5DB"/>
+                        <a:srgbClr val="D8D3CB"/>
                       </a:solidFill>
                       <a:prstDash val="solid"/>
                       <a:round/>
                       <a:headEnd type="none" w="med" len="med"/>
                       <a:tailEnd type="none" w="med" len="med"/>
                     </a:lnT>
-                    <a:lnB w="6350" cap="flat" cmpd="sng" algn="ctr">
+                    <a:lnB w="5080" cap="flat" cmpd="sng" algn="ctr">
                       <a:solidFill>
-                        <a:srgbClr val="D1D5DB"/>
+                        <a:srgbClr val="D8D3CB"/>
                       </a:solidFill>
                       <a:prstDash val="solid"/>
                       <a:round/>
@@ -4135,45 +4148,52 @@
                       <a:r>
                         <a:rPr lang="en-US" sz="1100" dirty="0">
                           <a:solidFill>
-                            <a:srgbClr val="374151"/>
+                            <a:srgbClr val="23282E"/>
                           </a:solidFill>
+                          <a:latin typeface="Corbel" pitchFamily="34" charset="0"/>
+                          <a:ea typeface="Corbel" pitchFamily="34" charset="-122"/>
+                          <a:cs typeface="Corbel" pitchFamily="34" charset="-120"/>
                         </a:rPr>
-                        <a:t>Attrition</a:t>
+                        <a:t>Finite population</a:t>
                       </a:r>
-                      <a:endParaRPr lang="en-US" sz="1100" dirty="0"/>
+                      <a:endParaRPr lang="en-US" sz="1100" dirty="0">
+                        <a:latin typeface="Corbel" charset="0"/>
+                        <a:ea typeface="Corbel" charset="0"/>
+                        <a:cs typeface="Corbel" charset="0"/>
+                      </a:endParaRPr>
                     </a:p>
                   </a:txBody>
-                  <a:tcPr marL="91440" marR="91440" marT="45720" marB="45720" anchor="t">
-                    <a:lnL w="6350" cap="flat" cmpd="sng" algn="ctr">
+                  <a:tcPr marL="76200" marR="76200" marT="76200" marB="76200" anchor="t">
+                    <a:lnL w="5080" cap="flat" cmpd="sng" algn="ctr">
                       <a:solidFill>
-                        <a:srgbClr val="D1D5DB"/>
+                        <a:srgbClr val="D8D3CB"/>
                       </a:solidFill>
                       <a:prstDash val="solid"/>
                       <a:round/>
                       <a:headEnd type="none" w="med" len="med"/>
                       <a:tailEnd type="none" w="med" len="med"/>
                     </a:lnL>
-                    <a:lnR w="6350" cap="flat" cmpd="sng" algn="ctr">
+                    <a:lnR w="5080" cap="flat" cmpd="sng" algn="ctr">
                       <a:solidFill>
-                        <a:srgbClr val="D1D5DB"/>
+                        <a:srgbClr val="D8D3CB"/>
                       </a:solidFill>
                       <a:prstDash val="solid"/>
                       <a:round/>
                       <a:headEnd type="none" w="med" len="med"/>
                       <a:tailEnd type="none" w="med" len="med"/>
                     </a:lnR>
-                    <a:lnT w="6350" cap="flat" cmpd="sng" algn="ctr">
+                    <a:lnT w="5080" cap="flat" cmpd="sng" algn="ctr">
                       <a:solidFill>
-                        <a:srgbClr val="D1D5DB"/>
+                        <a:srgbClr val="D8D3CB"/>
                       </a:solidFill>
                       <a:prstDash val="solid"/>
                       <a:round/>
                       <a:headEnd type="none" w="med" len="med"/>
                       <a:tailEnd type="none" w="med" len="med"/>
                     </a:lnT>
-                    <a:lnB w="6350" cap="flat" cmpd="sng" algn="ctr">
+                    <a:lnB w="5080" cap="flat" cmpd="sng" algn="ctr">
                       <a:solidFill>
-                        <a:srgbClr val="D1D5DB"/>
+                        <a:srgbClr val="D8D3CB"/>
                       </a:solidFill>
                       <a:prstDash val="solid"/>
                       <a:round/>
@@ -4181,7 +4201,7 @@
                       <a:tailEnd type="none" w="med" len="med"/>
                     </a:lnB>
                     <a:solidFill>
-                      <a:srgbClr val="F9FAFB"/>
+                      <a:srgbClr val="FFFFFF"/>
                     </a:solidFill>
                   </a:tcPr>
                 </a:tc>
@@ -4196,45 +4216,52 @@
                       <a:r>
                         <a:rPr lang="en-US" sz="1100" dirty="0">
                           <a:solidFill>
-                            <a:srgbClr val="374151"/>
+                            <a:srgbClr val="23282E"/>
                           </a:solidFill>
+                          <a:latin typeface="Corbel" pitchFamily="34" charset="0"/>
+                          <a:ea typeface="Corbel" pitchFamily="34" charset="-122"/>
+                          <a:cs typeface="Corbel" pitchFamily="34" charset="-120"/>
                         </a:rPr>
-                        <a:t>Longitudinal designs</a:t>
+                        <a:t>Sample exceeds ~5% of population</a:t>
                       </a:r>
-                      <a:endParaRPr lang="en-US" sz="1100" dirty="0"/>
+                      <a:endParaRPr lang="en-US" sz="1100" dirty="0">
+                        <a:latin typeface="Corbel" charset="0"/>
+                        <a:ea typeface="Corbel" charset="0"/>
+                        <a:cs typeface="Corbel" charset="0"/>
+                      </a:endParaRPr>
                     </a:p>
                   </a:txBody>
-                  <a:tcPr marL="91440" marR="91440" marT="45720" marB="45720" anchor="t">
-                    <a:lnL w="6350" cap="flat" cmpd="sng" algn="ctr">
+                  <a:tcPr marL="76200" marR="76200" marT="76200" marB="76200" anchor="t">
+                    <a:lnL w="5080" cap="flat" cmpd="sng" algn="ctr">
                       <a:solidFill>
-                        <a:srgbClr val="D1D5DB"/>
+                        <a:srgbClr val="D8D3CB"/>
                       </a:solidFill>
                       <a:prstDash val="solid"/>
                       <a:round/>
                       <a:headEnd type="none" w="med" len="med"/>
                       <a:tailEnd type="none" w="med" len="med"/>
                     </a:lnL>
-                    <a:lnR w="6350" cap="flat" cmpd="sng" algn="ctr">
+                    <a:lnR w="5080" cap="flat" cmpd="sng" algn="ctr">
                       <a:solidFill>
-                        <a:srgbClr val="D1D5DB"/>
+                        <a:srgbClr val="D8D3CB"/>
                       </a:solidFill>
                       <a:prstDash val="solid"/>
                       <a:round/>
                       <a:headEnd type="none" w="med" len="med"/>
                       <a:tailEnd type="none" w="med" len="med"/>
                     </a:lnR>
-                    <a:lnT w="6350" cap="flat" cmpd="sng" algn="ctr">
+                    <a:lnT w="5080" cap="flat" cmpd="sng" algn="ctr">
                       <a:solidFill>
-                        <a:srgbClr val="D1D5DB"/>
+                        <a:srgbClr val="D8D3CB"/>
                       </a:solidFill>
                       <a:prstDash val="solid"/>
                       <a:round/>
                       <a:headEnd type="none" w="med" len="med"/>
                       <a:tailEnd type="none" w="med" len="med"/>
                     </a:lnT>
-                    <a:lnB w="6350" cap="flat" cmpd="sng" algn="ctr">
+                    <a:lnB w="5080" cap="flat" cmpd="sng" algn="ctr">
                       <a:solidFill>
-                        <a:srgbClr val="D1D5DB"/>
+                        <a:srgbClr val="D8D3CB"/>
                       </a:solidFill>
                       <a:prstDash val="solid"/>
                       <a:round/>
@@ -4242,7 +4269,7 @@
                       <a:tailEnd type="none" w="med" len="med"/>
                     </a:lnB>
                     <a:solidFill>
-                      <a:srgbClr val="F9FAFB"/>
+                      <a:srgbClr val="FFFFFF"/>
                     </a:solidFill>
                   </a:tcPr>
                 </a:tc>
@@ -4257,45 +4284,52 @@
                       <a:r>
                         <a:rPr lang="en-US" sz="1100" dirty="0">
                           <a:solidFill>
-                            <a:srgbClr val="374151"/>
+                            <a:srgbClr val="23282E"/>
                           </a:solidFill>
+                          <a:latin typeface="Corbel" pitchFamily="34" charset="0"/>
+                          <a:ea typeface="Corbel" pitchFamily="34" charset="-122"/>
+                          <a:cs typeface="Corbel" pitchFamily="34" charset="-120"/>
                         </a:rPr>
-                        <a:t>Inflate by expected loss to follow-up</a:t>
+                        <a:t>n_adj = n / (1 + (n-1)/N)</a:t>
                       </a:r>
-                      <a:endParaRPr lang="en-US" sz="1100" dirty="0"/>
+                      <a:endParaRPr lang="en-US" sz="1100" dirty="0">
+                        <a:latin typeface="Corbel" charset="0"/>
+                        <a:ea typeface="Corbel" charset="0"/>
+                        <a:cs typeface="Corbel" charset="0"/>
+                      </a:endParaRPr>
                     </a:p>
                   </a:txBody>
-                  <a:tcPr marL="91440" marR="91440" marT="45720" marB="45720" anchor="t">
-                    <a:lnL w="6350" cap="flat" cmpd="sng" algn="ctr">
+                  <a:tcPr marL="76200" marR="76200" marT="76200" marB="76200" anchor="t">
+                    <a:lnL w="5080" cap="flat" cmpd="sng" algn="ctr">
                       <a:solidFill>
-                        <a:srgbClr val="D1D5DB"/>
+                        <a:srgbClr val="D8D3CB"/>
                       </a:solidFill>
                       <a:prstDash val="solid"/>
                       <a:round/>
                       <a:headEnd type="none" w="med" len="med"/>
                       <a:tailEnd type="none" w="med" len="med"/>
                     </a:lnL>
-                    <a:lnR w="6350" cap="flat" cmpd="sng" algn="ctr">
+                    <a:lnR w="5080" cap="flat" cmpd="sng" algn="ctr">
                       <a:solidFill>
-                        <a:srgbClr val="D1D5DB"/>
+                        <a:srgbClr val="D8D3CB"/>
                       </a:solidFill>
                       <a:prstDash val="solid"/>
                       <a:round/>
                       <a:headEnd type="none" w="med" len="med"/>
                       <a:tailEnd type="none" w="med" len="med"/>
                     </a:lnR>
-                    <a:lnT w="6350" cap="flat" cmpd="sng" algn="ctr">
+                    <a:lnT w="5080" cap="flat" cmpd="sng" algn="ctr">
                       <a:solidFill>
-                        <a:srgbClr val="D1D5DB"/>
+                        <a:srgbClr val="D8D3CB"/>
                       </a:solidFill>
                       <a:prstDash val="solid"/>
                       <a:round/>
                       <a:headEnd type="none" w="med" len="med"/>
                       <a:tailEnd type="none" w="med" len="med"/>
                     </a:lnT>
-                    <a:lnB w="6350" cap="flat" cmpd="sng" algn="ctr">
+                    <a:lnB w="5080" cap="flat" cmpd="sng" algn="ctr">
                       <a:solidFill>
-                        <a:srgbClr val="D1D5DB"/>
+                        <a:srgbClr val="D8D3CB"/>
                       </a:solidFill>
                       <a:prstDash val="solid"/>
                       <a:round/>
@@ -4303,7 +4337,213 @@
                       <a:tailEnd type="none" w="med" len="med"/>
                     </a:lnB>
                     <a:solidFill>
-                      <a:srgbClr val="F9FAFB"/>
+                      <a:srgbClr val="FFFFFF"/>
+                    </a:solidFill>
+                  </a:tcPr>
+                </a:tc>
+              </a:tr>
+              <a:tr h="0">
+                <a:tc>
+                  <a:txBody>
+                    <a:bodyPr/>
+                    <a:lstStyle/>
+                    <a:p>
+                      <a:pPr indent="0" marL="0">
+                        <a:buNone/>
+                      </a:pPr>
+                      <a:r>
+                        <a:rPr lang="en-US" sz="1100" dirty="0">
+                          <a:solidFill>
+                            <a:srgbClr val="23282E"/>
+                          </a:solidFill>
+                          <a:latin typeface="Corbel" pitchFamily="34" charset="0"/>
+                          <a:ea typeface="Corbel" pitchFamily="34" charset="-122"/>
+                          <a:cs typeface="Corbel" pitchFamily="34" charset="-120"/>
+                        </a:rPr>
+                        <a:t>Attrition</a:t>
+                      </a:r>
+                      <a:endParaRPr lang="en-US" sz="1100" dirty="0">
+                        <a:latin typeface="Corbel" charset="0"/>
+                        <a:ea typeface="Corbel" charset="0"/>
+                        <a:cs typeface="Corbel" charset="0"/>
+                      </a:endParaRPr>
+                    </a:p>
+                  </a:txBody>
+                  <a:tcPr marL="76200" marR="76200" marT="76200" marB="76200" anchor="t">
+                    <a:lnL w="5080" cap="flat" cmpd="sng" algn="ctr">
+                      <a:solidFill>
+                        <a:srgbClr val="D8D3CB"/>
+                      </a:solidFill>
+                      <a:prstDash val="solid"/>
+                      <a:round/>
+                      <a:headEnd type="none" w="med" len="med"/>
+                      <a:tailEnd type="none" w="med" len="med"/>
+                    </a:lnL>
+                    <a:lnR w="5080" cap="flat" cmpd="sng" algn="ctr">
+                      <a:solidFill>
+                        <a:srgbClr val="D8D3CB"/>
+                      </a:solidFill>
+                      <a:prstDash val="solid"/>
+                      <a:round/>
+                      <a:headEnd type="none" w="med" len="med"/>
+                      <a:tailEnd type="none" w="med" len="med"/>
+                    </a:lnR>
+                    <a:lnT w="5080" cap="flat" cmpd="sng" algn="ctr">
+                      <a:solidFill>
+                        <a:srgbClr val="D8D3CB"/>
+                      </a:solidFill>
+                      <a:prstDash val="solid"/>
+                      <a:round/>
+                      <a:headEnd type="none" w="med" len="med"/>
+                      <a:tailEnd type="none" w="med" len="med"/>
+                    </a:lnT>
+                    <a:lnB w="5080" cap="flat" cmpd="sng" algn="ctr">
+                      <a:solidFill>
+                        <a:srgbClr val="D8D3CB"/>
+                      </a:solidFill>
+                      <a:prstDash val="solid"/>
+                      <a:round/>
+                      <a:headEnd type="none" w="med" len="med"/>
+                      <a:tailEnd type="none" w="med" len="med"/>
+                    </a:lnB>
+                    <a:solidFill>
+                      <a:srgbClr val="FFFFFF"/>
+                    </a:solidFill>
+                  </a:tcPr>
+                </a:tc>
+                <a:tc>
+                  <a:txBody>
+                    <a:bodyPr/>
+                    <a:lstStyle/>
+                    <a:p>
+                      <a:pPr indent="0" marL="0">
+                        <a:buNone/>
+                      </a:pPr>
+                      <a:r>
+                        <a:rPr lang="en-US" sz="1100" dirty="0">
+                          <a:solidFill>
+                            <a:srgbClr val="23282E"/>
+                          </a:solidFill>
+                          <a:latin typeface="Corbel" pitchFamily="34" charset="0"/>
+                          <a:ea typeface="Corbel" pitchFamily="34" charset="-122"/>
+                          <a:cs typeface="Corbel" pitchFamily="34" charset="-120"/>
+                        </a:rPr>
+                        <a:t>Longitudinal designs</a:t>
+                      </a:r>
+                      <a:endParaRPr lang="en-US" sz="1100" dirty="0">
+                        <a:latin typeface="Corbel" charset="0"/>
+                        <a:ea typeface="Corbel" charset="0"/>
+                        <a:cs typeface="Corbel" charset="0"/>
+                      </a:endParaRPr>
+                    </a:p>
+                  </a:txBody>
+                  <a:tcPr marL="76200" marR="76200" marT="76200" marB="76200" anchor="t">
+                    <a:lnL w="5080" cap="flat" cmpd="sng" algn="ctr">
+                      <a:solidFill>
+                        <a:srgbClr val="D8D3CB"/>
+                      </a:solidFill>
+                      <a:prstDash val="solid"/>
+                      <a:round/>
+                      <a:headEnd type="none" w="med" len="med"/>
+                      <a:tailEnd type="none" w="med" len="med"/>
+                    </a:lnL>
+                    <a:lnR w="5080" cap="flat" cmpd="sng" algn="ctr">
+                      <a:solidFill>
+                        <a:srgbClr val="D8D3CB"/>
+                      </a:solidFill>
+                      <a:prstDash val="solid"/>
+                      <a:round/>
+                      <a:headEnd type="none" w="med" len="med"/>
+                      <a:tailEnd type="none" w="med" len="med"/>
+                    </a:lnR>
+                    <a:lnT w="5080" cap="flat" cmpd="sng" algn="ctr">
+                      <a:solidFill>
+                        <a:srgbClr val="D8D3CB"/>
+                      </a:solidFill>
+                      <a:prstDash val="solid"/>
+                      <a:round/>
+                      <a:headEnd type="none" w="med" len="med"/>
+                      <a:tailEnd type="none" w="med" len="med"/>
+                    </a:lnT>
+                    <a:lnB w="5080" cap="flat" cmpd="sng" algn="ctr">
+                      <a:solidFill>
+                        <a:srgbClr val="D8D3CB"/>
+                      </a:solidFill>
+                      <a:prstDash val="solid"/>
+                      <a:round/>
+                      <a:headEnd type="none" w="med" len="med"/>
+                      <a:tailEnd type="none" w="med" len="med"/>
+                    </a:lnB>
+                    <a:solidFill>
+                      <a:srgbClr val="FFFFFF"/>
+                    </a:solidFill>
+                  </a:tcPr>
+                </a:tc>
+                <a:tc>
+                  <a:txBody>
+                    <a:bodyPr/>
+                    <a:lstStyle/>
+                    <a:p>
+                      <a:pPr indent="0" marL="0">
+                        <a:buNone/>
+                      </a:pPr>
+                      <a:r>
+                        <a:rPr lang="en-US" sz="1100" dirty="0">
+                          <a:solidFill>
+                            <a:srgbClr val="23282E"/>
+                          </a:solidFill>
+                          <a:latin typeface="Corbel" pitchFamily="34" charset="0"/>
+                          <a:ea typeface="Corbel" pitchFamily="34" charset="-122"/>
+                          <a:cs typeface="Corbel" pitchFamily="34" charset="-120"/>
+                        </a:rPr>
+                        <a:t>Inflate by expected loss to follow-up</a:t>
+                      </a:r>
+                      <a:endParaRPr lang="en-US" sz="1100" dirty="0">
+                        <a:latin typeface="Corbel" charset="0"/>
+                        <a:ea typeface="Corbel" charset="0"/>
+                        <a:cs typeface="Corbel" charset="0"/>
+                      </a:endParaRPr>
+                    </a:p>
+                  </a:txBody>
+                  <a:tcPr marL="76200" marR="76200" marT="76200" marB="76200" anchor="t">
+                    <a:lnL w="5080" cap="flat" cmpd="sng" algn="ctr">
+                      <a:solidFill>
+                        <a:srgbClr val="D8D3CB"/>
+                      </a:solidFill>
+                      <a:prstDash val="solid"/>
+                      <a:round/>
+                      <a:headEnd type="none" w="med" len="med"/>
+                      <a:tailEnd type="none" w="med" len="med"/>
+                    </a:lnL>
+                    <a:lnR w="5080" cap="flat" cmpd="sng" algn="ctr">
+                      <a:solidFill>
+                        <a:srgbClr val="D8D3CB"/>
+                      </a:solidFill>
+                      <a:prstDash val="solid"/>
+                      <a:round/>
+                      <a:headEnd type="none" w="med" len="med"/>
+                      <a:tailEnd type="none" w="med" len="med"/>
+                    </a:lnR>
+                    <a:lnT w="5080" cap="flat" cmpd="sng" algn="ctr">
+                      <a:solidFill>
+                        <a:srgbClr val="D8D3CB"/>
+                      </a:solidFill>
+                      <a:prstDash val="solid"/>
+                      <a:round/>
+                      <a:headEnd type="none" w="med" len="med"/>
+                      <a:tailEnd type="none" w="med" len="med"/>
+                    </a:lnT>
+                    <a:lnB w="5080" cap="flat" cmpd="sng" algn="ctr">
+                      <a:solidFill>
+                        <a:srgbClr val="D8D3CB"/>
+                      </a:solidFill>
+                      <a:prstDash val="solid"/>
+                      <a:round/>
+                      <a:headEnd type="none" w="med" len="med"/>
+                      <a:tailEnd type="none" w="med" len="med"/>
+                    </a:lnB>
+                    <a:solidFill>
+                      <a:srgbClr val="FFFFFF"/>
                     </a:solidFill>
                   </a:tcPr>
                 </a:tc>
@@ -4324,8 +4564,8 @@
         </p:nvSpPr>
         <p:spPr>
           <a:xfrm>
-            <a:off x="8503920" y="4709160"/>
-            <a:ext cx="800000" cy="300000"/>
+            <a:off x="566928" y="4700016"/>
+            <a:ext cx="914400" cy="274320"/>
           </a:xfrm>
           <a:prstGeom prst="rect">
             <a:avLst/>
@@ -4340,10 +4580,13 @@
           <a:bodyPr/>
           <a:lstStyle>
             <a:lvl1pPr>
-              <a:defRPr sz="1000">
-                <a:solidFill>
-                  <a:srgbClr val="6B7280"/>
-                </a:solidFill>
+              <a:defRPr sz="900">
+                <a:solidFill>
+                  <a:srgbClr val="5F6B76"/>
+                </a:solidFill>
+                <a:latin typeface="Corbel"/>
+                <a:ea typeface="Corbel"/>
+                <a:cs typeface="Corbel"/>
               </a:defRPr>
             </a:lvl1pPr>
           </a:lstStyle>
@@ -4390,8 +4633,8 @@
         </p:nvSpPr>
         <p:spPr>
           <a:xfrm>
-            <a:off x="502920" y="292608"/>
-            <a:ext cx="8046720" cy="228600"/>
+            <a:off x="566928" y="384048"/>
+            <a:ext cx="7772400" cy="237744"/>
           </a:xfrm>
           <a:prstGeom prst="rect">
             <a:avLst/>
@@ -4407,14 +4650,17 @@
               <a:buNone/>
             </a:pPr>
             <a:r>
-              <a:rPr lang="en-US" sz="1100" b="1" spc="150" kern="0" dirty="0">
-                <a:solidFill>
-                  <a:srgbClr val="0066CC"/>
-                </a:solidFill>
+              <a:rPr lang="en-US" sz="1000" spc="200" kern="0" dirty="0">
+                <a:solidFill>
+                  <a:srgbClr val="9A6A3C"/>
+                </a:solidFill>
+                <a:latin typeface="Corbel" pitchFamily="34" charset="0"/>
+                <a:ea typeface="Corbel" pitchFamily="34" charset="-122"/>
+                <a:cs typeface="Corbel" pitchFamily="34" charset="-120"/>
               </a:rPr>
               <a:t>UNIT 7</a:t>
             </a:r>
-            <a:endParaRPr lang="en-US" sz="1100" dirty="0"/>
+            <a:endParaRPr lang="en-US" sz="1000" dirty="0"/>
           </a:p>
         </p:txBody>
       </p:sp>
@@ -4426,8 +4672,8 @@
         </p:nvSpPr>
         <p:spPr>
           <a:xfrm>
-            <a:off x="502920" y="548640"/>
-            <a:ext cx="8046720" cy="640080"/>
+            <a:off x="566928" y="658368"/>
+            <a:ext cx="7772400" cy="658368"/>
           </a:xfrm>
           <a:prstGeom prst="rect">
             <a:avLst/>
@@ -4440,30 +4686,56 @@
           <a:lstStyle/>
           <a:p>
             <a:pPr indent="0" marL="0">
+              <a:lnSpc>
+                <a:spcPct val="100000"/>
+              </a:lnSpc>
               <a:buNone/>
             </a:pPr>
             <a:r>
-              <a:rPr lang="en-US" sz="2400" b="1" dirty="0">
-                <a:solidFill>
-                  <a:srgbClr val="111827"/>
-                </a:solidFill>
+              <a:rPr lang="en-US" sz="2500" dirty="0">
+                <a:solidFill>
+                  <a:srgbClr val="1C3140"/>
+                </a:solidFill>
+                <a:latin typeface="Constantia" pitchFamily="34" charset="0"/>
+                <a:ea typeface="Constantia" pitchFamily="34" charset="-122"/>
+                <a:cs typeface="Constantia" pitchFamily="34" charset="-120"/>
               </a:rPr>
               <a:t>Putting it together</a:t>
             </a:r>
-            <a:endParaRPr lang="en-US" sz="2400" dirty="0"/>
-          </a:p>
-        </p:txBody>
-      </p:sp>
-      <p:sp>
-        <p:nvSpPr>
-          <p:cNvPr id="4" name="Text 2"/>
+            <a:endParaRPr lang="en-US" sz="2500" dirty="0"/>
+          </a:p>
+        </p:txBody>
+      </p:sp>
+      <p:sp>
+        <p:nvSpPr>
+          <p:cNvPr id="4" name="Shape 2"/>
           <p:cNvSpPr/>
           <p:nvPr/>
         </p:nvSpPr>
         <p:spPr>
           <a:xfrm>
-            <a:off x="685800" y="1325880"/>
-            <a:ext cx="7772400" cy="3200400"/>
+            <a:off x="566928" y="1335024"/>
+            <a:ext cx="566928" cy="20117"/>
+          </a:xfrm>
+          <a:prstGeom prst="rect">
+            <a:avLst/>
+          </a:prstGeom>
+          <a:solidFill>
+            <a:srgbClr val="9A6A3C"/>
+          </a:solidFill>
+          <a:ln/>
+        </p:spPr>
+      </p:sp>
+      <p:sp>
+        <p:nvSpPr>
+          <p:cNvPr id="5" name="Text 3"/>
+          <p:cNvSpPr/>
+          <p:nvPr/>
+        </p:nvSpPr>
+        <p:spPr>
+          <a:xfrm>
+            <a:off x="713232" y="1664208"/>
+            <a:ext cx="7498080" cy="2788920"/>
           </a:xfrm>
           <a:prstGeom prst="rect">
             <a:avLst/>
@@ -4477,19 +4749,22 @@
           <a:p>
             <a:pPr marL="342900" indent="-342900">
               <a:lnSpc>
-                <a:spcPct val="125000"/>
+                <a:spcPct val="130000"/>
               </a:lnSpc>
               <a:spcAft>
-                <a:spcPts val="800"/>
+                <a:spcPts val="1100"/>
               </a:spcAft>
               <a:buSzPct val="100000"/>
-              <a:buChar char="•"/>
+              <a:buChar char="–"/>
             </a:pPr>
             <a:r>
               <a:rPr lang="en-US" sz="1500" dirty="0">
                 <a:solidFill>
-                  <a:srgbClr val="374151"/>
-                </a:solidFill>
+                  <a:srgbClr val="23282E"/>
+                </a:solidFill>
+                <a:latin typeface="Corbel" pitchFamily="34" charset="0"/>
+                <a:ea typeface="Corbel" pitchFamily="34" charset="-122"/>
+                <a:cs typeface="Corbel" pitchFamily="34" charset="-120"/>
               </a:rPr>
               <a:t>State the sampling frame explicitly, and say what it excludes</a:t>
             </a:r>
@@ -4498,19 +4773,22 @@
           <a:p>
             <a:pPr marL="342900" indent="-342900">
               <a:lnSpc>
-                <a:spcPct val="125000"/>
+                <a:spcPct val="130000"/>
               </a:lnSpc>
               <a:spcAft>
-                <a:spcPts val="800"/>
+                <a:spcPts val="1100"/>
               </a:spcAft>
               <a:buSzPct val="100000"/>
-              <a:buChar char="•"/>
+              <a:buChar char="–"/>
             </a:pPr>
             <a:r>
               <a:rPr lang="en-US" sz="1500" dirty="0">
                 <a:solidFill>
-                  <a:srgbClr val="374151"/>
-                </a:solidFill>
+                  <a:srgbClr val="23282E"/>
+                </a:solidFill>
+                <a:latin typeface="Corbel" pitchFamily="34" charset="0"/>
+                <a:ea typeface="Corbel" pitchFamily="34" charset="-122"/>
+                <a:cs typeface="Corbel" pitchFamily="34" charset="-120"/>
               </a:rPr>
               <a:t>Report the calculation with every input value, not just the final number</a:t>
             </a:r>
@@ -4519,19 +4797,22 @@
           <a:p>
             <a:pPr marL="342900" indent="-342900">
               <a:lnSpc>
-                <a:spcPct val="125000"/>
+                <a:spcPct val="130000"/>
               </a:lnSpc>
               <a:spcAft>
-                <a:spcPts val="800"/>
+                <a:spcPts val="1100"/>
               </a:spcAft>
               <a:buSzPct val="100000"/>
-              <a:buChar char="•"/>
+              <a:buChar char="–"/>
             </a:pPr>
             <a:r>
               <a:rPr lang="en-US" sz="1500" dirty="0">
                 <a:solidFill>
-                  <a:srgbClr val="374151"/>
-                </a:solidFill>
+                  <a:srgbClr val="23282E"/>
+                </a:solidFill>
+                <a:latin typeface="Corbel" pitchFamily="34" charset="0"/>
+                <a:ea typeface="Corbel" pitchFamily="34" charset="-122"/>
+                <a:cs typeface="Corbel" pitchFamily="34" charset="-120"/>
               </a:rPr>
               <a:t>Say who was excluded and why, and how non-response was handled</a:t>
             </a:r>
@@ -4540,19 +4821,22 @@
           <a:p>
             <a:pPr marL="342900" indent="-342900">
               <a:lnSpc>
-                <a:spcPct val="125000"/>
+                <a:spcPct val="130000"/>
               </a:lnSpc>
               <a:spcAft>
-                <a:spcPts val="800"/>
+                <a:spcPts val="1100"/>
               </a:spcAft>
               <a:buSzPct val="100000"/>
-              <a:buChar char="•"/>
+              <a:buChar char="–"/>
             </a:pPr>
             <a:r>
               <a:rPr lang="en-US" sz="1500" dirty="0">
                 <a:solidFill>
-                  <a:srgbClr val="374151"/>
-                </a:solidFill>
+                  <a:srgbClr val="23282E"/>
+                </a:solidFill>
+                <a:latin typeface="Corbel" pitchFamily="34" charset="0"/>
+                <a:ea typeface="Corbel" pitchFamily="34" charset="-122"/>
+                <a:cs typeface="Corbel" pitchFamily="34" charset="-120"/>
               </a:rPr>
               <a:t>Mixed methods studies size each strand by its own logic — power calculation for the quantitative strand, information power for the qualitative</a:t>
             </a:r>
@@ -4561,19 +4845,22 @@
           <a:p>
             <a:pPr marL="342900" indent="-342900">
               <a:lnSpc>
-                <a:spcPct val="125000"/>
+                <a:spcPct val="130000"/>
               </a:lnSpc>
               <a:spcAft>
-                <a:spcPts val="800"/>
+                <a:spcPts val="1100"/>
               </a:spcAft>
               <a:buSzPct val="100000"/>
-              <a:buChar char="•"/>
+              <a:buChar char="–"/>
             </a:pPr>
             <a:r>
               <a:rPr lang="en-US" sz="1500" dirty="0">
                 <a:solidFill>
-                  <a:srgbClr val="374151"/>
-                </a:solidFill>
+                  <a:srgbClr val="23282E"/>
+                </a:solidFill>
+                <a:latin typeface="Corbel" pitchFamily="34" charset="0"/>
+                <a:ea typeface="Corbel" pitchFamily="34" charset="-122"/>
+                <a:cs typeface="Corbel" pitchFamily="34" charset="-120"/>
               </a:rPr>
               <a:t>A nested qualitative sample is often drawn purposively from the quantitative sample, which strengthens integration</a:t>
             </a:r>
@@ -4593,8 +4880,8 @@
         </p:nvSpPr>
         <p:spPr>
           <a:xfrm>
-            <a:off x="8503920" y="4709160"/>
-            <a:ext cx="800000" cy="300000"/>
+            <a:off x="566928" y="4700016"/>
+            <a:ext cx="914400" cy="274320"/>
           </a:xfrm>
           <a:prstGeom prst="rect">
             <a:avLst/>
@@ -4609,10 +4896,13 @@
           <a:bodyPr/>
           <a:lstStyle>
             <a:lvl1pPr>
-              <a:defRPr sz="1000">
-                <a:solidFill>
-                  <a:srgbClr val="6B7280"/>
-                </a:solidFill>
+              <a:defRPr sz="900">
+                <a:solidFill>
+                  <a:srgbClr val="5F6B76"/>
+                </a:solidFill>
+                <a:latin typeface="Corbel"/>
+                <a:ea typeface="Corbel"/>
+                <a:cs typeface="Corbel"/>
               </a:defRPr>
             </a:lvl1pPr>
           </a:lstStyle>
@@ -4659,8 +4949,8 @@
         </p:nvSpPr>
         <p:spPr>
           <a:xfrm>
-            <a:off x="502920" y="292608"/>
-            <a:ext cx="8046720" cy="228600"/>
+            <a:off x="566928" y="384048"/>
+            <a:ext cx="7772400" cy="237744"/>
           </a:xfrm>
           <a:prstGeom prst="rect">
             <a:avLst/>
@@ -4676,14 +4966,17 @@
               <a:buNone/>
             </a:pPr>
             <a:r>
-              <a:rPr lang="en-US" sz="1100" b="1" spc="150" kern="0" dirty="0">
-                <a:solidFill>
-                  <a:srgbClr val="00A86B"/>
-                </a:solidFill>
+              <a:rPr lang="en-US" sz="1000" spc="200" kern="0" dirty="0">
+                <a:solidFill>
+                  <a:srgbClr val="9A6A3C"/>
+                </a:solidFill>
+                <a:latin typeface="Corbel" pitchFamily="34" charset="0"/>
+                <a:ea typeface="Corbel" pitchFamily="34" charset="-122"/>
+                <a:cs typeface="Corbel" pitchFamily="34" charset="-120"/>
               </a:rPr>
               <a:t>UNIT 7  ·  WORKED EXAMPLE</a:t>
             </a:r>
-            <a:endParaRPr lang="en-US" sz="1100" dirty="0"/>
+            <a:endParaRPr lang="en-US" sz="1000" dirty="0"/>
           </a:p>
         </p:txBody>
       </p:sp>
@@ -4695,8 +4988,8 @@
         </p:nvSpPr>
         <p:spPr>
           <a:xfrm>
-            <a:off x="502920" y="548640"/>
-            <a:ext cx="8046720" cy="566928"/>
+            <a:off x="566928" y="658368"/>
+            <a:ext cx="7772400" cy="658368"/>
           </a:xfrm>
           <a:prstGeom prst="rect">
             <a:avLst/>
@@ -4709,17 +5002,23 @@
           <a:lstStyle/>
           <a:p>
             <a:pPr indent="0" marL="0">
+              <a:lnSpc>
+                <a:spcPct val="100000"/>
+              </a:lnSpc>
               <a:buNone/>
             </a:pPr>
             <a:r>
-              <a:rPr lang="en-US" sz="2300" b="1" dirty="0">
-                <a:solidFill>
-                  <a:srgbClr val="111827"/>
-                </a:solidFill>
+              <a:rPr lang="en-US" sz="2500" dirty="0">
+                <a:solidFill>
+                  <a:srgbClr val="1C3140"/>
+                </a:solidFill>
+                <a:latin typeface="Constantia" pitchFamily="34" charset="0"/>
+                <a:ea typeface="Constantia" pitchFamily="34" charset="-122"/>
+                <a:cs typeface="Constantia" pitchFamily="34" charset="-120"/>
               </a:rPr>
               <a:t>Calculating a sample size, then adjusting it honestly</a:t>
             </a:r>
-            <a:endParaRPr lang="en-US" sz="2300" dirty="0"/>
+            <a:endParaRPr lang="en-US" sz="2500" dirty="0"/>
           </a:p>
         </p:txBody>
       </p:sp>
@@ -4731,21 +5030,16 @@
         </p:nvSpPr>
         <p:spPr>
           <a:xfrm>
-            <a:off x="502920" y="1207008"/>
-            <a:ext cx="8138160" cy="3200400"/>
+            <a:off x="566928" y="1335024"/>
+            <a:ext cx="566928" cy="20117"/>
           </a:xfrm>
           <a:prstGeom prst="rect">
             <a:avLst/>
           </a:prstGeom>
           <a:solidFill>
-            <a:srgbClr val="F3F7FC"/>
+            <a:srgbClr val="9A6A3C"/>
           </a:solidFill>
-          <a:ln w="9525">
-            <a:solidFill>
-              <a:srgbClr val="0066CC"/>
-            </a:solidFill>
-            <a:prstDash val="solid"/>
-          </a:ln>
+          <a:ln/>
         </p:spPr>
       </p:sp>
       <p:sp>
@@ -4756,8 +5050,8 @@
         </p:nvSpPr>
         <p:spPr>
           <a:xfrm>
-            <a:off x="731520" y="1371600"/>
-            <a:ext cx="7680960" cy="1005840"/>
+            <a:off x="566928" y="1645920"/>
+            <a:ext cx="8010144" cy="822960"/>
           </a:xfrm>
           <a:prstGeom prst="rect">
             <a:avLst/>
@@ -4770,156 +5064,195 @@
           <a:lstStyle/>
           <a:p>
             <a:pPr indent="0" marL="0">
+              <a:lnSpc>
+                <a:spcPct val="124000"/>
+              </a:lnSpc>
+              <a:buNone/>
+            </a:pPr>
+            <a:r>
+              <a:rPr lang="en-US" sz="1300" i="1" dirty="0">
+                <a:solidFill>
+                  <a:srgbClr val="5F6B76"/>
+                </a:solidFill>
+                <a:latin typeface="Constantia" pitchFamily="34" charset="0"/>
+                <a:ea typeface="Constantia" pitchFamily="34" charset="-122"/>
+                <a:cs typeface="Constantia" pitchFamily="34" charset="-120"/>
+              </a:rPr>
+              <a:t>A prevalence survey of anaemia among pregnant women in one district. Previous work suggests roughly 35% prevalence. You want a 5% margin of error at 95% confidence, sampling by health facility.</a:t>
+            </a:r>
+            <a:endParaRPr lang="en-US" sz="1300" dirty="0"/>
+          </a:p>
+        </p:txBody>
+      </p:sp>
+      <p:sp>
+        <p:nvSpPr>
+          <p:cNvPr id="6" name="Text 4"/>
+          <p:cNvSpPr/>
+          <p:nvPr/>
+        </p:nvSpPr>
+        <p:spPr>
+          <a:xfrm>
+            <a:off x="786384" y="2523744"/>
+            <a:ext cx="7406640" cy="1920240"/>
+          </a:xfrm>
+          <a:prstGeom prst="rect">
+            <a:avLst/>
+          </a:prstGeom>
+          <a:noFill/>
+          <a:ln/>
+        </p:spPr>
+        <p:txBody>
+          <a:bodyPr wrap="square" rtlCol="0" anchor="t"/>
+          <a:lstStyle/>
+          <a:p>
+            <a:pPr marL="342900" indent="-342900">
               <a:lnSpc>
                 <a:spcPct val="120000"/>
               </a:lnSpc>
-              <a:buNone/>
-            </a:pPr>
-            <a:r>
-              <a:rPr lang="en-US" sz="1400" i="1" dirty="0">
-                <a:solidFill>
-                  <a:srgbClr val="374151"/>
-                </a:solidFill>
-              </a:rPr>
-              <a:t>A prevalence survey of anaemia among pregnant women in one district. Previous work suggests roughly 35% prevalence. You want a 5% margin of error at 95% confidence, sampling by health facility.</a:t>
-            </a:r>
-            <a:endParaRPr lang="en-US" sz="1400" dirty="0"/>
-          </a:p>
-        </p:txBody>
-      </p:sp>
-      <p:sp>
-        <p:nvSpPr>
-          <p:cNvPr id="6" name="Text 4"/>
-          <p:cNvSpPr/>
-          <p:nvPr/>
-        </p:nvSpPr>
-        <p:spPr>
-          <a:xfrm>
-            <a:off x="868680" y="2395728"/>
-            <a:ext cx="7452360" cy="1920240"/>
-          </a:xfrm>
-          <a:prstGeom prst="rect">
-            <a:avLst/>
-          </a:prstGeom>
-          <a:noFill/>
-          <a:ln/>
-        </p:spPr>
-        <p:txBody>
-          <a:bodyPr wrap="square" rtlCol="0" anchor="t"/>
-          <a:lstStyle/>
-          <a:p>
-            <a:pPr marL="342900" indent="-342900">
-              <a:lnSpc>
-                <a:spcPct val="115000"/>
-              </a:lnSpc>
+              <a:spcAft>
+                <a:spcPts val="500"/>
+              </a:spcAft>
               <a:buSzPct val="100000"/>
               <a:buFont typeface="+mj-lt"/>
               <a:buAutoNum type="arabicPeriod" startAt="1"/>
             </a:pPr>
             <a:r>
-              <a:rPr lang="en-US" sz="1300" dirty="0">
-                <a:solidFill>
-                  <a:srgbClr val="374151"/>
-                </a:solidFill>
+              <a:rPr lang="en-US" sz="1250" dirty="0">
+                <a:solidFill>
+                  <a:srgbClr val="23282E"/>
+                </a:solidFill>
+                <a:latin typeface="Corbel" pitchFamily="34" charset="0"/>
+                <a:ea typeface="Corbel" pitchFamily="34" charset="-122"/>
+                <a:cs typeface="Corbel" pitchFamily="34" charset="-120"/>
               </a:rPr>
               <a:t>Base formula: n = Z²p(1-p)/d² = (1.96² x 0.35 x 0.65) / 0.05²</a:t>
             </a:r>
-            <a:endParaRPr lang="en-US" sz="1300" dirty="0"/>
+            <a:endParaRPr lang="en-US" sz="1250" dirty="0"/>
           </a:p>
           <a:p>
             <a:pPr marL="342900" indent="-342900">
               <a:lnSpc>
-                <a:spcPct val="115000"/>
+                <a:spcPct val="120000"/>
               </a:lnSpc>
+              <a:spcAft>
+                <a:spcPts val="500"/>
+              </a:spcAft>
               <a:buSzPct val="100000"/>
               <a:buFont typeface="+mj-lt"/>
               <a:buAutoNum type="arabicPeriod" startAt="1"/>
             </a:pPr>
             <a:r>
-              <a:rPr lang="en-US" sz="1300" dirty="0">
-                <a:solidFill>
-                  <a:srgbClr val="374151"/>
-                </a:solidFill>
+              <a:rPr lang="en-US" sz="1250" dirty="0">
+                <a:solidFill>
+                  <a:srgbClr val="23282E"/>
+                </a:solidFill>
+                <a:latin typeface="Corbel" pitchFamily="34" charset="0"/>
+                <a:ea typeface="Corbel" pitchFamily="34" charset="-122"/>
+                <a:cs typeface="Corbel" pitchFamily="34" charset="-120"/>
               </a:rPr>
               <a:t>That is (3.8416 x 0.2275) / 0.0025 = 0.8740 / 0.0025 = 350 (rounding up).</a:t>
             </a:r>
-            <a:endParaRPr lang="en-US" sz="1300" dirty="0"/>
+            <a:endParaRPr lang="en-US" sz="1250" dirty="0"/>
           </a:p>
           <a:p>
             <a:pPr marL="342900" indent="-342900">
               <a:lnSpc>
-                <a:spcPct val="115000"/>
+                <a:spcPct val="120000"/>
               </a:lnSpc>
+              <a:spcAft>
+                <a:spcPts val="500"/>
+              </a:spcAft>
               <a:buSzPct val="100000"/>
               <a:buFont typeface="+mj-lt"/>
               <a:buAutoNum type="arabicPeriod" startAt="1"/>
             </a:pPr>
             <a:r>
-              <a:rPr lang="en-US" sz="1300" dirty="0">
-                <a:solidFill>
-                  <a:srgbClr val="374151"/>
-                </a:solidFill>
+              <a:rPr lang="en-US" sz="1250" dirty="0">
+                <a:solidFill>
+                  <a:srgbClr val="23282E"/>
+                </a:solidFill>
+                <a:latin typeface="Corbel" pitchFamily="34" charset="0"/>
+                <a:ea typeface="Corbel" pitchFamily="34" charset="-122"/>
+                <a:cs typeface="Corbel" pitchFamily="34" charset="-120"/>
               </a:rPr>
               <a:t>Cluster sampling by facility: multiply by a design effect of 1.5 → 350 x 1.5 = 525.</a:t>
             </a:r>
-            <a:endParaRPr lang="en-US" sz="1300" dirty="0"/>
+            <a:endParaRPr lang="en-US" sz="1250" dirty="0"/>
           </a:p>
           <a:p>
             <a:pPr marL="342900" indent="-342900">
               <a:lnSpc>
-                <a:spcPct val="115000"/>
+                <a:spcPct val="120000"/>
               </a:lnSpc>
+              <a:spcAft>
+                <a:spcPts val="500"/>
+              </a:spcAft>
               <a:buSzPct val="100000"/>
               <a:buFont typeface="+mj-lt"/>
               <a:buAutoNum type="arabicPeriod" startAt="1"/>
             </a:pPr>
             <a:r>
-              <a:rPr lang="en-US" sz="1300" dirty="0">
-                <a:solidFill>
-                  <a:srgbClr val="374151"/>
-                </a:solidFill>
+              <a:rPr lang="en-US" sz="1250" dirty="0">
+                <a:solidFill>
+                  <a:srgbClr val="23282E"/>
+                </a:solidFill>
+                <a:latin typeface="Corbel" pitchFamily="34" charset="0"/>
+                <a:ea typeface="Corbel" pitchFamily="34" charset="-122"/>
+                <a:cs typeface="Corbel" pitchFamily="34" charset="-120"/>
               </a:rPr>
               <a:t>Expect 10% non-response: 525 / 0.90 = 584.</a:t>
             </a:r>
-            <a:endParaRPr lang="en-US" sz="1300" dirty="0"/>
+            <a:endParaRPr lang="en-US" sz="1250" dirty="0"/>
           </a:p>
           <a:p>
             <a:pPr marL="342900" indent="-342900">
               <a:lnSpc>
-                <a:spcPct val="115000"/>
+                <a:spcPct val="120000"/>
               </a:lnSpc>
+              <a:spcAft>
+                <a:spcPts val="500"/>
+              </a:spcAft>
               <a:buSzPct val="100000"/>
               <a:buFont typeface="+mj-lt"/>
               <a:buAutoNum type="arabicPeriod" startAt="1"/>
             </a:pPr>
             <a:r>
-              <a:rPr lang="en-US" sz="1300" dirty="0">
-                <a:solidFill>
-                  <a:srgbClr val="374151"/>
-                </a:solidFill>
+              <a:rPr lang="en-US" sz="1250" dirty="0">
+                <a:solidFill>
+                  <a:srgbClr val="23282E"/>
+                </a:solidFill>
+                <a:latin typeface="Corbel" pitchFamily="34" charset="0"/>
+                <a:ea typeface="Corbel" pitchFamily="34" charset="-122"/>
+                <a:cs typeface="Corbel" pitchFamily="34" charset="-120"/>
               </a:rPr>
               <a:t>Final target: 584 women. In R: ceiling(1.96^2 * 0.35 * 0.65 / 0.05^2 * 1.5 / 0.9)</a:t>
             </a:r>
-            <a:endParaRPr lang="en-US" sz="1300" dirty="0"/>
+            <a:endParaRPr lang="en-US" sz="1250" dirty="0"/>
           </a:p>
           <a:p>
             <a:pPr marL="342900" indent="-342900">
               <a:lnSpc>
-                <a:spcPct val="115000"/>
+                <a:spcPct val="120000"/>
               </a:lnSpc>
+              <a:spcAft>
+                <a:spcPts val="500"/>
+              </a:spcAft>
               <a:buSzPct val="100000"/>
               <a:buFont typeface="+mj-lt"/>
               <a:buAutoNum type="arabicPeriod" startAt="1"/>
             </a:pPr>
             <a:r>
-              <a:rPr lang="en-US" sz="1300" dirty="0">
-                <a:solidFill>
-                  <a:srgbClr val="374151"/>
-                </a:solidFill>
+              <a:rPr lang="en-US" sz="1250" dirty="0">
+                <a:solidFill>
+                  <a:srgbClr val="23282E"/>
+                </a:solidFill>
+                <a:latin typeface="Corbel" pitchFamily="34" charset="0"/>
+                <a:ea typeface="Corbel" pitchFamily="34" charset="-122"/>
+                <a:cs typeface="Corbel" pitchFamily="34" charset="-120"/>
               </a:rPr>
               <a:t>Report every input — Z, p, d, design effect and non-response — not just the number 584.</a:t>
             </a:r>
-            <a:endParaRPr lang="en-US" sz="1300" dirty="0"/>
+            <a:endParaRPr lang="en-US" sz="1250" dirty="0"/>
           </a:p>
         </p:txBody>
       </p:sp>
@@ -4935,8 +5268,8 @@
         </p:nvSpPr>
         <p:spPr>
           <a:xfrm>
-            <a:off x="8503920" y="4709160"/>
-            <a:ext cx="800000" cy="300000"/>
+            <a:off x="566928" y="4700016"/>
+            <a:ext cx="914400" cy="274320"/>
           </a:xfrm>
           <a:prstGeom prst="rect">
             <a:avLst/>
@@ -4951,10 +5284,13 @@
           <a:bodyPr/>
           <a:lstStyle>
             <a:lvl1pPr>
-              <a:defRPr sz="1000">
-                <a:solidFill>
-                  <a:srgbClr val="6B7280"/>
-                </a:solidFill>
+              <a:defRPr sz="900">
+                <a:solidFill>
+                  <a:srgbClr val="5F6B76"/>
+                </a:solidFill>
+                <a:latin typeface="Corbel"/>
+                <a:ea typeface="Corbel"/>
+                <a:cs typeface="Corbel"/>
               </a:defRPr>
             </a:lvl1pPr>
           </a:lstStyle>
@@ -5001,8 +5337,8 @@
         </p:nvSpPr>
         <p:spPr>
           <a:xfrm>
-            <a:off x="502920" y="292608"/>
-            <a:ext cx="8046720" cy="228600"/>
+            <a:off x="566928" y="384048"/>
+            <a:ext cx="7772400" cy="237744"/>
           </a:xfrm>
           <a:prstGeom prst="rect">
             <a:avLst/>
@@ -5018,14 +5354,17 @@
               <a:buNone/>
             </a:pPr>
             <a:r>
-              <a:rPr lang="en-US" sz="1100" b="1" spc="150" kern="0" dirty="0">
-                <a:solidFill>
-                  <a:srgbClr val="00A86B"/>
-                </a:solidFill>
+              <a:rPr lang="en-US" sz="1000" spc="200" kern="0" dirty="0">
+                <a:solidFill>
+                  <a:srgbClr val="9A6A3C"/>
+                </a:solidFill>
+                <a:latin typeface="Corbel" pitchFamily="34" charset="0"/>
+                <a:ea typeface="Corbel" pitchFamily="34" charset="-122"/>
+                <a:cs typeface="Corbel" pitchFamily="34" charset="-120"/>
               </a:rPr>
               <a:t>UNIT 7  ·  WORKED EXAMPLE</a:t>
             </a:r>
-            <a:endParaRPr lang="en-US" sz="1100" dirty="0"/>
+            <a:endParaRPr lang="en-US" sz="1000" dirty="0"/>
           </a:p>
         </p:txBody>
       </p:sp>
@@ -5037,8 +5376,8 @@
         </p:nvSpPr>
         <p:spPr>
           <a:xfrm>
-            <a:off x="502920" y="548640"/>
-            <a:ext cx="8046720" cy="566928"/>
+            <a:off x="566928" y="658368"/>
+            <a:ext cx="7772400" cy="658368"/>
           </a:xfrm>
           <a:prstGeom prst="rect">
             <a:avLst/>
@@ -5051,17 +5390,23 @@
           <a:lstStyle/>
           <a:p>
             <a:pPr indent="0" marL="0">
+              <a:lnSpc>
+                <a:spcPct val="100000"/>
+              </a:lnSpc>
               <a:buNone/>
             </a:pPr>
             <a:r>
-              <a:rPr lang="en-US" sz="2300" b="1" dirty="0">
-                <a:solidFill>
-                  <a:srgbClr val="111827"/>
-                </a:solidFill>
+              <a:rPr lang="en-US" sz="2500" dirty="0">
+                <a:solidFill>
+                  <a:srgbClr val="1C3140"/>
+                </a:solidFill>
+                <a:latin typeface="Constantia" pitchFamily="34" charset="0"/>
+                <a:ea typeface="Constantia" pitchFamily="34" charset="-122"/>
+                <a:cs typeface="Constantia" pitchFamily="34" charset="-120"/>
               </a:rPr>
               <a:t>Two studies in one document is not mixed methods</a:t>
             </a:r>
-            <a:endParaRPr lang="en-US" sz="2300" dirty="0"/>
+            <a:endParaRPr lang="en-US" sz="2500" dirty="0"/>
           </a:p>
         </p:txBody>
       </p:sp>
@@ -5073,21 +5418,16 @@
         </p:nvSpPr>
         <p:spPr>
           <a:xfrm>
-            <a:off x="502920" y="1207008"/>
-            <a:ext cx="8138160" cy="3200400"/>
+            <a:off x="566928" y="1335024"/>
+            <a:ext cx="566928" cy="20117"/>
           </a:xfrm>
           <a:prstGeom prst="rect">
             <a:avLst/>
           </a:prstGeom>
           <a:solidFill>
-            <a:srgbClr val="F3F7FC"/>
+            <a:srgbClr val="9A6A3C"/>
           </a:solidFill>
-          <a:ln w="9525">
-            <a:solidFill>
-              <a:srgbClr val="0066CC"/>
-            </a:solidFill>
-            <a:prstDash val="solid"/>
-          </a:ln>
+          <a:ln/>
         </p:spPr>
       </p:sp>
       <p:sp>
@@ -5098,8 +5438,8 @@
         </p:nvSpPr>
         <p:spPr>
           <a:xfrm>
-            <a:off x="731520" y="1371600"/>
-            <a:ext cx="7680960" cy="1005840"/>
+            <a:off x="566928" y="1645920"/>
+            <a:ext cx="8010144" cy="822960"/>
           </a:xfrm>
           <a:prstGeom prst="rect">
             <a:avLst/>
@@ -5112,137 +5452,170 @@
           <a:lstStyle/>
           <a:p>
             <a:pPr indent="0" marL="0">
+              <a:lnSpc>
+                <a:spcPct val="124000"/>
+              </a:lnSpc>
+              <a:buNone/>
+            </a:pPr>
+            <a:r>
+              <a:rPr lang="en-US" sz="1300" i="1" dirty="0">
+                <a:solidFill>
+                  <a:srgbClr val="5F6B76"/>
+                </a:solidFill>
+                <a:latin typeface="Constantia" pitchFamily="34" charset="0"/>
+                <a:ea typeface="Constantia" pitchFamily="34" charset="-122"/>
+                <a:cs typeface="Constantia" pitchFamily="34" charset="-120"/>
+              </a:rPr>
+              <a:t>A thesis reports a 600-household survey in Chapter 4 and 20 interviews in Chapter 5. The conclusion summarises both. The student calls it a mixed methods study.</a:t>
+            </a:r>
+            <a:endParaRPr lang="en-US" sz="1300" dirty="0"/>
+          </a:p>
+        </p:txBody>
+      </p:sp>
+      <p:sp>
+        <p:nvSpPr>
+          <p:cNvPr id="6" name="Text 4"/>
+          <p:cNvSpPr/>
+          <p:nvPr/>
+        </p:nvSpPr>
+        <p:spPr>
+          <a:xfrm>
+            <a:off x="786384" y="2523744"/>
+            <a:ext cx="7406640" cy="1920240"/>
+          </a:xfrm>
+          <a:prstGeom prst="rect">
+            <a:avLst/>
+          </a:prstGeom>
+          <a:noFill/>
+          <a:ln/>
+        </p:spPr>
+        <p:txBody>
+          <a:bodyPr wrap="square" rtlCol="0" anchor="t"/>
+          <a:lstStyle/>
+          <a:p>
+            <a:pPr marL="342900" indent="-342900">
               <a:lnSpc>
                 <a:spcPct val="120000"/>
               </a:lnSpc>
-              <a:buNone/>
-            </a:pPr>
-            <a:r>
-              <a:rPr lang="en-US" sz="1400" i="1" dirty="0">
-                <a:solidFill>
-                  <a:srgbClr val="374151"/>
-                </a:solidFill>
-              </a:rPr>
-              <a:t>A thesis reports a 600-household survey in Chapter 4 and 20 interviews in Chapter 5. The conclusion summarises both. The student calls it a mixed methods study.</a:t>
-            </a:r>
-            <a:endParaRPr lang="en-US" sz="1400" dirty="0"/>
-          </a:p>
-        </p:txBody>
-      </p:sp>
-      <p:sp>
-        <p:nvSpPr>
-          <p:cNvPr id="6" name="Text 4"/>
-          <p:cNvSpPr/>
-          <p:nvPr/>
-        </p:nvSpPr>
-        <p:spPr>
-          <a:xfrm>
-            <a:off x="868680" y="2395728"/>
-            <a:ext cx="7452360" cy="1920240"/>
-          </a:xfrm>
-          <a:prstGeom prst="rect">
-            <a:avLst/>
-          </a:prstGeom>
-          <a:noFill/>
-          <a:ln/>
-        </p:spPr>
-        <p:txBody>
-          <a:bodyPr wrap="square" rtlCol="0" anchor="t"/>
-          <a:lstStyle/>
-          <a:p>
-            <a:pPr marL="342900" indent="-342900">
-              <a:lnSpc>
-                <a:spcPct val="115000"/>
-              </a:lnSpc>
+              <a:spcAft>
+                <a:spcPts val="500"/>
+              </a:spcAft>
               <a:buSzPct val="100000"/>
               <a:buFont typeface="+mj-lt"/>
               <a:buAutoNum type="arabicPeriod" startAt="1"/>
             </a:pPr>
             <a:r>
-              <a:rPr lang="en-US" sz="1300" dirty="0">
-                <a:solidFill>
-                  <a:srgbClr val="374151"/>
-                </a:solidFill>
+              <a:rPr lang="en-US" sz="1250" dirty="0">
+                <a:solidFill>
+                  <a:srgbClr val="23282E"/>
+                </a:solidFill>
+                <a:latin typeface="Corbel" pitchFamily="34" charset="0"/>
+                <a:ea typeface="Corbel" pitchFamily="34" charset="-122"/>
+                <a:cs typeface="Corbel" pitchFamily="34" charset="-120"/>
               </a:rPr>
               <a:t>Ask the integration question: what did combining them reveal that neither gave alone?</a:t>
             </a:r>
-            <a:endParaRPr lang="en-US" sz="1300" dirty="0"/>
+            <a:endParaRPr lang="en-US" sz="1250" dirty="0"/>
           </a:p>
           <a:p>
             <a:pPr marL="342900" indent="-342900">
               <a:lnSpc>
-                <a:spcPct val="115000"/>
+                <a:spcPct val="120000"/>
               </a:lnSpc>
+              <a:spcAft>
+                <a:spcPts val="500"/>
+              </a:spcAft>
               <a:buSzPct val="100000"/>
               <a:buFont typeface="+mj-lt"/>
               <a:buAutoNum type="arabicPeriod" startAt="1"/>
             </a:pPr>
             <a:r>
-              <a:rPr lang="en-US" sz="1300" dirty="0">
-                <a:solidFill>
-                  <a:srgbClr val="374151"/>
-                </a:solidFill>
+              <a:rPr lang="en-US" sz="1250" dirty="0">
+                <a:solidFill>
+                  <a:srgbClr val="23282E"/>
+                </a:solidFill>
+                <a:latin typeface="Corbel" pitchFamily="34" charset="0"/>
+                <a:ea typeface="Corbel" pitchFamily="34" charset="-122"/>
+                <a:cs typeface="Corbel" pitchFamily="34" charset="-120"/>
               </a:rPr>
               <a:t>If the answer is "nothing — they are both about the same topic", it is two studies bound together.</a:t>
             </a:r>
-            <a:endParaRPr lang="en-US" sz="1300" dirty="0"/>
+            <a:endParaRPr lang="en-US" sz="1250" dirty="0"/>
           </a:p>
           <a:p>
             <a:pPr marL="342900" indent="-342900">
               <a:lnSpc>
-                <a:spcPct val="115000"/>
+                <a:spcPct val="120000"/>
               </a:lnSpc>
+              <a:spcAft>
+                <a:spcPts val="500"/>
+              </a:spcAft>
               <a:buSzPct val="100000"/>
               <a:buFont typeface="+mj-lt"/>
               <a:buAutoNum type="arabicPeriod" startAt="1"/>
             </a:pPr>
             <a:r>
-              <a:rPr lang="en-US" sz="1300" dirty="0">
-                <a:solidFill>
-                  <a:srgbClr val="374151"/>
-                </a:solidFill>
+              <a:rPr lang="en-US" sz="1250" dirty="0">
+                <a:solidFill>
+                  <a:srgbClr val="23282E"/>
+                </a:solidFill>
+                <a:latin typeface="Corbel" pitchFamily="34" charset="0"/>
+                <a:ea typeface="Corbel" pitchFamily="34" charset="-122"/>
+                <a:cs typeface="Corbel" pitchFamily="34" charset="-120"/>
               </a:rPr>
               <a:t>Real integration would be: the survey found low clinic attendance in one sub-district; the interviews were sampled from there specifically to explain why.</a:t>
             </a:r>
-            <a:endParaRPr lang="en-US" sz="1300" dirty="0"/>
+            <a:endParaRPr lang="en-US" sz="1250" dirty="0"/>
           </a:p>
           <a:p>
             <a:pPr marL="342900" indent="-342900">
               <a:lnSpc>
-                <a:spcPct val="115000"/>
+                <a:spcPct val="120000"/>
               </a:lnSpc>
+              <a:spcAft>
+                <a:spcPts val="500"/>
+              </a:spcAft>
               <a:buSzPct val="100000"/>
               <a:buFont typeface="+mj-lt"/>
               <a:buAutoNum type="arabicPeriod" startAt="1"/>
             </a:pPr>
             <a:r>
-              <a:rPr lang="en-US" sz="1300" dirty="0">
-                <a:solidFill>
-                  <a:srgbClr val="374151"/>
-                </a:solidFill>
+              <a:rPr lang="en-US" sz="1250" dirty="0">
+                <a:solidFill>
+                  <a:srgbClr val="23282E"/>
+                </a:solidFill>
+                <a:latin typeface="Corbel" pitchFamily="34" charset="0"/>
+                <a:ea typeface="Corbel" pitchFamily="34" charset="-122"/>
+                <a:cs typeface="Corbel" pitchFamily="34" charset="-120"/>
               </a:rPr>
               <a:t>Or a joint display: a table with survey findings in one column and the interview themes that explain or contradict them alongside.</a:t>
             </a:r>
-            <a:endParaRPr lang="en-US" sz="1300" dirty="0"/>
+            <a:endParaRPr lang="en-US" sz="1250" dirty="0"/>
           </a:p>
           <a:p>
             <a:pPr marL="342900" indent="-342900">
               <a:lnSpc>
-                <a:spcPct val="115000"/>
+                <a:spcPct val="120000"/>
               </a:lnSpc>
+              <a:spcAft>
+                <a:spcPts val="500"/>
+              </a:spcAft>
               <a:buSzPct val="100000"/>
               <a:buFont typeface="+mj-lt"/>
               <a:buAutoNum type="arabicPeriod" startAt="1"/>
             </a:pPr>
             <a:r>
-              <a:rPr lang="en-US" sz="1300" dirty="0">
-                <a:solidFill>
-                  <a:srgbClr val="374151"/>
-                </a:solidFill>
+              <a:rPr lang="en-US" sz="1250" dirty="0">
+                <a:solidFill>
+                  <a:srgbClr val="23282E"/>
+                </a:solidFill>
+                <a:latin typeface="Corbel" pitchFamily="34" charset="0"/>
+                <a:ea typeface="Corbel" pitchFamily="34" charset="-122"/>
+                <a:cs typeface="Corbel" pitchFamily="34" charset="-120"/>
               </a:rPr>
               <a:t>The interview sample can be drawn from the survey respondents, which ties the strands together by design rather than by assertion.</a:t>
             </a:r>
-            <a:endParaRPr lang="en-US" sz="1300" dirty="0"/>
+            <a:endParaRPr lang="en-US" sz="1250" dirty="0"/>
           </a:p>
         </p:txBody>
       </p:sp>
@@ -5258,8 +5631,8 @@
         </p:nvSpPr>
         <p:spPr>
           <a:xfrm>
-            <a:off x="8503920" y="4709160"/>
-            <a:ext cx="800000" cy="300000"/>
+            <a:off x="566928" y="4700016"/>
+            <a:ext cx="914400" cy="274320"/>
           </a:xfrm>
           <a:prstGeom prst="rect">
             <a:avLst/>
@@ -5274,10 +5647,13 @@
           <a:bodyPr/>
           <a:lstStyle>
             <a:lvl1pPr>
-              <a:defRPr sz="1000">
-                <a:solidFill>
-                  <a:srgbClr val="6B7280"/>
-                </a:solidFill>
+              <a:defRPr sz="900">
+                <a:solidFill>
+                  <a:srgbClr val="5F6B76"/>
+                </a:solidFill>
+                <a:latin typeface="Corbel"/>
+                <a:ea typeface="Corbel"/>
+                <a:cs typeface="Corbel"/>
               </a:defRPr>
             </a:lvl1pPr>
           </a:lstStyle>
@@ -5324,8 +5700,8 @@
         </p:nvSpPr>
         <p:spPr>
           <a:xfrm>
-            <a:off x="502920" y="292608"/>
-            <a:ext cx="8046720" cy="228600"/>
+            <a:off x="566928" y="384048"/>
+            <a:ext cx="7772400" cy="237744"/>
           </a:xfrm>
           <a:prstGeom prst="rect">
             <a:avLst/>
@@ -5341,14 +5717,17 @@
               <a:buNone/>
             </a:pPr>
             <a:r>
-              <a:rPr lang="en-US" sz="1100" b="1" spc="150" kern="0" dirty="0">
-                <a:solidFill>
-                  <a:srgbClr val="0066CC"/>
-                </a:solidFill>
+              <a:rPr lang="en-US" sz="1000" spc="200" kern="0" dirty="0">
+                <a:solidFill>
+                  <a:srgbClr val="9A6A3C"/>
+                </a:solidFill>
+                <a:latin typeface="Corbel" pitchFamily="34" charset="0"/>
+                <a:ea typeface="Corbel" pitchFamily="34" charset="-122"/>
+                <a:cs typeface="Corbel" pitchFamily="34" charset="-120"/>
               </a:rPr>
               <a:t>UNIT 7</a:t>
             </a:r>
-            <a:endParaRPr lang="en-US" sz="1100" dirty="0"/>
+            <a:endParaRPr lang="en-US" sz="1000" dirty="0"/>
           </a:p>
         </p:txBody>
       </p:sp>
@@ -5360,8 +5739,8 @@
         </p:nvSpPr>
         <p:spPr>
           <a:xfrm>
-            <a:off x="502920" y="548640"/>
-            <a:ext cx="8046720" cy="640080"/>
+            <a:off x="566928" y="658368"/>
+            <a:ext cx="7772400" cy="658368"/>
           </a:xfrm>
           <a:prstGeom prst="rect">
             <a:avLst/>
@@ -5374,30 +5753,56 @@
           <a:lstStyle/>
           <a:p>
             <a:pPr indent="0" marL="0">
+              <a:lnSpc>
+                <a:spcPct val="100000"/>
+              </a:lnSpc>
               <a:buNone/>
             </a:pPr>
             <a:r>
-              <a:rPr lang="en-US" sz="2400" b="1" dirty="0">
-                <a:solidFill>
-                  <a:srgbClr val="111827"/>
-                </a:solidFill>
+              <a:rPr lang="en-US" sz="2500" dirty="0">
+                <a:solidFill>
+                  <a:srgbClr val="1C3140"/>
+                </a:solidFill>
+                <a:latin typeface="Constantia" pitchFamily="34" charset="0"/>
+                <a:ea typeface="Constantia" pitchFamily="34" charset="-122"/>
+                <a:cs typeface="Constantia" pitchFamily="34" charset="-120"/>
               </a:rPr>
               <a:t>Key terms (1/2)</a:t>
             </a:r>
-            <a:endParaRPr lang="en-US" sz="2400" dirty="0"/>
-          </a:p>
-        </p:txBody>
-      </p:sp>
-      <p:sp>
-        <p:nvSpPr>
-          <p:cNvPr id="4" name="Text 2"/>
+            <a:endParaRPr lang="en-US" sz="2500" dirty="0"/>
+          </a:p>
+        </p:txBody>
+      </p:sp>
+      <p:sp>
+        <p:nvSpPr>
+          <p:cNvPr id="4" name="Shape 2"/>
           <p:cNvSpPr/>
           <p:nvPr/>
         </p:nvSpPr>
         <p:spPr>
           <a:xfrm>
-            <a:off x="685800" y="1325880"/>
-            <a:ext cx="7772400" cy="3200400"/>
+            <a:off x="566928" y="1335024"/>
+            <a:ext cx="566928" cy="20117"/>
+          </a:xfrm>
+          <a:prstGeom prst="rect">
+            <a:avLst/>
+          </a:prstGeom>
+          <a:solidFill>
+            <a:srgbClr val="9A6A3C"/>
+          </a:solidFill>
+          <a:ln/>
+        </p:spPr>
+      </p:sp>
+      <p:sp>
+        <p:nvSpPr>
+          <p:cNvPr id="5" name="Text 3"/>
+          <p:cNvSpPr/>
+          <p:nvPr/>
+        </p:nvSpPr>
+        <p:spPr>
+          <a:xfrm>
+            <a:off x="713232" y="1664208"/>
+            <a:ext cx="7498080" cy="2788920"/>
           </a:xfrm>
           <a:prstGeom prst="rect">
             <a:avLst/>
@@ -5411,19 +5816,22 @@
           <a:p>
             <a:pPr marL="342900" indent="-342900">
               <a:lnSpc>
-                <a:spcPct val="125000"/>
+                <a:spcPct val="130000"/>
               </a:lnSpc>
               <a:spcAft>
-                <a:spcPts val="800"/>
+                <a:spcPts val="1100"/>
               </a:spcAft>
               <a:buSzPct val="100000"/>
-              <a:buChar char="•"/>
+              <a:buChar char="–"/>
             </a:pPr>
             <a:r>
               <a:rPr lang="en-US" sz="1500" dirty="0">
                 <a:solidFill>
-                  <a:srgbClr val="374151"/>
-                </a:solidFill>
+                  <a:srgbClr val="23282E"/>
+                </a:solidFill>
+                <a:latin typeface="Corbel" pitchFamily="34" charset="0"/>
+                <a:ea typeface="Corbel" pitchFamily="34" charset="-122"/>
+                <a:cs typeface="Corbel" pitchFamily="34" charset="-120"/>
               </a:rPr>
               <a:t>Sampling frame — The list or procedure from which the sample is actually drawn.</a:t>
             </a:r>
@@ -5432,19 +5840,22 @@
           <a:p>
             <a:pPr marL="342900" indent="-342900">
               <a:lnSpc>
-                <a:spcPct val="125000"/>
+                <a:spcPct val="130000"/>
               </a:lnSpc>
               <a:spcAft>
-                <a:spcPts val="800"/>
+                <a:spcPts val="1100"/>
               </a:spcAft>
               <a:buSzPct val="100000"/>
-              <a:buChar char="•"/>
+              <a:buChar char="–"/>
             </a:pPr>
             <a:r>
               <a:rPr lang="en-US" sz="1500" dirty="0">
                 <a:solidFill>
-                  <a:srgbClr val="374151"/>
-                </a:solidFill>
+                  <a:srgbClr val="23282E"/>
+                </a:solidFill>
+                <a:latin typeface="Corbel" pitchFamily="34" charset="0"/>
+                <a:ea typeface="Corbel" pitchFamily="34" charset="-122"/>
+                <a:cs typeface="Corbel" pitchFamily="34" charset="-120"/>
               </a:rPr>
               <a:t>Design effect (DEFF) — The factor by which variance increases because of cluster sampling rather than simple random sampling.</a:t>
             </a:r>
@@ -5453,19 +5864,22 @@
           <a:p>
             <a:pPr marL="342900" indent="-342900">
               <a:lnSpc>
-                <a:spcPct val="125000"/>
+                <a:spcPct val="130000"/>
               </a:lnSpc>
               <a:spcAft>
-                <a:spcPts val="800"/>
+                <a:spcPts val="1100"/>
               </a:spcAft>
               <a:buSzPct val="100000"/>
-              <a:buChar char="•"/>
+              <a:buChar char="–"/>
             </a:pPr>
             <a:r>
               <a:rPr lang="en-US" sz="1500" dirty="0">
                 <a:solidFill>
-                  <a:srgbClr val="374151"/>
-                </a:solidFill>
+                  <a:srgbClr val="23282E"/>
+                </a:solidFill>
+                <a:latin typeface="Corbel" pitchFamily="34" charset="0"/>
+                <a:ea typeface="Corbel" pitchFamily="34" charset="-122"/>
+                <a:cs typeface="Corbel" pitchFamily="34" charset="-120"/>
               </a:rPr>
               <a:t>Power — The probability that a study will detect an effect of a specified size if it truly exists.</a:t>
             </a:r>
@@ -5474,19 +5888,22 @@
           <a:p>
             <a:pPr marL="342900" indent="-342900">
               <a:lnSpc>
-                <a:spcPct val="125000"/>
+                <a:spcPct val="130000"/>
               </a:lnSpc>
               <a:spcAft>
-                <a:spcPts val="800"/>
+                <a:spcPts val="1100"/>
               </a:spcAft>
               <a:buSzPct val="100000"/>
-              <a:buChar char="•"/>
+              <a:buChar char="–"/>
             </a:pPr>
             <a:r>
               <a:rPr lang="en-US" sz="1500" dirty="0">
                 <a:solidFill>
-                  <a:srgbClr val="374151"/>
-                </a:solidFill>
+                  <a:srgbClr val="23282E"/>
+                </a:solidFill>
+                <a:latin typeface="Corbel" pitchFamily="34" charset="0"/>
+                <a:ea typeface="Corbel" pitchFamily="34" charset="-122"/>
+                <a:cs typeface="Corbel" pitchFamily="34" charset="-120"/>
               </a:rPr>
               <a:t>Effect size — The magnitude of a difference or association, independent of sample size.</a:t>
             </a:r>
@@ -5506,8 +5923,8 @@
         </p:nvSpPr>
         <p:spPr>
           <a:xfrm>
-            <a:off x="8503920" y="4709160"/>
-            <a:ext cx="800000" cy="300000"/>
+            <a:off x="566928" y="4700016"/>
+            <a:ext cx="914400" cy="274320"/>
           </a:xfrm>
           <a:prstGeom prst="rect">
             <a:avLst/>
@@ -5522,10 +5939,13 @@
           <a:bodyPr/>
           <a:lstStyle>
             <a:lvl1pPr>
-              <a:defRPr sz="1000">
-                <a:solidFill>
-                  <a:srgbClr val="6B7280"/>
-                </a:solidFill>
+              <a:defRPr sz="900">
+                <a:solidFill>
+                  <a:srgbClr val="5F6B76"/>
+                </a:solidFill>
+                <a:latin typeface="Corbel"/>
+                <a:ea typeface="Corbel"/>
+                <a:cs typeface="Corbel"/>
               </a:defRPr>
             </a:lvl1pPr>
           </a:lstStyle>
@@ -5572,8 +5992,8 @@
         </p:nvSpPr>
         <p:spPr>
           <a:xfrm>
-            <a:off x="502920" y="292608"/>
-            <a:ext cx="8046720" cy="228600"/>
+            <a:off x="566928" y="384048"/>
+            <a:ext cx="7772400" cy="237744"/>
           </a:xfrm>
           <a:prstGeom prst="rect">
             <a:avLst/>
@@ -5589,14 +6009,17 @@
               <a:buNone/>
             </a:pPr>
             <a:r>
-              <a:rPr lang="en-US" sz="1100" b="1" spc="150" kern="0" dirty="0">
-                <a:solidFill>
-                  <a:srgbClr val="0066CC"/>
-                </a:solidFill>
+              <a:rPr lang="en-US" sz="1000" spc="200" kern="0" dirty="0">
+                <a:solidFill>
+                  <a:srgbClr val="9A6A3C"/>
+                </a:solidFill>
+                <a:latin typeface="Corbel" pitchFamily="34" charset="0"/>
+                <a:ea typeface="Corbel" pitchFamily="34" charset="-122"/>
+                <a:cs typeface="Corbel" pitchFamily="34" charset="-120"/>
               </a:rPr>
               <a:t>UNIT 7</a:t>
             </a:r>
-            <a:endParaRPr lang="en-US" sz="1100" dirty="0"/>
+            <a:endParaRPr lang="en-US" sz="1000" dirty="0"/>
           </a:p>
         </p:txBody>
       </p:sp>
@@ -5608,8 +6031,8 @@
         </p:nvSpPr>
         <p:spPr>
           <a:xfrm>
-            <a:off x="502920" y="548640"/>
-            <a:ext cx="8046720" cy="640080"/>
+            <a:off x="566928" y="658368"/>
+            <a:ext cx="7772400" cy="658368"/>
           </a:xfrm>
           <a:prstGeom prst="rect">
             <a:avLst/>
@@ -5622,30 +6045,56 @@
           <a:lstStyle/>
           <a:p>
             <a:pPr indent="0" marL="0">
+              <a:lnSpc>
+                <a:spcPct val="100000"/>
+              </a:lnSpc>
               <a:buNone/>
             </a:pPr>
             <a:r>
-              <a:rPr lang="en-US" sz="2400" b="1" dirty="0">
-                <a:solidFill>
-                  <a:srgbClr val="111827"/>
-                </a:solidFill>
+              <a:rPr lang="en-US" sz="2500" dirty="0">
+                <a:solidFill>
+                  <a:srgbClr val="1C3140"/>
+                </a:solidFill>
+                <a:latin typeface="Constantia" pitchFamily="34" charset="0"/>
+                <a:ea typeface="Constantia" pitchFamily="34" charset="-122"/>
+                <a:cs typeface="Constantia" pitchFamily="34" charset="-120"/>
               </a:rPr>
               <a:t>Key terms (2/2)</a:t>
             </a:r>
-            <a:endParaRPr lang="en-US" sz="2400" dirty="0"/>
-          </a:p>
-        </p:txBody>
-      </p:sp>
-      <p:sp>
-        <p:nvSpPr>
-          <p:cNvPr id="4" name="Text 2"/>
+            <a:endParaRPr lang="en-US" sz="2500" dirty="0"/>
+          </a:p>
+        </p:txBody>
+      </p:sp>
+      <p:sp>
+        <p:nvSpPr>
+          <p:cNvPr id="4" name="Shape 2"/>
           <p:cNvSpPr/>
           <p:nvPr/>
         </p:nvSpPr>
         <p:spPr>
           <a:xfrm>
-            <a:off x="685800" y="1325880"/>
-            <a:ext cx="7772400" cy="3200400"/>
+            <a:off x="566928" y="1335024"/>
+            <a:ext cx="566928" cy="20117"/>
+          </a:xfrm>
+          <a:prstGeom prst="rect">
+            <a:avLst/>
+          </a:prstGeom>
+          <a:solidFill>
+            <a:srgbClr val="9A6A3C"/>
+          </a:solidFill>
+          <a:ln/>
+        </p:spPr>
+      </p:sp>
+      <p:sp>
+        <p:nvSpPr>
+          <p:cNvPr id="5" name="Text 3"/>
+          <p:cNvSpPr/>
+          <p:nvPr/>
+        </p:nvSpPr>
+        <p:spPr>
+          <a:xfrm>
+            <a:off x="713232" y="1664208"/>
+            <a:ext cx="7498080" cy="2788920"/>
           </a:xfrm>
           <a:prstGeom prst="rect">
             <a:avLst/>
@@ -5659,19 +6108,22 @@
           <a:p>
             <a:pPr marL="342900" indent="-342900">
               <a:lnSpc>
-                <a:spcPct val="125000"/>
+                <a:spcPct val="130000"/>
               </a:lnSpc>
               <a:spcAft>
-                <a:spcPts val="800"/>
+                <a:spcPts val="1100"/>
               </a:spcAft>
               <a:buSzPct val="100000"/>
-              <a:buChar char="•"/>
+              <a:buChar char="–"/>
             </a:pPr>
             <a:r>
               <a:rPr lang="en-US" sz="1500" dirty="0">
                 <a:solidFill>
-                  <a:srgbClr val="374151"/>
-                </a:solidFill>
+                  <a:srgbClr val="23282E"/>
+                </a:solidFill>
+                <a:latin typeface="Corbel" pitchFamily="34" charset="0"/>
+                <a:ea typeface="Corbel" pitchFamily="34" charset="-122"/>
+                <a:cs typeface="Corbel" pitchFamily="34" charset="-120"/>
               </a:rPr>
               <a:t>Integration — The deliberate bringing together of quantitative and qualitative strands to produce insight neither gives alone.</a:t>
             </a:r>
@@ -5680,19 +6132,22 @@
           <a:p>
             <a:pPr marL="342900" indent="-342900">
               <a:lnSpc>
-                <a:spcPct val="125000"/>
+                <a:spcPct val="130000"/>
               </a:lnSpc>
               <a:spcAft>
-                <a:spcPts val="800"/>
+                <a:spcPts val="1100"/>
               </a:spcAft>
               <a:buSzPct val="100000"/>
-              <a:buChar char="•"/>
+              <a:buChar char="–"/>
             </a:pPr>
             <a:r>
               <a:rPr lang="en-US" sz="1500" dirty="0">
                 <a:solidFill>
-                  <a:srgbClr val="374151"/>
-                </a:solidFill>
+                  <a:srgbClr val="23282E"/>
+                </a:solidFill>
+                <a:latin typeface="Corbel" pitchFamily="34" charset="0"/>
+                <a:ea typeface="Corbel" pitchFamily="34" charset="-122"/>
+                <a:cs typeface="Corbel" pitchFamily="34" charset="-120"/>
               </a:rPr>
               <a:t>Joint display — A table or figure presenting quantitative and qualitative results side by side to show how they relate.</a:t>
             </a:r>
@@ -5712,8 +6167,8 @@
         </p:nvSpPr>
         <p:spPr>
           <a:xfrm>
-            <a:off x="8503920" y="4709160"/>
-            <a:ext cx="800000" cy="300000"/>
+            <a:off x="566928" y="4700016"/>
+            <a:ext cx="914400" cy="274320"/>
           </a:xfrm>
           <a:prstGeom prst="rect">
             <a:avLst/>
@@ -5728,10 +6183,13 @@
           <a:bodyPr/>
           <a:lstStyle>
             <a:lvl1pPr>
-              <a:defRPr sz="1000">
-                <a:solidFill>
-                  <a:srgbClr val="6B7280"/>
-                </a:solidFill>
+              <a:defRPr sz="900">
+                <a:solidFill>
+                  <a:srgbClr val="5F6B76"/>
+                </a:solidFill>
+                <a:latin typeface="Corbel"/>
+                <a:ea typeface="Corbel"/>
+                <a:cs typeface="Corbel"/>
               </a:defRPr>
             </a:lvl1pPr>
           </a:lstStyle>
@@ -5778,8 +6236,8 @@
         </p:nvSpPr>
         <p:spPr>
           <a:xfrm>
-            <a:off x="502920" y="292608"/>
-            <a:ext cx="8046720" cy="228600"/>
+            <a:off x="685800" y="1024128"/>
+            <a:ext cx="6766560" cy="292608"/>
           </a:xfrm>
           <a:prstGeom prst="rect">
             <a:avLst/>
@@ -5795,14 +6253,17 @@
               <a:buNone/>
             </a:pPr>
             <a:r>
-              <a:rPr lang="en-US" sz="1100" b="1" spc="150" kern="0" dirty="0">
-                <a:solidFill>
-                  <a:srgbClr val="0066CC"/>
-                </a:solidFill>
-              </a:rPr>
-              <a:t>UNIT 7  ·  OVER TO YOU</a:t>
-            </a:r>
-            <a:endParaRPr lang="en-US" sz="1100" dirty="0"/>
+              <a:rPr lang="en-US" sz="1150" spc="240" kern="0" dirty="0">
+                <a:solidFill>
+                  <a:srgbClr val="C8A67B"/>
+                </a:solidFill>
+                <a:latin typeface="Corbel" pitchFamily="34" charset="0"/>
+                <a:ea typeface="Corbel" pitchFamily="34" charset="-122"/>
+                <a:cs typeface="Corbel" pitchFamily="34" charset="-120"/>
+              </a:rPr>
+              <a:t>Over to you</a:t>
+            </a:r>
+            <a:endParaRPr lang="en-US" sz="1150" dirty="0"/>
           </a:p>
         </p:txBody>
       </p:sp>
@@ -5814,8 +6275,8 @@
         </p:nvSpPr>
         <p:spPr>
           <a:xfrm>
-            <a:off x="502920" y="548640"/>
-            <a:ext cx="8046720" cy="640080"/>
+            <a:off x="685800" y="1700784"/>
+            <a:ext cx="6858000" cy="640080"/>
           </a:xfrm>
           <a:prstGeom prst="rect">
             <a:avLst/>
@@ -5831,14 +6292,17 @@
               <a:buNone/>
             </a:pPr>
             <a:r>
-              <a:rPr lang="en-US" sz="2400" b="1" dirty="0">
-                <a:solidFill>
-                  <a:srgbClr val="111827"/>
-                </a:solidFill>
+              <a:rPr lang="en-US" sz="3000" dirty="0">
+                <a:solidFill>
+                  <a:srgbClr val="FFFFFF"/>
+                </a:solidFill>
+                <a:latin typeface="Constantia" pitchFamily="34" charset="0"/>
+                <a:ea typeface="Constantia" pitchFamily="34" charset="-122"/>
+                <a:cs typeface="Constantia" pitchFamily="34" charset="-120"/>
               </a:rPr>
               <a:t>Activity</a:t>
             </a:r>
-            <a:endParaRPr lang="en-US" sz="2400" dirty="0"/>
+            <a:endParaRPr lang="en-US" sz="3000" dirty="0"/>
           </a:p>
         </p:txBody>
       </p:sp>
@@ -5850,8 +6314,8 @@
         </p:nvSpPr>
         <p:spPr>
           <a:xfrm>
-            <a:off x="685800" y="1325880"/>
-            <a:ext cx="7772400" cy="3200400"/>
+            <a:off x="685800" y="2487168"/>
+            <a:ext cx="6949440" cy="1737360"/>
           </a:xfrm>
           <a:prstGeom prst="rect">
             <a:avLst/>
@@ -5863,70 +6327,24 @@
           <a:bodyPr wrap="square" rtlCol="0" anchor="t"/>
           <a:lstStyle/>
           <a:p>
-            <a:pPr marL="342900" indent="-342900">
+            <a:pPr indent="0" marL="0">
               <a:lnSpc>
-                <a:spcPct val="125000"/>
+                <a:spcPct val="134000"/>
               </a:lnSpc>
-              <a:spcAft>
-                <a:spcPts val="800"/>
-              </a:spcAft>
-              <a:buSzPct val="100000"/>
-              <a:buChar char="•"/>
-            </a:pPr>
-            <a:r>
-              <a:rPr lang="en-US" sz="1300" dirty="0">
-                <a:solidFill>
-                  <a:srgbClr val="374151"/>
-                </a:solidFill>
+              <a:buNone/>
+            </a:pPr>
+            <a:r>
+              <a:rPr lang="en-US" sz="1450" dirty="0">
+                <a:solidFill>
+                  <a:srgbClr val="C4CCD4"/>
+                </a:solidFill>
+                <a:latin typeface="Corbel" pitchFamily="34" charset="0"/>
+                <a:ea typeface="Corbel" pitchFamily="34" charset="-122"/>
+                <a:cs typeface="Corbel" pitchFamily="34" charset="-120"/>
               </a:rPr>
               <a:t>Calculate the sample size for a prevalence study in your own field: choose p, set d = 0.05, then inflate for 15% non-response and a design effect of 1.5. Show every step. Then state, in one sentence each, the sampling frame and what it excludes.</a:t>
             </a:r>
-            <a:endParaRPr lang="en-US" sz="1300" dirty="0"/>
-          </a:p>
-        </p:txBody>
-      </p:sp>
-      <p:sp>
-        <p:nvSpPr>
-          <p:cNvPr id="25" name="Slide Number Placeholder 0"/>
-          <p:cNvSpPr>
-            <a:spLocks noGrp="1"/>
-          </p:cNvSpPr>
-          <p:nvPr>
-            <p:ph type="sldNum" sz="quarter" idx="4294967295"/>
-          </p:nvPr>
-        </p:nvSpPr>
-        <p:spPr>
-          <a:xfrm>
-            <a:off x="8503920" y="4709160"/>
-            <a:ext cx="800000" cy="300000"/>
-          </a:xfrm>
-          <a:prstGeom prst="rect">
-            <a:avLst/>
-          </a:prstGeom>
-          <a:extLst>
-            <a:ext uri="{C572A759-6A51-4108-AA02-DFA0A04FC94B}">
-              <ma14:wrappingTextBoxFlag xmlns:ma14="http://schemas.microsoft.com/office/mac/drawingml/2011/main" val="0"/>
-            </a:ext>
-          </a:extLst>
-        </p:spPr>
-        <p:txBody>
-          <a:bodyPr/>
-          <a:lstStyle>
-            <a:lvl1pPr>
-              <a:defRPr sz="1000">
-                <a:solidFill>
-                  <a:srgbClr val="6B7280"/>
-                </a:solidFill>
-              </a:defRPr>
-            </a:lvl1pPr>
-          </a:lstStyle>
-          <a:p>
-            <a:pPr algn="l"/>
-            <a:fld id="{F7021451-1387-4CA6-816F-3879F97B5CBC}" type="slidenum">
-              <a:rPr b="0" lang="en-US"/>
-              <a:t>18</a:t>
-            </a:fld>
-            <a:endParaRPr lang="en-US"/>
+            <a:endParaRPr lang="en-US" sz="1450" dirty="0"/>
           </a:p>
         </p:txBody>
       </p:sp>
@@ -5963,8 +6381,8 @@
         </p:nvSpPr>
         <p:spPr>
           <a:xfrm>
-            <a:off x="502920" y="292608"/>
-            <a:ext cx="8046720" cy="228600"/>
+            <a:off x="566928" y="384048"/>
+            <a:ext cx="7772400" cy="237744"/>
           </a:xfrm>
           <a:prstGeom prst="rect">
             <a:avLst/>
@@ -5980,14 +6398,17 @@
               <a:buNone/>
             </a:pPr>
             <a:r>
-              <a:rPr lang="en-US" sz="1100" b="1" spc="150" kern="0" dirty="0">
-                <a:solidFill>
-                  <a:srgbClr val="0066CC"/>
-                </a:solidFill>
+              <a:rPr lang="en-US" sz="1000" spc="200" kern="0" dirty="0">
+                <a:solidFill>
+                  <a:srgbClr val="9A6A3C"/>
+                </a:solidFill>
+                <a:latin typeface="Corbel" pitchFamily="34" charset="0"/>
+                <a:ea typeface="Corbel" pitchFamily="34" charset="-122"/>
+                <a:cs typeface="Corbel" pitchFamily="34" charset="-120"/>
               </a:rPr>
               <a:t>UNIT 7</a:t>
             </a:r>
-            <a:endParaRPr lang="en-US" sz="1100" dirty="0"/>
+            <a:endParaRPr lang="en-US" sz="1000" dirty="0"/>
           </a:p>
         </p:txBody>
       </p:sp>
@@ -5999,8 +6420,8 @@
         </p:nvSpPr>
         <p:spPr>
           <a:xfrm>
-            <a:off x="502920" y="548640"/>
-            <a:ext cx="8046720" cy="640080"/>
+            <a:off x="566928" y="658368"/>
+            <a:ext cx="7772400" cy="658368"/>
           </a:xfrm>
           <a:prstGeom prst="rect">
             <a:avLst/>
@@ -6013,30 +6434,56 @@
           <a:lstStyle/>
           <a:p>
             <a:pPr indent="0" marL="0">
+              <a:lnSpc>
+                <a:spcPct val="100000"/>
+              </a:lnSpc>
               <a:buNone/>
             </a:pPr>
             <a:r>
-              <a:rPr lang="en-US" sz="2400" b="1" dirty="0">
-                <a:solidFill>
-                  <a:srgbClr val="111827"/>
-                </a:solidFill>
+              <a:rPr lang="en-US" sz="2500" dirty="0">
+                <a:solidFill>
+                  <a:srgbClr val="1C3140"/>
+                </a:solidFill>
+                <a:latin typeface="Constantia" pitchFamily="34" charset="0"/>
+                <a:ea typeface="Constantia" pitchFamily="34" charset="-122"/>
+                <a:cs typeface="Constantia" pitchFamily="34" charset="-120"/>
               </a:rPr>
               <a:t>What you will be able to do</a:t>
             </a:r>
-            <a:endParaRPr lang="en-US" sz="2400" dirty="0"/>
-          </a:p>
-        </p:txBody>
-      </p:sp>
-      <p:sp>
-        <p:nvSpPr>
-          <p:cNvPr id="4" name="Text 2"/>
+            <a:endParaRPr lang="en-US" sz="2500" dirty="0"/>
+          </a:p>
+        </p:txBody>
+      </p:sp>
+      <p:sp>
+        <p:nvSpPr>
+          <p:cNvPr id="4" name="Shape 2"/>
           <p:cNvSpPr/>
           <p:nvPr/>
         </p:nvSpPr>
         <p:spPr>
           <a:xfrm>
-            <a:off x="685800" y="1325880"/>
-            <a:ext cx="7772400" cy="3200400"/>
+            <a:off x="566928" y="1335024"/>
+            <a:ext cx="566928" cy="20117"/>
+          </a:xfrm>
+          <a:prstGeom prst="rect">
+            <a:avLst/>
+          </a:prstGeom>
+          <a:solidFill>
+            <a:srgbClr val="9A6A3C"/>
+          </a:solidFill>
+          <a:ln/>
+        </p:spPr>
+      </p:sp>
+      <p:sp>
+        <p:nvSpPr>
+          <p:cNvPr id="5" name="Text 3"/>
+          <p:cNvSpPr/>
+          <p:nvPr/>
+        </p:nvSpPr>
+        <p:spPr>
+          <a:xfrm>
+            <a:off x="713232" y="1664208"/>
+            <a:ext cx="7498080" cy="2788920"/>
           </a:xfrm>
           <a:prstGeom prst="rect">
             <a:avLst/>
@@ -6050,128 +6497,146 @@
           <a:p>
             <a:pPr marL="342900" indent="-342900">
               <a:lnSpc>
-                <a:spcPct val="125000"/>
+                <a:spcPct val="130000"/>
               </a:lnSpc>
               <a:spcAft>
-                <a:spcPts val="800"/>
+                <a:spcPts val="1100"/>
               </a:spcAft>
               <a:buSzPct val="100000"/>
-              <a:buChar char="•"/>
-            </a:pPr>
-            <a:r>
-              <a:rPr lang="en-US" sz="1700" dirty="0">
-                <a:solidFill>
-                  <a:srgbClr val="374151"/>
-                </a:solidFill>
+              <a:buChar char="–"/>
+            </a:pPr>
+            <a:r>
+              <a:rPr lang="en-US" sz="1650" dirty="0">
+                <a:solidFill>
+                  <a:srgbClr val="23282E"/>
+                </a:solidFill>
+                <a:latin typeface="Corbel" pitchFamily="34" charset="0"/>
+                <a:ea typeface="Corbel" pitchFamily="34" charset="-122"/>
+                <a:cs typeface="Corbel" pitchFamily="34" charset="-120"/>
               </a:rPr>
               <a:t>Describe convergent, explanatory sequential and exploratory sequential designs</a:t>
             </a:r>
-            <a:endParaRPr lang="en-US" sz="1700" dirty="0"/>
+            <a:endParaRPr lang="en-US" sz="1650" dirty="0"/>
           </a:p>
           <a:p>
             <a:pPr marL="342900" indent="-342900">
               <a:lnSpc>
-                <a:spcPct val="125000"/>
+                <a:spcPct val="130000"/>
               </a:lnSpc>
               <a:spcAft>
-                <a:spcPts val="800"/>
+                <a:spcPts val="1100"/>
               </a:spcAft>
               <a:buSzPct val="100000"/>
-              <a:buChar char="•"/>
-            </a:pPr>
-            <a:r>
-              <a:rPr lang="en-US" sz="1700" dirty="0">
-                <a:solidFill>
-                  <a:srgbClr val="374151"/>
-                </a:solidFill>
+              <a:buChar char="–"/>
+            </a:pPr>
+            <a:r>
+              <a:rPr lang="en-US" sz="1650" dirty="0">
+                <a:solidFill>
+                  <a:srgbClr val="23282E"/>
+                </a:solidFill>
+                <a:latin typeface="Corbel" pitchFamily="34" charset="0"/>
+                <a:ea typeface="Corbel" pitchFamily="34" charset="-122"/>
+                <a:cs typeface="Corbel" pitchFamily="34" charset="-120"/>
               </a:rPr>
               <a:t>Explain what integration means and why it is the defining feature of mixed methods</a:t>
             </a:r>
-            <a:endParaRPr lang="en-US" sz="1700" dirty="0"/>
+            <a:endParaRPr lang="en-US" sz="1650" dirty="0"/>
           </a:p>
           <a:p>
             <a:pPr marL="342900" indent="-342900">
               <a:lnSpc>
-                <a:spcPct val="125000"/>
+                <a:spcPct val="130000"/>
               </a:lnSpc>
               <a:spcAft>
-                <a:spcPts val="800"/>
+                <a:spcPts val="1100"/>
               </a:spcAft>
               <a:buSzPct val="100000"/>
-              <a:buChar char="•"/>
-            </a:pPr>
-            <a:r>
-              <a:rPr lang="en-US" sz="1700" dirty="0">
-                <a:solidFill>
-                  <a:srgbClr val="374151"/>
-                </a:solidFill>
+              <a:buChar char="–"/>
+            </a:pPr>
+            <a:r>
+              <a:rPr lang="en-US" sz="1650" dirty="0">
+                <a:solidFill>
+                  <a:srgbClr val="23282E"/>
+                </a:solidFill>
+                <a:latin typeface="Corbel" pitchFamily="34" charset="0"/>
+                <a:ea typeface="Corbel" pitchFamily="34" charset="-122"/>
+                <a:cs typeface="Corbel" pitchFamily="34" charset="-120"/>
               </a:rPr>
               <a:t>Distinguish probability from non-probability sampling and state when each is appropriate</a:t>
             </a:r>
-            <a:endParaRPr lang="en-US" sz="1700" dirty="0"/>
+            <a:endParaRPr lang="en-US" sz="1650" dirty="0"/>
           </a:p>
           <a:p>
             <a:pPr marL="342900" indent="-342900">
               <a:lnSpc>
-                <a:spcPct val="125000"/>
+                <a:spcPct val="130000"/>
               </a:lnSpc>
               <a:spcAft>
-                <a:spcPts val="800"/>
+                <a:spcPts val="1100"/>
               </a:spcAft>
               <a:buSzPct val="100000"/>
-              <a:buChar char="•"/>
-            </a:pPr>
-            <a:r>
-              <a:rPr lang="en-US" sz="1700" dirty="0">
-                <a:solidFill>
-                  <a:srgbClr val="374151"/>
-                </a:solidFill>
+              <a:buChar char="–"/>
+            </a:pPr>
+            <a:r>
+              <a:rPr lang="en-US" sz="1650" dirty="0">
+                <a:solidFill>
+                  <a:srgbClr val="23282E"/>
+                </a:solidFill>
+                <a:latin typeface="Corbel" pitchFamily="34" charset="0"/>
+                <a:ea typeface="Corbel" pitchFamily="34" charset="-122"/>
+                <a:cs typeface="Corbel" pitchFamily="34" charset="-120"/>
               </a:rPr>
               <a:t>Calculate a sample size for a prevalence study and for comparing two proportions</a:t>
             </a:r>
-            <a:endParaRPr lang="en-US" sz="1700" dirty="0"/>
+            <a:endParaRPr lang="en-US" sz="1650" dirty="0"/>
           </a:p>
           <a:p>
             <a:pPr marL="342900" indent="-342900">
               <a:lnSpc>
-                <a:spcPct val="125000"/>
+                <a:spcPct val="130000"/>
               </a:lnSpc>
               <a:spcAft>
-                <a:spcPts val="800"/>
+                <a:spcPts val="1100"/>
               </a:spcAft>
               <a:buSzPct val="100000"/>
-              <a:buChar char="•"/>
-            </a:pPr>
-            <a:r>
-              <a:rPr lang="en-US" sz="1700" dirty="0">
-                <a:solidFill>
-                  <a:srgbClr val="374151"/>
-                </a:solidFill>
+              <a:buChar char="–"/>
+            </a:pPr>
+            <a:r>
+              <a:rPr lang="en-US" sz="1650" dirty="0">
+                <a:solidFill>
+                  <a:srgbClr val="23282E"/>
+                </a:solidFill>
+                <a:latin typeface="Corbel" pitchFamily="34" charset="0"/>
+                <a:ea typeface="Corbel" pitchFamily="34" charset="-122"/>
+                <a:cs typeface="Corbel" pitchFamily="34" charset="-120"/>
               </a:rPr>
               <a:t>Explain power, effect size and the consequences of an underpowered study</a:t>
             </a:r>
-            <a:endParaRPr lang="en-US" sz="1700" dirty="0"/>
+            <a:endParaRPr lang="en-US" sz="1650" dirty="0"/>
           </a:p>
           <a:p>
             <a:pPr marL="342900" indent="-342900">
               <a:lnSpc>
-                <a:spcPct val="125000"/>
+                <a:spcPct val="130000"/>
               </a:lnSpc>
               <a:spcAft>
-                <a:spcPts val="800"/>
+                <a:spcPts val="1100"/>
               </a:spcAft>
               <a:buSzPct val="100000"/>
-              <a:buChar char="•"/>
-            </a:pPr>
-            <a:r>
-              <a:rPr lang="en-US" sz="1700" dirty="0">
-                <a:solidFill>
-                  <a:srgbClr val="374151"/>
-                </a:solidFill>
+              <a:buChar char="–"/>
+            </a:pPr>
+            <a:r>
+              <a:rPr lang="en-US" sz="1650" dirty="0">
+                <a:solidFill>
+                  <a:srgbClr val="23282E"/>
+                </a:solidFill>
+                <a:latin typeface="Corbel" pitchFamily="34" charset="0"/>
+                <a:ea typeface="Corbel" pitchFamily="34" charset="-122"/>
+                <a:cs typeface="Corbel" pitchFamily="34" charset="-120"/>
               </a:rPr>
               <a:t>Adjust a sample size for non-response and design effect</a:t>
             </a:r>
-            <a:endParaRPr lang="en-US" sz="1700" dirty="0"/>
+            <a:endParaRPr lang="en-US" sz="1650" dirty="0"/>
           </a:p>
         </p:txBody>
       </p:sp>
@@ -6187,8 +6652,8 @@
         </p:nvSpPr>
         <p:spPr>
           <a:xfrm>
-            <a:off x="8503920" y="4709160"/>
-            <a:ext cx="800000" cy="300000"/>
+            <a:off x="566928" y="4700016"/>
+            <a:ext cx="914400" cy="274320"/>
           </a:xfrm>
           <a:prstGeom prst="rect">
             <a:avLst/>
@@ -6203,10 +6668,13 @@
           <a:bodyPr/>
           <a:lstStyle>
             <a:lvl1pPr>
-              <a:defRPr sz="1000">
-                <a:solidFill>
-                  <a:srgbClr val="6B7280"/>
-                </a:solidFill>
+              <a:defRPr sz="900">
+                <a:solidFill>
+                  <a:srgbClr val="5F6B76"/>
+                </a:solidFill>
+                <a:latin typeface="Corbel"/>
+                <a:ea typeface="Corbel"/>
+                <a:cs typeface="Corbel"/>
               </a:defRPr>
             </a:lvl1pPr>
           </a:lstStyle>
@@ -6253,8 +6721,8 @@
         </p:nvSpPr>
         <p:spPr>
           <a:xfrm>
-            <a:off x="502920" y="292608"/>
-            <a:ext cx="8046720" cy="228600"/>
+            <a:off x="566928" y="384048"/>
+            <a:ext cx="7772400" cy="237744"/>
           </a:xfrm>
           <a:prstGeom prst="rect">
             <a:avLst/>
@@ -6270,14 +6738,17 @@
               <a:buNone/>
             </a:pPr>
             <a:r>
-              <a:rPr lang="en-US" sz="1100" b="1" spc="150" kern="0" dirty="0">
-                <a:solidFill>
-                  <a:srgbClr val="0066CC"/>
-                </a:solidFill>
+              <a:rPr lang="en-US" sz="1000" spc="200" kern="0" dirty="0">
+                <a:solidFill>
+                  <a:srgbClr val="9A6A3C"/>
+                </a:solidFill>
+                <a:latin typeface="Corbel" pitchFamily="34" charset="0"/>
+                <a:ea typeface="Corbel" pitchFamily="34" charset="-122"/>
+                <a:cs typeface="Corbel" pitchFamily="34" charset="-120"/>
               </a:rPr>
               <a:t>UNIT 7</a:t>
             </a:r>
-            <a:endParaRPr lang="en-US" sz="1100" dirty="0"/>
+            <a:endParaRPr lang="en-US" sz="1000" dirty="0"/>
           </a:p>
         </p:txBody>
       </p:sp>
@@ -6289,8 +6760,8 @@
         </p:nvSpPr>
         <p:spPr>
           <a:xfrm>
-            <a:off x="502920" y="548640"/>
-            <a:ext cx="8046720" cy="640080"/>
+            <a:off x="566928" y="658368"/>
+            <a:ext cx="7772400" cy="658368"/>
           </a:xfrm>
           <a:prstGeom prst="rect">
             <a:avLst/>
@@ -6303,30 +6774,56 @@
           <a:lstStyle/>
           <a:p>
             <a:pPr indent="0" marL="0">
+              <a:lnSpc>
+                <a:spcPct val="100000"/>
+              </a:lnSpc>
               <a:buNone/>
             </a:pPr>
             <a:r>
-              <a:rPr lang="en-US" sz="2400" b="1" dirty="0">
-                <a:solidFill>
-                  <a:srgbClr val="111827"/>
-                </a:solidFill>
+              <a:rPr lang="en-US" sz="2500" dirty="0">
+                <a:solidFill>
+                  <a:srgbClr val="1C3140"/>
+                </a:solidFill>
+                <a:latin typeface="Constantia" pitchFamily="34" charset="0"/>
+                <a:ea typeface="Constantia" pitchFamily="34" charset="-122"/>
+                <a:cs typeface="Constantia" pitchFamily="34" charset="-120"/>
               </a:rPr>
               <a:t>Mixed methods designs (1/2)</a:t>
             </a:r>
-            <a:endParaRPr lang="en-US" sz="2400" dirty="0"/>
-          </a:p>
-        </p:txBody>
-      </p:sp>
-      <p:sp>
-        <p:nvSpPr>
-          <p:cNvPr id="4" name="Text 2"/>
+            <a:endParaRPr lang="en-US" sz="2500" dirty="0"/>
+          </a:p>
+        </p:txBody>
+      </p:sp>
+      <p:sp>
+        <p:nvSpPr>
+          <p:cNvPr id="4" name="Shape 2"/>
           <p:cNvSpPr/>
           <p:nvPr/>
         </p:nvSpPr>
         <p:spPr>
           <a:xfrm>
-            <a:off x="685800" y="1325880"/>
-            <a:ext cx="7772400" cy="3200400"/>
+            <a:off x="566928" y="1335024"/>
+            <a:ext cx="566928" cy="20117"/>
+          </a:xfrm>
+          <a:prstGeom prst="rect">
+            <a:avLst/>
+          </a:prstGeom>
+          <a:solidFill>
+            <a:srgbClr val="9A6A3C"/>
+          </a:solidFill>
+          <a:ln/>
+        </p:spPr>
+      </p:sp>
+      <p:sp>
+        <p:nvSpPr>
+          <p:cNvPr id="5" name="Text 3"/>
+          <p:cNvSpPr/>
+          <p:nvPr/>
+        </p:nvSpPr>
+        <p:spPr>
+          <a:xfrm>
+            <a:off x="713232" y="1664208"/>
+            <a:ext cx="7498080" cy="2788920"/>
           </a:xfrm>
           <a:prstGeom prst="rect">
             <a:avLst/>
@@ -6340,19 +6837,22 @@
           <a:p>
             <a:pPr marL="342900" indent="-342900">
               <a:lnSpc>
-                <a:spcPct val="125000"/>
+                <a:spcPct val="130000"/>
               </a:lnSpc>
               <a:spcAft>
-                <a:spcPts val="800"/>
+                <a:spcPts val="1100"/>
               </a:spcAft>
               <a:buSzPct val="100000"/>
-              <a:buChar char="•"/>
+              <a:buChar char="–"/>
             </a:pPr>
             <a:r>
               <a:rPr lang="en-US" sz="1500" dirty="0">
                 <a:solidFill>
-                  <a:srgbClr val="374151"/>
-                </a:solidFill>
+                  <a:srgbClr val="23282E"/>
+                </a:solidFill>
+                <a:latin typeface="Corbel" pitchFamily="34" charset="0"/>
+                <a:ea typeface="Corbel" pitchFamily="34" charset="-122"/>
+                <a:cs typeface="Corbel" pitchFamily="34" charset="-120"/>
               </a:rPr>
               <a:t>Convergent parallel — both strands run at the same time and are compared at interpretation; used when each answers a different facet of one question</a:t>
             </a:r>
@@ -6361,19 +6861,22 @@
           <a:p>
             <a:pPr marL="342900" indent="-342900">
               <a:lnSpc>
-                <a:spcPct val="125000"/>
+                <a:spcPct val="130000"/>
               </a:lnSpc>
               <a:spcAft>
-                <a:spcPts val="800"/>
+                <a:spcPts val="1100"/>
               </a:spcAft>
               <a:buSzPct val="100000"/>
-              <a:buChar char="•"/>
+              <a:buChar char="–"/>
             </a:pPr>
             <a:r>
               <a:rPr lang="en-US" sz="1500" dirty="0">
                 <a:solidFill>
-                  <a:srgbClr val="374151"/>
-                </a:solidFill>
+                  <a:srgbClr val="23282E"/>
+                </a:solidFill>
+                <a:latin typeface="Corbel" pitchFamily="34" charset="0"/>
+                <a:ea typeface="Corbel" pitchFamily="34" charset="-122"/>
+                <a:cs typeface="Corbel" pitchFamily="34" charset="-120"/>
               </a:rPr>
               <a:t>Explanatory sequential — quantitative first, then qualitative to explain surprising or unexplained results</a:t>
             </a:r>
@@ -6382,42 +6885,24 @@
           <a:p>
             <a:pPr marL="342900" indent="-342900">
               <a:lnSpc>
-                <a:spcPct val="125000"/>
+                <a:spcPct val="130000"/>
               </a:lnSpc>
               <a:spcAft>
-                <a:spcPts val="800"/>
+                <a:spcPts val="1100"/>
               </a:spcAft>
               <a:buSzPct val="100000"/>
-              <a:buChar char="•"/>
+              <a:buChar char="–"/>
             </a:pPr>
             <a:r>
               <a:rPr lang="en-US" sz="1500" dirty="0">
                 <a:solidFill>
-                  <a:srgbClr val="374151"/>
-                </a:solidFill>
+                  <a:srgbClr val="23282E"/>
+                </a:solidFill>
+                <a:latin typeface="Corbel" pitchFamily="34" charset="0"/>
+                <a:ea typeface="Corbel" pitchFamily="34" charset="-122"/>
+                <a:cs typeface="Corbel" pitchFamily="34" charset="-120"/>
               </a:rPr>
               <a:t>Exploratory sequential — qualitative first to develop an instrument or identify constructs, then quantitative to test at scale</a:t>
-            </a:r>
-            <a:endParaRPr lang="en-US" sz="1500" dirty="0"/>
-          </a:p>
-          <a:p>
-            <a:pPr marL="342900" indent="-342900">
-              <a:lnSpc>
-                <a:spcPct val="125000"/>
-              </a:lnSpc>
-              <a:spcAft>
-                <a:spcPts val="800"/>
-              </a:spcAft>
-              <a:buSzPct val="100000"/>
-              <a:buChar char="•"/>
-            </a:pPr>
-            <a:r>
-              <a:rPr lang="en-US" sz="1500" dirty="0">
-                <a:solidFill>
-                  <a:srgbClr val="374151"/>
-                </a:solidFill>
-              </a:rPr>
-              <a:t>Embedded — one strand sits inside a larger design, such as a process evaluation within a trial</a:t>
             </a:r>
             <a:endParaRPr lang="en-US" sz="1500" dirty="0"/>
           </a:p>
@@ -6435,8 +6920,8 @@
         </p:nvSpPr>
         <p:spPr>
           <a:xfrm>
-            <a:off x="8503920" y="4709160"/>
-            <a:ext cx="800000" cy="300000"/>
+            <a:off x="566928" y="4700016"/>
+            <a:ext cx="914400" cy="274320"/>
           </a:xfrm>
           <a:prstGeom prst="rect">
             <a:avLst/>
@@ -6451,10 +6936,13 @@
           <a:bodyPr/>
           <a:lstStyle>
             <a:lvl1pPr>
-              <a:defRPr sz="1000">
-                <a:solidFill>
-                  <a:srgbClr val="6B7280"/>
-                </a:solidFill>
+              <a:defRPr sz="900">
+                <a:solidFill>
+                  <a:srgbClr val="5F6B76"/>
+                </a:solidFill>
+                <a:latin typeface="Corbel"/>
+                <a:ea typeface="Corbel"/>
+                <a:cs typeface="Corbel"/>
               </a:defRPr>
             </a:lvl1pPr>
           </a:lstStyle>
@@ -6501,8 +6989,8 @@
         </p:nvSpPr>
         <p:spPr>
           <a:xfrm>
-            <a:off x="502920" y="292608"/>
-            <a:ext cx="8046720" cy="228600"/>
+            <a:off x="566928" y="384048"/>
+            <a:ext cx="7772400" cy="237744"/>
           </a:xfrm>
           <a:prstGeom prst="rect">
             <a:avLst/>
@@ -6518,14 +7006,17 @@
               <a:buNone/>
             </a:pPr>
             <a:r>
-              <a:rPr lang="en-US" sz="1100" b="1" spc="150" kern="0" dirty="0">
-                <a:solidFill>
-                  <a:srgbClr val="0066CC"/>
-                </a:solidFill>
+              <a:rPr lang="en-US" sz="1000" spc="200" kern="0" dirty="0">
+                <a:solidFill>
+                  <a:srgbClr val="9A6A3C"/>
+                </a:solidFill>
+                <a:latin typeface="Corbel" pitchFamily="34" charset="0"/>
+                <a:ea typeface="Corbel" pitchFamily="34" charset="-122"/>
+                <a:cs typeface="Corbel" pitchFamily="34" charset="-120"/>
               </a:rPr>
               <a:t>UNIT 7</a:t>
             </a:r>
-            <a:endParaRPr lang="en-US" sz="1100" dirty="0"/>
+            <a:endParaRPr lang="en-US" sz="1000" dirty="0"/>
           </a:p>
         </p:txBody>
       </p:sp>
@@ -6537,8 +7028,8 @@
         </p:nvSpPr>
         <p:spPr>
           <a:xfrm>
-            <a:off x="502920" y="548640"/>
-            <a:ext cx="8046720" cy="640080"/>
+            <a:off x="566928" y="658368"/>
+            <a:ext cx="7772400" cy="658368"/>
           </a:xfrm>
           <a:prstGeom prst="rect">
             <a:avLst/>
@@ -6551,30 +7042,56 @@
           <a:lstStyle/>
           <a:p>
             <a:pPr indent="0" marL="0">
+              <a:lnSpc>
+                <a:spcPct val="100000"/>
+              </a:lnSpc>
               <a:buNone/>
             </a:pPr>
             <a:r>
-              <a:rPr lang="en-US" sz="2400" b="1" dirty="0">
-                <a:solidFill>
-                  <a:srgbClr val="111827"/>
-                </a:solidFill>
+              <a:rPr lang="en-US" sz="2500" dirty="0">
+                <a:solidFill>
+                  <a:srgbClr val="1C3140"/>
+                </a:solidFill>
+                <a:latin typeface="Constantia" pitchFamily="34" charset="0"/>
+                <a:ea typeface="Constantia" pitchFamily="34" charset="-122"/>
+                <a:cs typeface="Constantia" pitchFamily="34" charset="-120"/>
               </a:rPr>
               <a:t>Mixed methods designs (2/2)</a:t>
             </a:r>
-            <a:endParaRPr lang="en-US" sz="2400" dirty="0"/>
-          </a:p>
-        </p:txBody>
-      </p:sp>
-      <p:sp>
-        <p:nvSpPr>
-          <p:cNvPr id="4" name="Text 2"/>
+            <a:endParaRPr lang="en-US" sz="2500" dirty="0"/>
+          </a:p>
+        </p:txBody>
+      </p:sp>
+      <p:sp>
+        <p:nvSpPr>
+          <p:cNvPr id="4" name="Shape 2"/>
           <p:cNvSpPr/>
           <p:nvPr/>
         </p:nvSpPr>
         <p:spPr>
           <a:xfrm>
-            <a:off x="685800" y="1325880"/>
-            <a:ext cx="7772400" cy="3200400"/>
+            <a:off x="566928" y="1335024"/>
+            <a:ext cx="566928" cy="20117"/>
+          </a:xfrm>
+          <a:prstGeom prst="rect">
+            <a:avLst/>
+          </a:prstGeom>
+          <a:solidFill>
+            <a:srgbClr val="9A6A3C"/>
+          </a:solidFill>
+          <a:ln/>
+        </p:spPr>
+      </p:sp>
+      <p:sp>
+        <p:nvSpPr>
+          <p:cNvPr id="5" name="Text 3"/>
+          <p:cNvSpPr/>
+          <p:nvPr/>
+        </p:nvSpPr>
+        <p:spPr>
+          <a:xfrm>
+            <a:off x="713232" y="1664208"/>
+            <a:ext cx="7498080" cy="2788920"/>
           </a:xfrm>
           <a:prstGeom prst="rect">
             <a:avLst/>
@@ -6588,40 +7105,70 @@
           <a:p>
             <a:pPr marL="342900" indent="-342900">
               <a:lnSpc>
-                <a:spcPct val="125000"/>
+                <a:spcPct val="130000"/>
               </a:lnSpc>
               <a:spcAft>
-                <a:spcPts val="800"/>
+                <a:spcPts val="1100"/>
               </a:spcAft>
               <a:buSzPct val="100000"/>
-              <a:buChar char="•"/>
+              <a:buChar char="–"/>
             </a:pPr>
             <a:r>
               <a:rPr lang="en-US" sz="1500" dirty="0">
                 <a:solidFill>
-                  <a:srgbClr val="374151"/>
-                </a:solidFill>
-              </a:rPr>
-              <a:t>Integration is the defining feature: strands must be brought together, not merely reported in adjacent chapters</a:t>
+                  <a:srgbClr val="23282E"/>
+                </a:solidFill>
+                <a:latin typeface="Corbel" pitchFamily="34" charset="0"/>
+                <a:ea typeface="Corbel" pitchFamily="34" charset="-122"/>
+                <a:cs typeface="Corbel" pitchFamily="34" charset="-120"/>
+              </a:rPr>
+              <a:t>Embedded — one strand sits inside a larger design, such as a process evaluation within a trial</a:t>
             </a:r>
             <a:endParaRPr lang="en-US" sz="1500" dirty="0"/>
           </a:p>
           <a:p>
             <a:pPr marL="342900" indent="-342900">
               <a:lnSpc>
-                <a:spcPct val="125000"/>
+                <a:spcPct val="130000"/>
               </a:lnSpc>
               <a:spcAft>
-                <a:spcPts val="800"/>
+                <a:spcPts val="1100"/>
               </a:spcAft>
               <a:buSzPct val="100000"/>
-              <a:buChar char="•"/>
+              <a:buChar char="–"/>
             </a:pPr>
             <a:r>
               <a:rPr lang="en-US" sz="1500" dirty="0">
                 <a:solidFill>
-                  <a:srgbClr val="374151"/>
-                </a:solidFill>
+                  <a:srgbClr val="23282E"/>
+                </a:solidFill>
+                <a:latin typeface="Corbel" pitchFamily="34" charset="0"/>
+                <a:ea typeface="Corbel" pitchFamily="34" charset="-122"/>
+                <a:cs typeface="Corbel" pitchFamily="34" charset="-120"/>
+              </a:rPr>
+              <a:t>Integration is the defining feature: strands must be brought together, not merely reported in adjacent chapters</a:t>
+            </a:r>
+            <a:endParaRPr lang="en-US" sz="1500" dirty="0"/>
+          </a:p>
+          <a:p>
+            <a:pPr marL="342900" indent="-342900">
+              <a:lnSpc>
+                <a:spcPct val="130000"/>
+              </a:lnSpc>
+              <a:spcAft>
+                <a:spcPts val="1100"/>
+              </a:spcAft>
+              <a:buSzPct val="100000"/>
+              <a:buChar char="–"/>
+            </a:pPr>
+            <a:r>
+              <a:rPr lang="en-US" sz="1500" dirty="0">
+                <a:solidFill>
+                  <a:srgbClr val="23282E"/>
+                </a:solidFill>
+                <a:latin typeface="Corbel" pitchFamily="34" charset="0"/>
+                <a:ea typeface="Corbel" pitchFamily="34" charset="-122"/>
+                <a:cs typeface="Corbel" pitchFamily="34" charset="-120"/>
               </a:rPr>
               <a:t>Integration techniques include joint displays, following a thread, and merging in a triangulation matrix</a:t>
             </a:r>
@@ -6641,8 +7188,8 @@
         </p:nvSpPr>
         <p:spPr>
           <a:xfrm>
-            <a:off x="8503920" y="4709160"/>
-            <a:ext cx="800000" cy="300000"/>
+            <a:off x="566928" y="4700016"/>
+            <a:ext cx="914400" cy="274320"/>
           </a:xfrm>
           <a:prstGeom prst="rect">
             <a:avLst/>
@@ -6657,10 +7204,13 @@
           <a:bodyPr/>
           <a:lstStyle>
             <a:lvl1pPr>
-              <a:defRPr sz="1000">
-                <a:solidFill>
-                  <a:srgbClr val="6B7280"/>
-                </a:solidFill>
+              <a:defRPr sz="900">
+                <a:solidFill>
+                  <a:srgbClr val="5F6B76"/>
+                </a:solidFill>
+                <a:latin typeface="Corbel"/>
+                <a:ea typeface="Corbel"/>
+                <a:cs typeface="Corbel"/>
               </a:defRPr>
             </a:lvl1pPr>
           </a:lstStyle>
@@ -6707,8 +7257,8 @@
         </p:nvSpPr>
         <p:spPr>
           <a:xfrm>
-            <a:off x="502920" y="292608"/>
-            <a:ext cx="8046720" cy="228600"/>
+            <a:off x="566928" y="384048"/>
+            <a:ext cx="7772400" cy="237744"/>
           </a:xfrm>
           <a:prstGeom prst="rect">
             <a:avLst/>
@@ -6724,14 +7274,17 @@
               <a:buNone/>
             </a:pPr>
             <a:r>
-              <a:rPr lang="en-US" sz="1100" b="1" spc="150" kern="0" dirty="0">
-                <a:solidFill>
-                  <a:srgbClr val="00A86B"/>
-                </a:solidFill>
+              <a:rPr lang="en-US" sz="1000" spc="200" kern="0" dirty="0">
+                <a:solidFill>
+                  <a:srgbClr val="9A6A3C"/>
+                </a:solidFill>
+                <a:latin typeface="Corbel" pitchFamily="34" charset="0"/>
+                <a:ea typeface="Corbel" pitchFamily="34" charset="-122"/>
+                <a:cs typeface="Corbel" pitchFamily="34" charset="-120"/>
               </a:rPr>
               <a:t>UNIT 7</a:t>
             </a:r>
-            <a:endParaRPr lang="en-US" sz="1100" dirty="0"/>
+            <a:endParaRPr lang="en-US" sz="1000" dirty="0"/>
           </a:p>
         </p:txBody>
       </p:sp>
@@ -6743,8 +7296,8 @@
         </p:nvSpPr>
         <p:spPr>
           <a:xfrm>
-            <a:off x="502920" y="548640"/>
-            <a:ext cx="8046720" cy="548640"/>
+            <a:off x="566928" y="658368"/>
+            <a:ext cx="7772400" cy="658368"/>
           </a:xfrm>
           <a:prstGeom prst="rect">
             <a:avLst/>
@@ -6753,21 +7306,27 @@
           <a:ln/>
         </p:spPr>
         <p:txBody>
-          <a:bodyPr wrap="square" rtlCol="0" anchor="ctr"/>
+          <a:bodyPr wrap="square" rtlCol="0" anchor="t"/>
           <a:lstStyle/>
           <a:p>
             <a:pPr indent="0" marL="0">
+              <a:lnSpc>
+                <a:spcPct val="100000"/>
+              </a:lnSpc>
               <a:buNone/>
             </a:pPr>
             <a:r>
-              <a:rPr lang="en-US" sz="2400" b="1" dirty="0">
-                <a:solidFill>
-                  <a:srgbClr val="111827"/>
-                </a:solidFill>
+              <a:rPr lang="en-US" sz="2500" dirty="0">
+                <a:solidFill>
+                  <a:srgbClr val="1C3140"/>
+                </a:solidFill>
+                <a:latin typeface="Constantia" pitchFamily="34" charset="0"/>
+                <a:ea typeface="Constantia" pitchFamily="34" charset="-122"/>
+                <a:cs typeface="Constantia" pitchFamily="34" charset="-120"/>
               </a:rPr>
               <a:t>In practice</a:t>
             </a:r>
-            <a:endParaRPr lang="en-US" sz="2400" dirty="0"/>
+            <a:endParaRPr lang="en-US" sz="2500" dirty="0"/>
           </a:p>
         </p:txBody>
       </p:sp>
@@ -6779,28 +7338,48 @@
         </p:nvSpPr>
         <p:spPr>
           <a:xfrm>
-            <a:off x="502920" y="1280160"/>
-            <a:ext cx="54864" cy="2377440"/>
+            <a:off x="566928" y="1335024"/>
+            <a:ext cx="566928" cy="20117"/>
           </a:xfrm>
           <a:prstGeom prst="rect">
             <a:avLst/>
           </a:prstGeom>
           <a:solidFill>
-            <a:srgbClr val="00A86B"/>
+            <a:srgbClr val="9A6A3C"/>
           </a:solidFill>
           <a:ln/>
         </p:spPr>
       </p:sp>
       <p:sp>
         <p:nvSpPr>
-          <p:cNvPr id="5" name="Text 3"/>
+          <p:cNvPr id="5" name="Shape 3"/>
           <p:cNvSpPr/>
           <p:nvPr/>
         </p:nvSpPr>
         <p:spPr>
           <a:xfrm>
-            <a:off x="777240" y="1280160"/>
-            <a:ext cx="7589520" cy="2377440"/>
+            <a:off x="566928" y="1664208"/>
+            <a:ext cx="8010144" cy="2395728"/>
+          </a:xfrm>
+          <a:prstGeom prst="rect">
+            <a:avLst/>
+          </a:prstGeom>
+          <a:solidFill>
+            <a:srgbClr val="F6F4F0"/>
+          </a:solidFill>
+          <a:ln/>
+        </p:spPr>
+      </p:sp>
+      <p:sp>
+        <p:nvSpPr>
+          <p:cNvPr id="6" name="Text 4"/>
+          <p:cNvSpPr/>
+          <p:nvPr/>
+        </p:nvSpPr>
+        <p:spPr>
+          <a:xfrm>
+            <a:off x="932688" y="1847088"/>
+            <a:ext cx="7278624" cy="2029968"/>
           </a:xfrm>
           <a:prstGeom prst="rect">
             <a:avLst/>
@@ -6814,15 +7393,18 @@
           <a:p>
             <a:pPr indent="0" marL="0">
               <a:lnSpc>
-                <a:spcPct val="130000"/>
+                <a:spcPct val="132000"/>
               </a:lnSpc>
               <a:buNone/>
             </a:pPr>
             <a:r>
-              <a:rPr lang="en-US" sz="1600" dirty="0">
-                <a:solidFill>
-                  <a:srgbClr val="374151"/>
-                </a:solidFill>
+              <a:rPr lang="en-US" sz="1600" i="1" dirty="0">
+                <a:solidFill>
+                  <a:srgbClr val="1C3140"/>
+                </a:solidFill>
+                <a:latin typeface="Constantia" pitchFamily="34" charset="0"/>
+                <a:ea typeface="Constantia" pitchFamily="34" charset="-122"/>
+                <a:cs typeface="Constantia" pitchFamily="34" charset="-120"/>
               </a:rPr>
               <a:t>A study that runs a survey and some interviews and reports them separately is not mixed methods; it is two studies in one document. The examiner's question is always: what did you learn from combining them that neither strand gave you alone?</a:t>
             </a:r>
@@ -6842,8 +7424,8 @@
         </p:nvSpPr>
         <p:spPr>
           <a:xfrm>
-            <a:off x="8503920" y="4709160"/>
-            <a:ext cx="800000" cy="300000"/>
+            <a:off x="566928" y="4700016"/>
+            <a:ext cx="914400" cy="274320"/>
           </a:xfrm>
           <a:prstGeom prst="rect">
             <a:avLst/>
@@ -6858,10 +7440,13 @@
           <a:bodyPr/>
           <a:lstStyle>
             <a:lvl1pPr>
-              <a:defRPr sz="1000">
-                <a:solidFill>
-                  <a:srgbClr val="6B7280"/>
-                </a:solidFill>
+              <a:defRPr sz="900">
+                <a:solidFill>
+                  <a:srgbClr val="5F6B76"/>
+                </a:solidFill>
+                <a:latin typeface="Corbel"/>
+                <a:ea typeface="Corbel"/>
+                <a:cs typeface="Corbel"/>
               </a:defRPr>
             </a:lvl1pPr>
           </a:lstStyle>
@@ -6908,8 +7493,8 @@
         </p:nvSpPr>
         <p:spPr>
           <a:xfrm>
-            <a:off x="502920" y="292608"/>
-            <a:ext cx="8046720" cy="228600"/>
+            <a:off x="566928" y="384048"/>
+            <a:ext cx="7772400" cy="237744"/>
           </a:xfrm>
           <a:prstGeom prst="rect">
             <a:avLst/>
@@ -6925,14 +7510,17 @@
               <a:buNone/>
             </a:pPr>
             <a:r>
-              <a:rPr lang="en-US" sz="1100" b="1" spc="150" kern="0" dirty="0">
-                <a:solidFill>
-                  <a:srgbClr val="0066CC"/>
-                </a:solidFill>
+              <a:rPr lang="en-US" sz="1000" spc="200" kern="0" dirty="0">
+                <a:solidFill>
+                  <a:srgbClr val="9A6A3C"/>
+                </a:solidFill>
+                <a:latin typeface="Corbel" pitchFamily="34" charset="0"/>
+                <a:ea typeface="Corbel" pitchFamily="34" charset="-122"/>
+                <a:cs typeface="Corbel" pitchFamily="34" charset="-120"/>
               </a:rPr>
               <a:t>UNIT 7</a:t>
             </a:r>
-            <a:endParaRPr lang="en-US" sz="1100" dirty="0"/>
+            <a:endParaRPr lang="en-US" sz="1000" dirty="0"/>
           </a:p>
         </p:txBody>
       </p:sp>
@@ -6944,8 +7532,8 @@
         </p:nvSpPr>
         <p:spPr>
           <a:xfrm>
-            <a:off x="502920" y="548640"/>
-            <a:ext cx="8046720" cy="640080"/>
+            <a:off x="566928" y="658368"/>
+            <a:ext cx="7772400" cy="658368"/>
           </a:xfrm>
           <a:prstGeom prst="rect">
             <a:avLst/>
@@ -6958,30 +7546,56 @@
           <a:lstStyle/>
           <a:p>
             <a:pPr indent="0" marL="0">
+              <a:lnSpc>
+                <a:spcPct val="100000"/>
+              </a:lnSpc>
               <a:buNone/>
             </a:pPr>
             <a:r>
-              <a:rPr lang="en-US" sz="2400" b="1" dirty="0">
-                <a:solidFill>
-                  <a:srgbClr val="111827"/>
-                </a:solidFill>
+              <a:rPr lang="en-US" sz="2500" dirty="0">
+                <a:solidFill>
+                  <a:srgbClr val="1C3140"/>
+                </a:solidFill>
+                <a:latin typeface="Constantia" pitchFamily="34" charset="0"/>
+                <a:ea typeface="Constantia" pitchFamily="34" charset="-122"/>
+                <a:cs typeface="Constantia" pitchFamily="34" charset="-120"/>
               </a:rPr>
               <a:t>Probability sampling (1/2)</a:t>
             </a:r>
-            <a:endParaRPr lang="en-US" sz="2400" dirty="0"/>
-          </a:p>
-        </p:txBody>
-      </p:sp>
-      <p:sp>
-        <p:nvSpPr>
-          <p:cNvPr id="4" name="Text 2"/>
+            <a:endParaRPr lang="en-US" sz="2500" dirty="0"/>
+          </a:p>
+        </p:txBody>
+      </p:sp>
+      <p:sp>
+        <p:nvSpPr>
+          <p:cNvPr id="4" name="Shape 2"/>
           <p:cNvSpPr/>
           <p:nvPr/>
         </p:nvSpPr>
         <p:spPr>
           <a:xfrm>
-            <a:off x="685800" y="1325880"/>
-            <a:ext cx="7772400" cy="3200400"/>
+            <a:off x="566928" y="1335024"/>
+            <a:ext cx="566928" cy="20117"/>
+          </a:xfrm>
+          <a:prstGeom prst="rect">
+            <a:avLst/>
+          </a:prstGeom>
+          <a:solidFill>
+            <a:srgbClr val="9A6A3C"/>
+          </a:solidFill>
+          <a:ln/>
+        </p:spPr>
+      </p:sp>
+      <p:sp>
+        <p:nvSpPr>
+          <p:cNvPr id="5" name="Text 3"/>
+          <p:cNvSpPr/>
+          <p:nvPr/>
+        </p:nvSpPr>
+        <p:spPr>
+          <a:xfrm>
+            <a:off x="713232" y="1664208"/>
+            <a:ext cx="7498080" cy="2788920"/>
           </a:xfrm>
           <a:prstGeom prst="rect">
             <a:avLst/>
@@ -6995,19 +7609,22 @@
           <a:p>
             <a:pPr marL="342900" indent="-342900">
               <a:lnSpc>
-                <a:spcPct val="125000"/>
+                <a:spcPct val="130000"/>
               </a:lnSpc>
               <a:spcAft>
-                <a:spcPts val="800"/>
+                <a:spcPts val="1100"/>
               </a:spcAft>
               <a:buSzPct val="100000"/>
-              <a:buChar char="•"/>
+              <a:buChar char="–"/>
             </a:pPr>
             <a:r>
               <a:rPr lang="en-US" sz="1500" dirty="0">
                 <a:solidFill>
-                  <a:srgbClr val="374151"/>
-                </a:solidFill>
+                  <a:srgbClr val="23282E"/>
+                </a:solidFill>
+                <a:latin typeface="Corbel" pitchFamily="34" charset="0"/>
+                <a:ea typeface="Corbel" pitchFamily="34" charset="-122"/>
+                <a:cs typeface="Corbel" pitchFamily="34" charset="-120"/>
               </a:rPr>
               <a:t>Simple random — every unit has an equal chance; requires a complete sampling frame</a:t>
             </a:r>
@@ -7016,19 +7633,22 @@
           <a:p>
             <a:pPr marL="342900" indent="-342900">
               <a:lnSpc>
-                <a:spcPct val="125000"/>
+                <a:spcPct val="130000"/>
               </a:lnSpc>
               <a:spcAft>
-                <a:spcPts val="800"/>
+                <a:spcPts val="1100"/>
               </a:spcAft>
               <a:buSzPct val="100000"/>
-              <a:buChar char="•"/>
+              <a:buChar char="–"/>
             </a:pPr>
             <a:r>
               <a:rPr lang="en-US" sz="1500" dirty="0">
                 <a:solidFill>
-                  <a:srgbClr val="374151"/>
-                </a:solidFill>
+                  <a:srgbClr val="23282E"/>
+                </a:solidFill>
+                <a:latin typeface="Corbel" pitchFamily="34" charset="0"/>
+                <a:ea typeface="Corbel" pitchFamily="34" charset="-122"/>
+                <a:cs typeface="Corbel" pitchFamily="34" charset="-120"/>
               </a:rPr>
               <a:t>Systematic — every kth unit from a random start; simple in the field but fails if the list has a periodic pattern</a:t>
             </a:r>
@@ -7037,19 +7657,22 @@
           <a:p>
             <a:pPr marL="342900" indent="-342900">
               <a:lnSpc>
-                <a:spcPct val="125000"/>
+                <a:spcPct val="130000"/>
               </a:lnSpc>
               <a:spcAft>
-                <a:spcPts val="800"/>
+                <a:spcPts val="1100"/>
               </a:spcAft>
               <a:buSzPct val="100000"/>
-              <a:buChar char="•"/>
+              <a:buChar char="–"/>
             </a:pPr>
             <a:r>
               <a:rPr lang="en-US" sz="1500" dirty="0">
                 <a:solidFill>
-                  <a:srgbClr val="374151"/>
-                </a:solidFill>
+                  <a:srgbClr val="23282E"/>
+                </a:solidFill>
+                <a:latin typeface="Corbel" pitchFamily="34" charset="0"/>
+                <a:ea typeface="Corbel" pitchFamily="34" charset="-122"/>
+                <a:cs typeface="Corbel" pitchFamily="34" charset="-120"/>
               </a:rPr>
               <a:t>Stratified — the population is divided into strata and sampled within each; improves precision and guarantees representation of small subgroups</a:t>
             </a:r>
@@ -7058,19 +7681,22 @@
           <a:p>
             <a:pPr marL="342900" indent="-342900">
               <a:lnSpc>
-                <a:spcPct val="125000"/>
+                <a:spcPct val="130000"/>
               </a:lnSpc>
               <a:spcAft>
-                <a:spcPts val="800"/>
+                <a:spcPts val="1100"/>
               </a:spcAft>
               <a:buSzPct val="100000"/>
-              <a:buChar char="•"/>
+              <a:buChar char="–"/>
             </a:pPr>
             <a:r>
               <a:rPr lang="en-US" sz="1500" dirty="0">
                 <a:solidFill>
-                  <a:srgbClr val="374151"/>
-                </a:solidFill>
+                  <a:srgbClr val="23282E"/>
+                </a:solidFill>
+                <a:latin typeface="Corbel" pitchFamily="34" charset="0"/>
+                <a:ea typeface="Corbel" pitchFamily="34" charset="-122"/>
+                <a:cs typeface="Corbel" pitchFamily="34" charset="-120"/>
               </a:rPr>
               <a:t>Cluster — whole groups are sampled; cheaper when the population is geographically dispersed, but less precise</a:t>
             </a:r>
@@ -7090,8 +7716,8 @@
         </p:nvSpPr>
         <p:spPr>
           <a:xfrm>
-            <a:off x="8503920" y="4709160"/>
-            <a:ext cx="800000" cy="300000"/>
+            <a:off x="566928" y="4700016"/>
+            <a:ext cx="914400" cy="274320"/>
           </a:xfrm>
           <a:prstGeom prst="rect">
             <a:avLst/>
@@ -7106,10 +7732,13 @@
           <a:bodyPr/>
           <a:lstStyle>
             <a:lvl1pPr>
-              <a:defRPr sz="1000">
-                <a:solidFill>
-                  <a:srgbClr val="6B7280"/>
-                </a:solidFill>
+              <a:defRPr sz="900">
+                <a:solidFill>
+                  <a:srgbClr val="5F6B76"/>
+                </a:solidFill>
+                <a:latin typeface="Corbel"/>
+                <a:ea typeface="Corbel"/>
+                <a:cs typeface="Corbel"/>
               </a:defRPr>
             </a:lvl1pPr>
           </a:lstStyle>
@@ -7156,8 +7785,8 @@
         </p:nvSpPr>
         <p:spPr>
           <a:xfrm>
-            <a:off x="502920" y="292608"/>
-            <a:ext cx="8046720" cy="228600"/>
+            <a:off x="566928" y="384048"/>
+            <a:ext cx="7772400" cy="237744"/>
           </a:xfrm>
           <a:prstGeom prst="rect">
             <a:avLst/>
@@ -7173,14 +7802,17 @@
               <a:buNone/>
             </a:pPr>
             <a:r>
-              <a:rPr lang="en-US" sz="1100" b="1" spc="150" kern="0" dirty="0">
-                <a:solidFill>
-                  <a:srgbClr val="0066CC"/>
-                </a:solidFill>
+              <a:rPr lang="en-US" sz="1000" spc="200" kern="0" dirty="0">
+                <a:solidFill>
+                  <a:srgbClr val="9A6A3C"/>
+                </a:solidFill>
+                <a:latin typeface="Corbel" pitchFamily="34" charset="0"/>
+                <a:ea typeface="Corbel" pitchFamily="34" charset="-122"/>
+                <a:cs typeface="Corbel" pitchFamily="34" charset="-120"/>
               </a:rPr>
               <a:t>UNIT 7</a:t>
             </a:r>
-            <a:endParaRPr lang="en-US" sz="1100" dirty="0"/>
+            <a:endParaRPr lang="en-US" sz="1000" dirty="0"/>
           </a:p>
         </p:txBody>
       </p:sp>
@@ -7192,8 +7824,8 @@
         </p:nvSpPr>
         <p:spPr>
           <a:xfrm>
-            <a:off x="502920" y="548640"/>
-            <a:ext cx="8046720" cy="640080"/>
+            <a:off x="566928" y="658368"/>
+            <a:ext cx="7772400" cy="658368"/>
           </a:xfrm>
           <a:prstGeom prst="rect">
             <a:avLst/>
@@ -7206,30 +7838,56 @@
           <a:lstStyle/>
           <a:p>
             <a:pPr indent="0" marL="0">
+              <a:lnSpc>
+                <a:spcPct val="100000"/>
+              </a:lnSpc>
               <a:buNone/>
             </a:pPr>
             <a:r>
-              <a:rPr lang="en-US" sz="2400" b="1" dirty="0">
-                <a:solidFill>
-                  <a:srgbClr val="111827"/>
-                </a:solidFill>
+              <a:rPr lang="en-US" sz="2500" dirty="0">
+                <a:solidFill>
+                  <a:srgbClr val="1C3140"/>
+                </a:solidFill>
+                <a:latin typeface="Constantia" pitchFamily="34" charset="0"/>
+                <a:ea typeface="Constantia" pitchFamily="34" charset="-122"/>
+                <a:cs typeface="Constantia" pitchFamily="34" charset="-120"/>
               </a:rPr>
               <a:t>Probability sampling (2/2)</a:t>
             </a:r>
-            <a:endParaRPr lang="en-US" sz="2400" dirty="0"/>
-          </a:p>
-        </p:txBody>
-      </p:sp>
-      <p:sp>
-        <p:nvSpPr>
-          <p:cNvPr id="4" name="Text 2"/>
+            <a:endParaRPr lang="en-US" sz="2500" dirty="0"/>
+          </a:p>
+        </p:txBody>
+      </p:sp>
+      <p:sp>
+        <p:nvSpPr>
+          <p:cNvPr id="4" name="Shape 2"/>
           <p:cNvSpPr/>
           <p:nvPr/>
         </p:nvSpPr>
         <p:spPr>
           <a:xfrm>
-            <a:off x="685800" y="1325880"/>
-            <a:ext cx="7772400" cy="3200400"/>
+            <a:off x="566928" y="1335024"/>
+            <a:ext cx="566928" cy="20117"/>
+          </a:xfrm>
+          <a:prstGeom prst="rect">
+            <a:avLst/>
+          </a:prstGeom>
+          <a:solidFill>
+            <a:srgbClr val="9A6A3C"/>
+          </a:solidFill>
+          <a:ln/>
+        </p:spPr>
+      </p:sp>
+      <p:sp>
+        <p:nvSpPr>
+          <p:cNvPr id="5" name="Text 3"/>
+          <p:cNvSpPr/>
+          <p:nvPr/>
+        </p:nvSpPr>
+        <p:spPr>
+          <a:xfrm>
+            <a:off x="713232" y="1664208"/>
+            <a:ext cx="7498080" cy="2788920"/>
           </a:xfrm>
           <a:prstGeom prst="rect">
             <a:avLst/>
@@ -7243,44 +7901,50 @@
           <a:p>
             <a:pPr marL="342900" indent="-342900">
               <a:lnSpc>
-                <a:spcPct val="125000"/>
+                <a:spcPct val="130000"/>
               </a:lnSpc>
               <a:spcAft>
-                <a:spcPts val="800"/>
+                <a:spcPts val="1100"/>
               </a:spcAft>
               <a:buSzPct val="100000"/>
-              <a:buChar char="•"/>
-            </a:pPr>
-            <a:r>
-              <a:rPr lang="en-US" sz="1700" dirty="0">
-                <a:solidFill>
-                  <a:srgbClr val="374151"/>
-                </a:solidFill>
+              <a:buChar char="–"/>
+            </a:pPr>
+            <a:r>
+              <a:rPr lang="en-US" sz="1650" dirty="0">
+                <a:solidFill>
+                  <a:srgbClr val="23282E"/>
+                </a:solidFill>
+                <a:latin typeface="Corbel" pitchFamily="34" charset="0"/>
+                <a:ea typeface="Corbel" pitchFamily="34" charset="-122"/>
+                <a:cs typeface="Corbel" pitchFamily="34" charset="-120"/>
               </a:rPr>
               <a:t>Multistage — combines the above, and is what national surveys such as the DHS actually use</a:t>
             </a:r>
-            <a:endParaRPr lang="en-US" sz="1700" dirty="0"/>
+            <a:endParaRPr lang="en-US" sz="1650" dirty="0"/>
           </a:p>
           <a:p>
             <a:pPr marL="342900" indent="-342900">
               <a:lnSpc>
-                <a:spcPct val="125000"/>
+                <a:spcPct val="130000"/>
               </a:lnSpc>
               <a:spcAft>
-                <a:spcPts val="800"/>
+                <a:spcPts val="1100"/>
               </a:spcAft>
               <a:buSzPct val="100000"/>
-              <a:buChar char="•"/>
-            </a:pPr>
-            <a:r>
-              <a:rPr lang="en-US" sz="1700" dirty="0">
-                <a:solidFill>
-                  <a:srgbClr val="374151"/>
-                </a:solidFill>
+              <a:buChar char="–"/>
+            </a:pPr>
+            <a:r>
+              <a:rPr lang="en-US" sz="1650" dirty="0">
+                <a:solidFill>
+                  <a:srgbClr val="23282E"/>
+                </a:solidFill>
+                <a:latin typeface="Corbel" pitchFamily="34" charset="0"/>
+                <a:ea typeface="Corbel" pitchFamily="34" charset="-122"/>
+                <a:cs typeface="Corbel" pitchFamily="34" charset="-120"/>
               </a:rPr>
               <a:t>Only probability sampling supports statistical generalisation to the population</a:t>
             </a:r>
-            <a:endParaRPr lang="en-US" sz="1700" dirty="0"/>
+            <a:endParaRPr lang="en-US" sz="1650" dirty="0"/>
           </a:p>
         </p:txBody>
       </p:sp>
@@ -7296,8 +7960,8 @@
         </p:nvSpPr>
         <p:spPr>
           <a:xfrm>
-            <a:off x="8503920" y="4709160"/>
-            <a:ext cx="800000" cy="300000"/>
+            <a:off x="566928" y="4700016"/>
+            <a:ext cx="914400" cy="274320"/>
           </a:xfrm>
           <a:prstGeom prst="rect">
             <a:avLst/>
@@ -7312,10 +7976,13 @@
           <a:bodyPr/>
           <a:lstStyle>
             <a:lvl1pPr>
-              <a:defRPr sz="1000">
-                <a:solidFill>
-                  <a:srgbClr val="6B7280"/>
-                </a:solidFill>
+              <a:defRPr sz="900">
+                <a:solidFill>
+                  <a:srgbClr val="5F6B76"/>
+                </a:solidFill>
+                <a:latin typeface="Corbel"/>
+                <a:ea typeface="Corbel"/>
+                <a:cs typeface="Corbel"/>
               </a:defRPr>
             </a:lvl1pPr>
           </a:lstStyle>
@@ -7362,8 +8029,8 @@
         </p:nvSpPr>
         <p:spPr>
           <a:xfrm>
-            <a:off x="502920" y="292608"/>
-            <a:ext cx="8046720" cy="228600"/>
+            <a:off x="566928" y="384048"/>
+            <a:ext cx="7772400" cy="237744"/>
           </a:xfrm>
           <a:prstGeom prst="rect">
             <a:avLst/>
@@ -7379,14 +8046,17 @@
               <a:buNone/>
             </a:pPr>
             <a:r>
-              <a:rPr lang="en-US" sz="1100" b="1" spc="150" kern="0" dirty="0">
-                <a:solidFill>
-                  <a:srgbClr val="0066CC"/>
-                </a:solidFill>
+              <a:rPr lang="en-US" sz="1000" spc="200" kern="0" dirty="0">
+                <a:solidFill>
+                  <a:srgbClr val="9A6A3C"/>
+                </a:solidFill>
+                <a:latin typeface="Corbel" pitchFamily="34" charset="0"/>
+                <a:ea typeface="Corbel" pitchFamily="34" charset="-122"/>
+                <a:cs typeface="Corbel" pitchFamily="34" charset="-120"/>
               </a:rPr>
               <a:t>UNIT 7</a:t>
             </a:r>
-            <a:endParaRPr lang="en-US" sz="1100" dirty="0"/>
+            <a:endParaRPr lang="en-US" sz="1000" dirty="0"/>
           </a:p>
         </p:txBody>
       </p:sp>
@@ -7398,8 +8068,8 @@
         </p:nvSpPr>
         <p:spPr>
           <a:xfrm>
-            <a:off x="502920" y="548640"/>
-            <a:ext cx="8046720" cy="640080"/>
+            <a:off x="566928" y="658368"/>
+            <a:ext cx="7772400" cy="658368"/>
           </a:xfrm>
           <a:prstGeom prst="rect">
             <a:avLst/>
@@ -7412,30 +8082,56 @@
           <a:lstStyle/>
           <a:p>
             <a:pPr indent="0" marL="0">
+              <a:lnSpc>
+                <a:spcPct val="100000"/>
+              </a:lnSpc>
               <a:buNone/>
             </a:pPr>
             <a:r>
-              <a:rPr lang="en-US" sz="2400" b="1" dirty="0">
-                <a:solidFill>
-                  <a:srgbClr val="111827"/>
-                </a:solidFill>
+              <a:rPr lang="en-US" sz="2500" dirty="0">
+                <a:solidFill>
+                  <a:srgbClr val="1C3140"/>
+                </a:solidFill>
+                <a:latin typeface="Constantia" pitchFamily="34" charset="0"/>
+                <a:ea typeface="Constantia" pitchFamily="34" charset="-122"/>
+                <a:cs typeface="Constantia" pitchFamily="34" charset="-120"/>
               </a:rPr>
               <a:t>Non-probability sampling (1/2)</a:t>
             </a:r>
-            <a:endParaRPr lang="en-US" sz="2400" dirty="0"/>
-          </a:p>
-        </p:txBody>
-      </p:sp>
-      <p:sp>
-        <p:nvSpPr>
-          <p:cNvPr id="4" name="Text 2"/>
+            <a:endParaRPr lang="en-US" sz="2500" dirty="0"/>
+          </a:p>
+        </p:txBody>
+      </p:sp>
+      <p:sp>
+        <p:nvSpPr>
+          <p:cNvPr id="4" name="Shape 2"/>
           <p:cNvSpPr/>
           <p:nvPr/>
         </p:nvSpPr>
         <p:spPr>
           <a:xfrm>
-            <a:off x="685800" y="1325880"/>
-            <a:ext cx="7772400" cy="3200400"/>
+            <a:off x="566928" y="1335024"/>
+            <a:ext cx="566928" cy="20117"/>
+          </a:xfrm>
+          <a:prstGeom prst="rect">
+            <a:avLst/>
+          </a:prstGeom>
+          <a:solidFill>
+            <a:srgbClr val="9A6A3C"/>
+          </a:solidFill>
+          <a:ln/>
+        </p:spPr>
+      </p:sp>
+      <p:sp>
+        <p:nvSpPr>
+          <p:cNvPr id="5" name="Text 3"/>
+          <p:cNvSpPr/>
+          <p:nvPr/>
+        </p:nvSpPr>
+        <p:spPr>
+          <a:xfrm>
+            <a:off x="713232" y="1664208"/>
+            <a:ext cx="7498080" cy="2788920"/>
           </a:xfrm>
           <a:prstGeom prst="rect">
             <a:avLst/>
@@ -7449,107 +8145,98 @@
           <a:p>
             <a:pPr marL="342900" indent="-342900">
               <a:lnSpc>
-                <a:spcPct val="125000"/>
+                <a:spcPct val="130000"/>
               </a:lnSpc>
               <a:spcAft>
-                <a:spcPts val="800"/>
+                <a:spcPts val="1100"/>
               </a:spcAft>
               <a:buSzPct val="100000"/>
-              <a:buChar char="•"/>
-            </a:pPr>
-            <a:r>
-              <a:rPr lang="en-US" sz="1500" dirty="0">
-                <a:solidFill>
-                  <a:srgbClr val="374151"/>
-                </a:solidFill>
+              <a:buChar char="–"/>
+            </a:pPr>
+            <a:r>
+              <a:rPr lang="en-US" sz="1650" dirty="0">
+                <a:solidFill>
+                  <a:srgbClr val="23282E"/>
+                </a:solidFill>
+                <a:latin typeface="Corbel" pitchFamily="34" charset="0"/>
+                <a:ea typeface="Corbel" pitchFamily="34" charset="-122"/>
+                <a:cs typeface="Corbel" pitchFamily="34" charset="-120"/>
               </a:rPr>
               <a:t>Convenience — whoever is available; cheapest and weakest, with unknown bias</a:t>
             </a:r>
-            <a:endParaRPr lang="en-US" sz="1500" dirty="0"/>
+            <a:endParaRPr lang="en-US" sz="1650" dirty="0"/>
           </a:p>
           <a:p>
             <a:pPr marL="342900" indent="-342900">
               <a:lnSpc>
-                <a:spcPct val="125000"/>
+                <a:spcPct val="130000"/>
               </a:lnSpc>
               <a:spcAft>
-                <a:spcPts val="800"/>
+                <a:spcPts val="1100"/>
               </a:spcAft>
               <a:buSzPct val="100000"/>
-              <a:buChar char="•"/>
-            </a:pPr>
-            <a:r>
-              <a:rPr lang="en-US" sz="1500" dirty="0">
-                <a:solidFill>
-                  <a:srgbClr val="374151"/>
-                </a:solidFill>
+              <a:buChar char="–"/>
+            </a:pPr>
+            <a:r>
+              <a:rPr lang="en-US" sz="1650" dirty="0">
+                <a:solidFill>
+                  <a:srgbClr val="23282E"/>
+                </a:solidFill>
+                <a:latin typeface="Corbel" pitchFamily="34" charset="0"/>
+                <a:ea typeface="Corbel" pitchFamily="34" charset="-122"/>
+                <a:cs typeface="Corbel" pitchFamily="34" charset="-120"/>
               </a:rPr>
               <a:t>Purposive — chosen for a defined characteristic; the standard for qualitative work</a:t>
             </a:r>
-            <a:endParaRPr lang="en-US" sz="1500" dirty="0"/>
+            <a:endParaRPr lang="en-US" sz="1650" dirty="0"/>
           </a:p>
           <a:p>
             <a:pPr marL="342900" indent="-342900">
               <a:lnSpc>
-                <a:spcPct val="125000"/>
+                <a:spcPct val="130000"/>
               </a:lnSpc>
               <a:spcAft>
-                <a:spcPts val="800"/>
+                <a:spcPts val="1100"/>
               </a:spcAft>
               <a:buSzPct val="100000"/>
-              <a:buChar char="•"/>
-            </a:pPr>
-            <a:r>
-              <a:rPr lang="en-US" sz="1500" dirty="0">
-                <a:solidFill>
-                  <a:srgbClr val="374151"/>
-                </a:solidFill>
+              <a:buChar char="–"/>
+            </a:pPr>
+            <a:r>
+              <a:rPr lang="en-US" sz="1650" dirty="0">
+                <a:solidFill>
+                  <a:srgbClr val="23282E"/>
+                </a:solidFill>
+                <a:latin typeface="Corbel" pitchFamily="34" charset="0"/>
+                <a:ea typeface="Corbel" pitchFamily="34" charset="-122"/>
+                <a:cs typeface="Corbel" pitchFamily="34" charset="-120"/>
               </a:rPr>
               <a:t>Quota — fills preset category targets non-randomly; resembles stratification without randomisation</a:t>
             </a:r>
-            <a:endParaRPr lang="en-US" sz="1500" dirty="0"/>
+            <a:endParaRPr lang="en-US" sz="1650" dirty="0"/>
           </a:p>
           <a:p>
             <a:pPr marL="342900" indent="-342900">
               <a:lnSpc>
-                <a:spcPct val="125000"/>
+                <a:spcPct val="130000"/>
               </a:lnSpc>
               <a:spcAft>
-                <a:spcPts val="800"/>
+                <a:spcPts val="1100"/>
               </a:spcAft>
               <a:buSzPct val="100000"/>
-              <a:buChar char="•"/>
-            </a:pPr>
-            <a:r>
-              <a:rPr lang="en-US" sz="1500" dirty="0">
-                <a:solidFill>
-                  <a:srgbClr val="374151"/>
-                </a:solidFill>
+              <a:buChar char="–"/>
+            </a:pPr>
+            <a:r>
+              <a:rPr lang="en-US" sz="1650" dirty="0">
+                <a:solidFill>
+                  <a:srgbClr val="23282E"/>
+                </a:solidFill>
+                <a:latin typeface="Corbel" pitchFamily="34" charset="0"/>
+                <a:ea typeface="Corbel" pitchFamily="34" charset="-122"/>
+                <a:cs typeface="Corbel" pitchFamily="34" charset="-120"/>
               </a:rPr>
               <a:t>Snowball — participants recruit others; necessary for hidden populations, but stays within networks</a:t>
             </a:r>
-            <a:endParaRPr lang="en-US" sz="1500" dirty="0"/>
-          </a:p>
-          <a:p>
-            <a:pPr marL="342900" indent="-342900">
-              <a:lnSpc>
-                <a:spcPct val="125000"/>
-              </a:lnSpc>
-              <a:spcAft>
-                <a:spcPts val="800"/>
-              </a:spcAft>
-              <a:buSzPct val="100000"/>
-              <a:buChar char="•"/>
-            </a:pPr>
-            <a:r>
-              <a:rPr lang="en-US" sz="1500" dirty="0">
-                <a:solidFill>
-                  <a:srgbClr val="374151"/>
-                </a:solidFill>
-              </a:rPr>
-              <a:t>Consecutive — every eligible patient over a defined period; the strongest non-probability option in clinical settings</a:t>
-            </a:r>
-            <a:endParaRPr lang="en-US" sz="1500" dirty="0"/>
+            <a:endParaRPr lang="en-US" sz="1650" dirty="0"/>
           </a:p>
         </p:txBody>
       </p:sp>
@@ -7565,8 +8252,8 @@
         </p:nvSpPr>
         <p:spPr>
           <a:xfrm>
-            <a:off x="8503920" y="4709160"/>
-            <a:ext cx="800000" cy="300000"/>
+            <a:off x="566928" y="4700016"/>
+            <a:ext cx="914400" cy="274320"/>
           </a:xfrm>
           <a:prstGeom prst="rect">
             <a:avLst/>
@@ -7581,10 +8268,13 @@
           <a:bodyPr/>
           <a:lstStyle>
             <a:lvl1pPr>
-              <a:defRPr sz="1000">
-                <a:solidFill>
-                  <a:srgbClr val="6B7280"/>
-                </a:solidFill>
+              <a:defRPr sz="900">
+                <a:solidFill>
+                  <a:srgbClr val="5F6B76"/>
+                </a:solidFill>
+                <a:latin typeface="Corbel"/>
+                <a:ea typeface="Corbel"/>
+                <a:cs typeface="Corbel"/>
               </a:defRPr>
             </a:lvl1pPr>
           </a:lstStyle>
@@ -7631,8 +8321,8 @@
         </p:nvSpPr>
         <p:spPr>
           <a:xfrm>
-            <a:off x="502920" y="292608"/>
-            <a:ext cx="8046720" cy="228600"/>
+            <a:off x="566928" y="384048"/>
+            <a:ext cx="7772400" cy="237744"/>
           </a:xfrm>
           <a:prstGeom prst="rect">
             <a:avLst/>
@@ -7648,14 +8338,17 @@
               <a:buNone/>
             </a:pPr>
             <a:r>
-              <a:rPr lang="en-US" sz="1100" b="1" spc="150" kern="0" dirty="0">
-                <a:solidFill>
-                  <a:srgbClr val="0066CC"/>
-                </a:solidFill>
+              <a:rPr lang="en-US" sz="1000" spc="200" kern="0" dirty="0">
+                <a:solidFill>
+                  <a:srgbClr val="9A6A3C"/>
+                </a:solidFill>
+                <a:latin typeface="Corbel" pitchFamily="34" charset="0"/>
+                <a:ea typeface="Corbel" pitchFamily="34" charset="-122"/>
+                <a:cs typeface="Corbel" pitchFamily="34" charset="-120"/>
               </a:rPr>
               <a:t>UNIT 7</a:t>
             </a:r>
-            <a:endParaRPr lang="en-US" sz="1100" dirty="0"/>
+            <a:endParaRPr lang="en-US" sz="1000" dirty="0"/>
           </a:p>
         </p:txBody>
       </p:sp>
@@ -7667,8 +8360,8 @@
         </p:nvSpPr>
         <p:spPr>
           <a:xfrm>
-            <a:off x="502920" y="548640"/>
-            <a:ext cx="8046720" cy="640080"/>
+            <a:off x="566928" y="658368"/>
+            <a:ext cx="7772400" cy="658368"/>
           </a:xfrm>
           <a:prstGeom prst="rect">
             <a:avLst/>
@@ -7681,30 +8374,56 @@
           <a:lstStyle/>
           <a:p>
             <a:pPr indent="0" marL="0">
+              <a:lnSpc>
+                <a:spcPct val="100000"/>
+              </a:lnSpc>
               <a:buNone/>
             </a:pPr>
             <a:r>
-              <a:rPr lang="en-US" sz="2400" b="1" dirty="0">
-                <a:solidFill>
-                  <a:srgbClr val="111827"/>
-                </a:solidFill>
+              <a:rPr lang="en-US" sz="2500" dirty="0">
+                <a:solidFill>
+                  <a:srgbClr val="1C3140"/>
+                </a:solidFill>
+                <a:latin typeface="Constantia" pitchFamily="34" charset="0"/>
+                <a:ea typeface="Constantia" pitchFamily="34" charset="-122"/>
+                <a:cs typeface="Constantia" pitchFamily="34" charset="-120"/>
               </a:rPr>
               <a:t>Non-probability sampling (2/2)</a:t>
             </a:r>
-            <a:endParaRPr lang="en-US" sz="2400" dirty="0"/>
-          </a:p>
-        </p:txBody>
-      </p:sp>
-      <p:sp>
-        <p:nvSpPr>
-          <p:cNvPr id="4" name="Text 2"/>
+            <a:endParaRPr lang="en-US" sz="2500" dirty="0"/>
+          </a:p>
+        </p:txBody>
+      </p:sp>
+      <p:sp>
+        <p:nvSpPr>
+          <p:cNvPr id="4" name="Shape 2"/>
           <p:cNvSpPr/>
           <p:nvPr/>
         </p:nvSpPr>
         <p:spPr>
           <a:xfrm>
-            <a:off x="685800" y="1325880"/>
-            <a:ext cx="7772400" cy="3200400"/>
+            <a:off x="566928" y="1335024"/>
+            <a:ext cx="566928" cy="20117"/>
+          </a:xfrm>
+          <a:prstGeom prst="rect">
+            <a:avLst/>
+          </a:prstGeom>
+          <a:solidFill>
+            <a:srgbClr val="9A6A3C"/>
+          </a:solidFill>
+          <a:ln/>
+        </p:spPr>
+      </p:sp>
+      <p:sp>
+        <p:nvSpPr>
+          <p:cNvPr id="5" name="Text 3"/>
+          <p:cNvSpPr/>
+          <p:nvPr/>
+        </p:nvSpPr>
+        <p:spPr>
+          <a:xfrm>
+            <a:off x="713232" y="1664208"/>
+            <a:ext cx="7498080" cy="2788920"/>
           </a:xfrm>
           <a:prstGeom prst="rect">
             <a:avLst/>
@@ -7718,19 +8437,46 @@
           <a:p>
             <a:pPr marL="342900" indent="-342900">
               <a:lnSpc>
-                <a:spcPct val="125000"/>
+                <a:spcPct val="130000"/>
               </a:lnSpc>
               <a:spcAft>
-                <a:spcPts val="800"/>
+                <a:spcPts val="1100"/>
               </a:spcAft>
               <a:buSzPct val="100000"/>
-              <a:buChar char="•"/>
+              <a:buChar char="–"/>
             </a:pPr>
             <a:r>
               <a:rPr lang="en-US" sz="1500" dirty="0">
                 <a:solidFill>
-                  <a:srgbClr val="374151"/>
-                </a:solidFill>
+                  <a:srgbClr val="23282E"/>
+                </a:solidFill>
+                <a:latin typeface="Corbel" pitchFamily="34" charset="0"/>
+                <a:ea typeface="Corbel" pitchFamily="34" charset="-122"/>
+                <a:cs typeface="Corbel" pitchFamily="34" charset="-120"/>
+              </a:rPr>
+              <a:t>Consecutive — every eligible patient over a defined period; the strongest non-probability option in clinical settings</a:t>
+            </a:r>
+            <a:endParaRPr lang="en-US" sz="1500" dirty="0"/>
+          </a:p>
+          <a:p>
+            <a:pPr marL="342900" indent="-342900">
+              <a:lnSpc>
+                <a:spcPct val="130000"/>
+              </a:lnSpc>
+              <a:spcAft>
+                <a:spcPts val="1100"/>
+              </a:spcAft>
+              <a:buSzPct val="100000"/>
+              <a:buChar char="–"/>
+            </a:pPr>
+            <a:r>
+              <a:rPr lang="en-US" sz="1500" dirty="0">
+                <a:solidFill>
+                  <a:srgbClr val="23282E"/>
+                </a:solidFill>
+                <a:latin typeface="Corbel" pitchFamily="34" charset="0"/>
+                <a:ea typeface="Corbel" pitchFamily="34" charset="-122"/>
+                <a:cs typeface="Corbel" pitchFamily="34" charset="-120"/>
               </a:rPr>
               <a:t>These cannot support statistical generalisation, and analyses reporting confidence intervals from them should be read cautiously</a:t>
             </a:r>
@@ -7750,8 +8496,8 @@
         </p:nvSpPr>
         <p:spPr>
           <a:xfrm>
-            <a:off x="8503920" y="4709160"/>
-            <a:ext cx="800000" cy="300000"/>
+            <a:off x="566928" y="4700016"/>
+            <a:ext cx="914400" cy="274320"/>
           </a:xfrm>
           <a:prstGeom prst="rect">
             <a:avLst/>
@@ -7766,10 +8512,13 @@
           <a:bodyPr/>
           <a:lstStyle>
             <a:lvl1pPr>
-              <a:defRPr sz="1000">
-                <a:solidFill>
-                  <a:srgbClr val="6B7280"/>
-                </a:solidFill>
+              <a:defRPr sz="900">
+                <a:solidFill>
+                  <a:srgbClr val="5F6B76"/>
+                </a:solidFill>
+                <a:latin typeface="Corbel"/>
+                <a:ea typeface="Corbel"/>
+                <a:cs typeface="Corbel"/>
               </a:defRPr>
             </a:lvl1pPr>
           </a:lstStyle>
@@ -7834,7 +8583,7 @@
     </a:clrScheme>
     <a:fontScheme name="Office">
       <a:majorFont>
-        <a:latin typeface="Calibri Light" panose="020F0302020204030204"/>
+        <a:latin typeface="Constantia"/>
         <a:ea typeface=""/>
         <a:cs typeface=""/>
         <a:font script="Jpan" typeface="游ゴシック Light"/>
@@ -7886,7 +8635,7 @@
         <a:font script="Tfng" typeface="Ebrima"/>
       </a:majorFont>
       <a:minorFont>
-        <a:latin typeface="Calibri" panose="020F0502020204030204"/>
+        <a:latin typeface="Corbel"/>
         <a:ea typeface=""/>
         <a:cs typeface=""/>
         <a:font script="Jpan" typeface="游ゴシック"/>
